--- a/Lec-12-13-multi-cycle-cpu.pptx
+++ b/Lec-12-13-multi-cycle-cpu.pptx
@@ -5,7 +5,7 @@
     <p:sldMasterId id="2147483648" r:id="rId1"/>
   </p:sldMasterIdLst>
   <p:notesMasterIdLst>
-    <p:notesMasterId r:id="rId19"/>
+    <p:notesMasterId r:id="rId29"/>
   </p:notesMasterIdLst>
   <p:sldIdLst>
     <p:sldId id="337" r:id="rId2"/>
@@ -25,6 +25,16 @@
     <p:sldId id="433" r:id="rId16"/>
     <p:sldId id="434" r:id="rId17"/>
     <p:sldId id="435" r:id="rId18"/>
+    <p:sldId id="442" r:id="rId19"/>
+    <p:sldId id="443" r:id="rId20"/>
+    <p:sldId id="436" r:id="rId21"/>
+    <p:sldId id="437" r:id="rId22"/>
+    <p:sldId id="344" r:id="rId23"/>
+    <p:sldId id="345" r:id="rId24"/>
+    <p:sldId id="438" r:id="rId25"/>
+    <p:sldId id="439" r:id="rId26"/>
+    <p:sldId id="440" r:id="rId27"/>
+    <p:sldId id="441" r:id="rId28"/>
   </p:sldIdLst>
   <p:sldSz cx="9144000" cy="6858000" type="screen4x3"/>
   <p:notesSz cx="6858000" cy="9144000"/>
@@ -306,7 +316,7 @@
               <a:pPr>
                 <a:defRPr/>
               </a:pPr>
-              <a:t>2/13/2026</a:t>
+              <a:t>2/16/2026</a:t>
             </a:fld>
             <a:endParaRPr lang="en-US"/>
           </a:p>
@@ -914,6 +924,90 @@
         </p:txBody>
       </p:sp>
     </p:spTree>
+  </p:cSld>
+  <p:clrMapOvr>
+    <a:masterClrMapping/>
+  </p:clrMapOvr>
+</p:notes>
+</file>
+
+<file path=ppt/notesSlides/notesSlide2.xml><?xml version="1.0" encoding="utf-8"?>
+<p:notes xmlns:a="http://schemas.openxmlformats.org/drawingml/2006/main" xmlns:r="http://schemas.openxmlformats.org/officeDocument/2006/relationships" xmlns:p="http://schemas.openxmlformats.org/presentationml/2006/main">
+  <p:cSld>
+    <p:spTree>
+      <p:nvGrpSpPr>
+        <p:cNvPr id="1" name=""/>
+        <p:cNvGrpSpPr/>
+        <p:nvPr/>
+      </p:nvGrpSpPr>
+      <p:grpSpPr>
+        <a:xfrm>
+          <a:off x="0" y="0"/>
+          <a:ext cx="0" cy="0"/>
+          <a:chOff x="0" y="0"/>
+          <a:chExt cx="0" cy="0"/>
+        </a:xfrm>
+      </p:grpSpPr>
+      <p:sp>
+        <p:nvSpPr>
+          <p:cNvPr id="2" name="Slide Image Placeholder 1"/>
+          <p:cNvSpPr>
+            <a:spLocks noGrp="1" noRot="1" noChangeAspect="1"/>
+          </p:cNvSpPr>
+          <p:nvPr>
+            <p:ph type="sldImg"/>
+          </p:nvPr>
+        </p:nvSpPr>
+        <p:spPr/>
+      </p:sp>
+      <p:sp>
+        <p:nvSpPr>
+          <p:cNvPr id="3" name="Notes Placeholder 2"/>
+          <p:cNvSpPr>
+            <a:spLocks noGrp="1"/>
+          </p:cNvSpPr>
+          <p:nvPr>
+            <p:ph type="body" idx="1"/>
+          </p:nvPr>
+        </p:nvSpPr>
+        <p:spPr/>
+        <p:txBody>
+          <a:bodyPr/>
+          <a:lstStyle/>
+          <a:p>
+            <a:endParaRPr lang="en-US" dirty="0"/>
+          </a:p>
+        </p:txBody>
+      </p:sp>
+      <p:sp>
+        <p:nvSpPr>
+          <p:cNvPr id="4" name="Slide Number Placeholder 3"/>
+          <p:cNvSpPr>
+            <a:spLocks noGrp="1"/>
+          </p:cNvSpPr>
+          <p:nvPr>
+            <p:ph type="sldNum" sz="quarter" idx="5"/>
+          </p:nvPr>
+        </p:nvSpPr>
+        <p:spPr/>
+        <p:txBody>
+          <a:bodyPr/>
+          <a:lstStyle/>
+          <a:p>
+            <a:fld id="{5F79DCCC-EBE2-44AD-8EA0-6F319820E962}" type="slidenum">
+              <a:rPr lang="en-US" smtClean="0"/>
+              <a:t>23</a:t>
+            </a:fld>
+            <a:endParaRPr lang="en-US"/>
+          </a:p>
+        </p:txBody>
+      </p:sp>
+    </p:spTree>
+    <p:extLst>
+      <p:ext uri="{BB962C8B-B14F-4D97-AF65-F5344CB8AC3E}">
+        <p14:creationId xmlns:p14="http://schemas.microsoft.com/office/powerpoint/2010/main" val="1064622332"/>
+      </p:ext>
+    </p:extLst>
   </p:cSld>
   <p:clrMapOvr>
     <a:masterClrMapping/>
@@ -11873,6 +11967,815 @@
 </p:sld>
 </file>
 
+<file path=ppt/slides/slide18.xml><?xml version="1.0" encoding="utf-8"?>
+<p:sld xmlns:a="http://schemas.openxmlformats.org/drawingml/2006/main" xmlns:r="http://schemas.openxmlformats.org/officeDocument/2006/relationships" xmlns:p="http://schemas.openxmlformats.org/presentationml/2006/main">
+  <p:cSld>
+    <p:spTree>
+      <p:nvGrpSpPr>
+        <p:cNvPr id="1" name=""/>
+        <p:cNvGrpSpPr/>
+        <p:nvPr/>
+      </p:nvGrpSpPr>
+      <p:grpSpPr>
+        <a:xfrm>
+          <a:off x="0" y="0"/>
+          <a:ext cx="0" cy="0"/>
+          <a:chOff x="0" y="0"/>
+          <a:chExt cx="0" cy="0"/>
+        </a:xfrm>
+      </p:grpSpPr>
+      <p:sp>
+        <p:nvSpPr>
+          <p:cNvPr id="2" name="Title 1">
+            <a:extLst>
+              <a:ext uri="{FF2B5EF4-FFF2-40B4-BE49-F238E27FC236}">
+                <a16:creationId xmlns:a16="http://schemas.microsoft.com/office/drawing/2014/main" id="{5F0EE87D-7A4F-48EA-8E97-C963514FB91E}"/>
+              </a:ext>
+            </a:extLst>
+          </p:cNvPr>
+          <p:cNvSpPr>
+            <a:spLocks noGrp="1"/>
+          </p:cNvSpPr>
+          <p:nvPr>
+            <p:ph type="title"/>
+          </p:nvPr>
+        </p:nvSpPr>
+        <p:spPr/>
+        <p:txBody>
+          <a:bodyPr/>
+          <a:lstStyle/>
+          <a:p>
+            <a:r>
+              <a:rPr lang="en-US" dirty="0"/>
+              <a:t>Structure vs behavior</a:t>
+            </a:r>
+          </a:p>
+        </p:txBody>
+      </p:sp>
+      <p:sp>
+        <p:nvSpPr>
+          <p:cNvPr id="3" name="Content Placeholder 2">
+            <a:extLst>
+              <a:ext uri="{FF2B5EF4-FFF2-40B4-BE49-F238E27FC236}">
+                <a16:creationId xmlns:a16="http://schemas.microsoft.com/office/drawing/2014/main" id="{8972D3F2-BFDA-49C2-A0DA-DDE29752F55D}"/>
+              </a:ext>
+            </a:extLst>
+          </p:cNvPr>
+          <p:cNvSpPr>
+            <a:spLocks noGrp="1"/>
+          </p:cNvSpPr>
+          <p:nvPr>
+            <p:ph idx="1"/>
+          </p:nvPr>
+        </p:nvSpPr>
+        <p:spPr/>
+        <p:txBody>
+          <a:bodyPr/>
+          <a:lstStyle/>
+          <a:p>
+            <a:r>
+              <a:rPr lang="en-US" dirty="0"/>
+              <a:t>Labs require several things to be modeled structurally. NOT BEHAVIORALLY.</a:t>
+            </a:r>
+          </a:p>
+          <a:p>
+            <a:r>
+              <a:rPr lang="en-US" dirty="0"/>
+              <a:t>Purpose of the labs: develop conceptual understanding and depth.</a:t>
+            </a:r>
+          </a:p>
+          <a:p>
+            <a:r>
+              <a:rPr lang="en-US" dirty="0"/>
+              <a:t>GPT is fine. IF USED FOR IMPROVEMENT and not avoidance.</a:t>
+            </a:r>
+          </a:p>
+          <a:p>
+            <a:r>
+              <a:rPr lang="en-US" dirty="0"/>
+              <a:t>Attendance only if you show results to lab instructors.</a:t>
+            </a:r>
+          </a:p>
+          <a:p>
+            <a:r>
+              <a:rPr lang="en-US" dirty="0"/>
+              <a:t>Evaluation scheme update.</a:t>
+            </a:r>
+          </a:p>
+        </p:txBody>
+      </p:sp>
+      <p:sp>
+        <p:nvSpPr>
+          <p:cNvPr id="4" name="Date Placeholder 3">
+            <a:extLst>
+              <a:ext uri="{FF2B5EF4-FFF2-40B4-BE49-F238E27FC236}">
+                <a16:creationId xmlns:a16="http://schemas.microsoft.com/office/drawing/2014/main" id="{825F52EA-57EE-4285-97A7-C4F8E05397D9}"/>
+              </a:ext>
+            </a:extLst>
+          </p:cNvPr>
+          <p:cNvSpPr>
+            <a:spLocks noGrp="1"/>
+          </p:cNvSpPr>
+          <p:nvPr>
+            <p:ph type="dt" sz="half" idx="10"/>
+          </p:nvPr>
+        </p:nvSpPr>
+        <p:spPr/>
+        <p:txBody>
+          <a:bodyPr/>
+          <a:lstStyle/>
+          <a:p>
+            <a:pPr>
+              <a:defRPr/>
+            </a:pPr>
+            <a:r>
+              <a:rPr lang="en-US" dirty="0"/>
+              <a:t>21/12/2020</a:t>
+            </a:r>
+          </a:p>
+        </p:txBody>
+      </p:sp>
+      <p:sp>
+        <p:nvSpPr>
+          <p:cNvPr id="5" name="Slide Number Placeholder 4">
+            <a:extLst>
+              <a:ext uri="{FF2B5EF4-FFF2-40B4-BE49-F238E27FC236}">
+                <a16:creationId xmlns:a16="http://schemas.microsoft.com/office/drawing/2014/main" id="{CC71AA94-86FF-49A7-ADF6-268045D1ADE5}"/>
+              </a:ext>
+            </a:extLst>
+          </p:cNvPr>
+          <p:cNvSpPr>
+            <a:spLocks noGrp="1"/>
+          </p:cNvSpPr>
+          <p:nvPr>
+            <p:ph type="sldNum" sz="quarter" idx="12"/>
+          </p:nvPr>
+        </p:nvSpPr>
+        <p:spPr/>
+        <p:txBody>
+          <a:bodyPr/>
+          <a:lstStyle/>
+          <a:p>
+            <a:pPr>
+              <a:defRPr/>
+            </a:pPr>
+            <a:fld id="{CA887A73-1AE0-46F8-856A-18EA1CF30A1B}" type="slidenum">
+              <a:rPr lang="en-US" altLang="en-US" smtClean="0"/>
+              <a:pPr>
+                <a:defRPr/>
+              </a:pPr>
+              <a:t>18</a:t>
+            </a:fld>
+            <a:endParaRPr lang="en-US" altLang="en-US"/>
+          </a:p>
+        </p:txBody>
+      </p:sp>
+    </p:spTree>
+    <p:extLst>
+      <p:ext uri="{BB962C8B-B14F-4D97-AF65-F5344CB8AC3E}">
+        <p14:creationId xmlns:p14="http://schemas.microsoft.com/office/powerpoint/2010/main" val="1332540330"/>
+      </p:ext>
+    </p:extLst>
+  </p:cSld>
+  <p:clrMapOvr>
+    <a:masterClrMapping/>
+  </p:clrMapOvr>
+  <p:timing>
+    <p:tnLst>
+      <p:par>
+        <p:cTn id="1" dur="indefinite" restart="never" nodeType="tmRoot">
+          <p:childTnLst>
+            <p:seq concurrent="1" nextAc="seek">
+              <p:cTn id="2" dur="indefinite" nodeType="mainSeq">
+                <p:childTnLst>
+                  <p:par>
+                    <p:cTn id="3" fill="hold">
+                      <p:stCondLst>
+                        <p:cond delay="indefinite"/>
+                      </p:stCondLst>
+                      <p:childTnLst>
+                        <p:par>
+                          <p:cTn id="4" fill="hold">
+                            <p:stCondLst>
+                              <p:cond delay="0"/>
+                            </p:stCondLst>
+                            <p:childTnLst>
+                              <p:par>
+                                <p:cTn id="5" presetID="1" presetClass="entr" presetSubtype="0" fill="hold" grpId="0" nodeType="clickEffect">
+                                  <p:stCondLst>
+                                    <p:cond delay="0"/>
+                                  </p:stCondLst>
+                                  <p:childTnLst>
+                                    <p:set>
+                                      <p:cBhvr>
+                                        <p:cTn id="6" dur="1" fill="hold">
+                                          <p:stCondLst>
+                                            <p:cond delay="0"/>
+                                          </p:stCondLst>
+                                        </p:cTn>
+                                        <p:tgtEl>
+                                          <p:spTgt spid="3">
+                                            <p:txEl>
+                                              <p:pRg st="0" end="0"/>
+                                            </p:txEl>
+                                          </p:spTgt>
+                                        </p:tgtEl>
+                                        <p:attrNameLst>
+                                          <p:attrName>style.visibility</p:attrName>
+                                        </p:attrNameLst>
+                                      </p:cBhvr>
+                                      <p:to>
+                                        <p:strVal val="visible"/>
+                                      </p:to>
+                                    </p:set>
+                                  </p:childTnLst>
+                                </p:cTn>
+                              </p:par>
+                            </p:childTnLst>
+                          </p:cTn>
+                        </p:par>
+                      </p:childTnLst>
+                    </p:cTn>
+                  </p:par>
+                  <p:par>
+                    <p:cTn id="7" fill="hold">
+                      <p:stCondLst>
+                        <p:cond delay="indefinite"/>
+                      </p:stCondLst>
+                      <p:childTnLst>
+                        <p:par>
+                          <p:cTn id="8" fill="hold">
+                            <p:stCondLst>
+                              <p:cond delay="0"/>
+                            </p:stCondLst>
+                            <p:childTnLst>
+                              <p:par>
+                                <p:cTn id="9" presetID="1" presetClass="entr" presetSubtype="0" fill="hold" grpId="0" nodeType="clickEffect">
+                                  <p:stCondLst>
+                                    <p:cond delay="0"/>
+                                  </p:stCondLst>
+                                  <p:childTnLst>
+                                    <p:set>
+                                      <p:cBhvr>
+                                        <p:cTn id="10" dur="1" fill="hold">
+                                          <p:stCondLst>
+                                            <p:cond delay="0"/>
+                                          </p:stCondLst>
+                                        </p:cTn>
+                                        <p:tgtEl>
+                                          <p:spTgt spid="3">
+                                            <p:txEl>
+                                              <p:pRg st="1" end="1"/>
+                                            </p:txEl>
+                                          </p:spTgt>
+                                        </p:tgtEl>
+                                        <p:attrNameLst>
+                                          <p:attrName>style.visibility</p:attrName>
+                                        </p:attrNameLst>
+                                      </p:cBhvr>
+                                      <p:to>
+                                        <p:strVal val="visible"/>
+                                      </p:to>
+                                    </p:set>
+                                  </p:childTnLst>
+                                </p:cTn>
+                              </p:par>
+                            </p:childTnLst>
+                          </p:cTn>
+                        </p:par>
+                      </p:childTnLst>
+                    </p:cTn>
+                  </p:par>
+                  <p:par>
+                    <p:cTn id="11" fill="hold">
+                      <p:stCondLst>
+                        <p:cond delay="indefinite"/>
+                      </p:stCondLst>
+                      <p:childTnLst>
+                        <p:par>
+                          <p:cTn id="12" fill="hold">
+                            <p:stCondLst>
+                              <p:cond delay="0"/>
+                            </p:stCondLst>
+                            <p:childTnLst>
+                              <p:par>
+                                <p:cTn id="13" presetID="1" presetClass="entr" presetSubtype="0" fill="hold" grpId="0" nodeType="clickEffect">
+                                  <p:stCondLst>
+                                    <p:cond delay="0"/>
+                                  </p:stCondLst>
+                                  <p:childTnLst>
+                                    <p:set>
+                                      <p:cBhvr>
+                                        <p:cTn id="14" dur="1" fill="hold">
+                                          <p:stCondLst>
+                                            <p:cond delay="0"/>
+                                          </p:stCondLst>
+                                        </p:cTn>
+                                        <p:tgtEl>
+                                          <p:spTgt spid="3">
+                                            <p:txEl>
+                                              <p:pRg st="2" end="2"/>
+                                            </p:txEl>
+                                          </p:spTgt>
+                                        </p:tgtEl>
+                                        <p:attrNameLst>
+                                          <p:attrName>style.visibility</p:attrName>
+                                        </p:attrNameLst>
+                                      </p:cBhvr>
+                                      <p:to>
+                                        <p:strVal val="visible"/>
+                                      </p:to>
+                                    </p:set>
+                                  </p:childTnLst>
+                                </p:cTn>
+                              </p:par>
+                            </p:childTnLst>
+                          </p:cTn>
+                        </p:par>
+                      </p:childTnLst>
+                    </p:cTn>
+                  </p:par>
+                  <p:par>
+                    <p:cTn id="15" fill="hold">
+                      <p:stCondLst>
+                        <p:cond delay="indefinite"/>
+                      </p:stCondLst>
+                      <p:childTnLst>
+                        <p:par>
+                          <p:cTn id="16" fill="hold">
+                            <p:stCondLst>
+                              <p:cond delay="0"/>
+                            </p:stCondLst>
+                            <p:childTnLst>
+                              <p:par>
+                                <p:cTn id="17" presetID="1" presetClass="entr" presetSubtype="0" fill="hold" grpId="0" nodeType="clickEffect">
+                                  <p:stCondLst>
+                                    <p:cond delay="0"/>
+                                  </p:stCondLst>
+                                  <p:childTnLst>
+                                    <p:set>
+                                      <p:cBhvr>
+                                        <p:cTn id="18" dur="1" fill="hold">
+                                          <p:stCondLst>
+                                            <p:cond delay="0"/>
+                                          </p:stCondLst>
+                                        </p:cTn>
+                                        <p:tgtEl>
+                                          <p:spTgt spid="3">
+                                            <p:txEl>
+                                              <p:pRg st="3" end="3"/>
+                                            </p:txEl>
+                                          </p:spTgt>
+                                        </p:tgtEl>
+                                        <p:attrNameLst>
+                                          <p:attrName>style.visibility</p:attrName>
+                                        </p:attrNameLst>
+                                      </p:cBhvr>
+                                      <p:to>
+                                        <p:strVal val="visible"/>
+                                      </p:to>
+                                    </p:set>
+                                  </p:childTnLst>
+                                </p:cTn>
+                              </p:par>
+                            </p:childTnLst>
+                          </p:cTn>
+                        </p:par>
+                      </p:childTnLst>
+                    </p:cTn>
+                  </p:par>
+                  <p:par>
+                    <p:cTn id="19" fill="hold">
+                      <p:stCondLst>
+                        <p:cond delay="indefinite"/>
+                      </p:stCondLst>
+                      <p:childTnLst>
+                        <p:par>
+                          <p:cTn id="20" fill="hold">
+                            <p:stCondLst>
+                              <p:cond delay="0"/>
+                            </p:stCondLst>
+                            <p:childTnLst>
+                              <p:par>
+                                <p:cTn id="21" presetID="1" presetClass="entr" presetSubtype="0" fill="hold" grpId="0" nodeType="clickEffect">
+                                  <p:stCondLst>
+                                    <p:cond delay="0"/>
+                                  </p:stCondLst>
+                                  <p:childTnLst>
+                                    <p:set>
+                                      <p:cBhvr>
+                                        <p:cTn id="22" dur="1" fill="hold">
+                                          <p:stCondLst>
+                                            <p:cond delay="0"/>
+                                          </p:stCondLst>
+                                        </p:cTn>
+                                        <p:tgtEl>
+                                          <p:spTgt spid="3">
+                                            <p:txEl>
+                                              <p:pRg st="4" end="4"/>
+                                            </p:txEl>
+                                          </p:spTgt>
+                                        </p:tgtEl>
+                                        <p:attrNameLst>
+                                          <p:attrName>style.visibility</p:attrName>
+                                        </p:attrNameLst>
+                                      </p:cBhvr>
+                                      <p:to>
+                                        <p:strVal val="visible"/>
+                                      </p:to>
+                                    </p:set>
+                                  </p:childTnLst>
+                                </p:cTn>
+                              </p:par>
+                            </p:childTnLst>
+                          </p:cTn>
+                        </p:par>
+                      </p:childTnLst>
+                    </p:cTn>
+                  </p:par>
+                </p:childTnLst>
+              </p:cTn>
+              <p:prevCondLst>
+                <p:cond evt="onPrev" delay="0">
+                  <p:tgtEl>
+                    <p:sldTgt/>
+                  </p:tgtEl>
+                </p:cond>
+              </p:prevCondLst>
+              <p:nextCondLst>
+                <p:cond evt="onNext" delay="0">
+                  <p:tgtEl>
+                    <p:sldTgt/>
+                  </p:tgtEl>
+                </p:cond>
+              </p:nextCondLst>
+            </p:seq>
+          </p:childTnLst>
+        </p:cTn>
+      </p:par>
+    </p:tnLst>
+    <p:bldLst>
+      <p:bldP spid="3" grpId="0" build="p"/>
+    </p:bldLst>
+  </p:timing>
+</p:sld>
+</file>
+
+<file path=ppt/slides/slide19.xml><?xml version="1.0" encoding="utf-8"?>
+<p:sld xmlns:a="http://schemas.openxmlformats.org/drawingml/2006/main" xmlns:r="http://schemas.openxmlformats.org/officeDocument/2006/relationships" xmlns:p="http://schemas.openxmlformats.org/presentationml/2006/main">
+  <p:cSld>
+    <p:spTree>
+      <p:nvGrpSpPr>
+        <p:cNvPr id="1" name=""/>
+        <p:cNvGrpSpPr/>
+        <p:nvPr/>
+      </p:nvGrpSpPr>
+      <p:grpSpPr>
+        <a:xfrm>
+          <a:off x="0" y="0"/>
+          <a:ext cx="0" cy="0"/>
+          <a:chOff x="0" y="0"/>
+          <a:chExt cx="0" cy="0"/>
+        </a:xfrm>
+      </p:grpSpPr>
+      <p:sp>
+        <p:nvSpPr>
+          <p:cNvPr id="2" name="Title 1">
+            <a:extLst>
+              <a:ext uri="{FF2B5EF4-FFF2-40B4-BE49-F238E27FC236}">
+                <a16:creationId xmlns:a16="http://schemas.microsoft.com/office/drawing/2014/main" id="{602B78FD-3110-401E-8641-954F4FC12699}"/>
+              </a:ext>
+            </a:extLst>
+          </p:cNvPr>
+          <p:cNvSpPr>
+            <a:spLocks noGrp="1"/>
+          </p:cNvSpPr>
+          <p:nvPr>
+            <p:ph type="title"/>
+          </p:nvPr>
+        </p:nvSpPr>
+        <p:spPr/>
+        <p:txBody>
+          <a:bodyPr/>
+          <a:lstStyle/>
+          <a:p>
+            <a:r>
+              <a:rPr lang="en-US" dirty="0"/>
+              <a:t>Updated evaluation</a:t>
+            </a:r>
+          </a:p>
+        </p:txBody>
+      </p:sp>
+      <p:sp>
+        <p:nvSpPr>
+          <p:cNvPr id="3" name="Content Placeholder 2">
+            <a:extLst>
+              <a:ext uri="{FF2B5EF4-FFF2-40B4-BE49-F238E27FC236}">
+                <a16:creationId xmlns:a16="http://schemas.microsoft.com/office/drawing/2014/main" id="{0CBB832E-2072-4AAE-A44B-64EC8095E298}"/>
+              </a:ext>
+            </a:extLst>
+          </p:cNvPr>
+          <p:cNvSpPr>
+            <a:spLocks noGrp="1"/>
+          </p:cNvSpPr>
+          <p:nvPr>
+            <p:ph idx="1"/>
+          </p:nvPr>
+        </p:nvSpPr>
+        <p:spPr/>
+        <p:txBody>
+          <a:bodyPr/>
+          <a:lstStyle/>
+          <a:p>
+            <a:pPr>
+              <a:spcBef>
+                <a:spcPts val="100"/>
+              </a:spcBef>
+              <a:buFontTx/>
+              <a:buChar char="-"/>
+            </a:pPr>
+            <a:r>
+              <a:rPr lang="en-US" sz="3600" dirty="0">
+                <a:solidFill>
+                  <a:schemeClr val="tx1">
+                    <a:lumMod val="50000"/>
+                    <a:lumOff val="50000"/>
+                  </a:schemeClr>
+                </a:solidFill>
+              </a:rPr>
+              <a:t>Midsemester exam: 25% (50 marks)</a:t>
+            </a:r>
+          </a:p>
+          <a:p>
+            <a:pPr>
+              <a:spcBef>
+                <a:spcPts val="100"/>
+              </a:spcBef>
+              <a:buFontTx/>
+              <a:buChar char="-"/>
+            </a:pPr>
+            <a:r>
+              <a:rPr lang="en-US" sz="3600" dirty="0">
+                <a:solidFill>
+                  <a:schemeClr val="tx1">
+                    <a:lumMod val="50000"/>
+                    <a:lumOff val="50000"/>
+                  </a:schemeClr>
+                </a:solidFill>
+              </a:rPr>
+              <a:t>Comprehensive exam: 35% (70 marks)</a:t>
+            </a:r>
+          </a:p>
+          <a:p>
+            <a:pPr>
+              <a:spcBef>
+                <a:spcPts val="100"/>
+              </a:spcBef>
+              <a:buFontTx/>
+              <a:buChar char="-"/>
+            </a:pPr>
+            <a:r>
+              <a:rPr lang="en-US" sz="3600" dirty="0">
+                <a:solidFill>
+                  <a:schemeClr val="tx1">
+                    <a:lumMod val="50000"/>
+                    <a:lumOff val="50000"/>
+                  </a:schemeClr>
+                </a:solidFill>
+              </a:rPr>
+              <a:t>In-class quizzes and attendance: </a:t>
+            </a:r>
+            <a:r>
+              <a:rPr lang="en-US" sz="3600" strike="sngStrike" dirty="0">
+                <a:solidFill>
+                  <a:schemeClr val="tx1">
+                    <a:lumMod val="50000"/>
+                    <a:lumOff val="50000"/>
+                  </a:schemeClr>
+                </a:solidFill>
+              </a:rPr>
+              <a:t>15%</a:t>
+            </a:r>
+            <a:r>
+              <a:rPr lang="en-US" sz="3600" dirty="0">
+                <a:solidFill>
+                  <a:schemeClr val="tx1">
+                    <a:lumMod val="50000"/>
+                    <a:lumOff val="50000"/>
+                  </a:schemeClr>
+                </a:solidFill>
+              </a:rPr>
+              <a:t> 10% (30 marks)</a:t>
+            </a:r>
+          </a:p>
+          <a:p>
+            <a:pPr>
+              <a:spcBef>
+                <a:spcPts val="100"/>
+              </a:spcBef>
+              <a:buFontTx/>
+              <a:buChar char="-"/>
+            </a:pPr>
+            <a:r>
+              <a:rPr lang="en-US" sz="3600" dirty="0">
+                <a:solidFill>
+                  <a:schemeClr val="tx1">
+                    <a:lumMod val="50000"/>
+                    <a:lumOff val="50000"/>
+                  </a:schemeClr>
+                </a:solidFill>
+              </a:rPr>
+              <a:t>Labs:</a:t>
+            </a:r>
+          </a:p>
+          <a:p>
+            <a:pPr lvl="1">
+              <a:spcBef>
+                <a:spcPts val="100"/>
+              </a:spcBef>
+              <a:buFontTx/>
+              <a:buChar char="-"/>
+            </a:pPr>
+            <a:r>
+              <a:rPr lang="en-US" dirty="0"/>
+              <a:t>Lab tasks completion: </a:t>
+            </a:r>
+            <a:r>
+              <a:rPr lang="en-US" strike="sngStrike" dirty="0"/>
+              <a:t>7.5%</a:t>
+            </a:r>
+            <a:r>
+              <a:rPr lang="en-US" dirty="0"/>
+              <a:t> 5% (1.5 marks per lab)</a:t>
+            </a:r>
+          </a:p>
+          <a:p>
+            <a:pPr lvl="1">
+              <a:spcBef>
+                <a:spcPts val="100"/>
+              </a:spcBef>
+              <a:buFontTx/>
+              <a:buChar char="-"/>
+            </a:pPr>
+            <a:r>
+              <a:rPr lang="en-US" dirty="0">
+                <a:solidFill>
+                  <a:schemeClr val="tx1">
+                    <a:lumMod val="50000"/>
+                    <a:lumOff val="50000"/>
+                  </a:schemeClr>
+                </a:solidFill>
+              </a:rPr>
+              <a:t>Evaluative take-home: </a:t>
+            </a:r>
+            <a:r>
+              <a:rPr lang="en-US" strike="sngStrike" dirty="0"/>
+              <a:t>7.5%</a:t>
+            </a:r>
+            <a:r>
+              <a:rPr lang="en-US" dirty="0"/>
+              <a:t> 0 (</a:t>
+            </a:r>
+            <a:r>
+              <a:rPr lang="en-US" strike="sngStrike" dirty="0"/>
+              <a:t>1.5</a:t>
+            </a:r>
+            <a:r>
+              <a:rPr lang="en-US" dirty="0"/>
+              <a:t> marks per lab)</a:t>
+            </a:r>
+            <a:endParaRPr lang="en-US" dirty="0">
+              <a:solidFill>
+                <a:schemeClr val="tx1">
+                  <a:lumMod val="50000"/>
+                  <a:lumOff val="50000"/>
+                </a:schemeClr>
+              </a:solidFill>
+            </a:endParaRPr>
+          </a:p>
+          <a:p>
+            <a:pPr>
+              <a:spcBef>
+                <a:spcPts val="100"/>
+              </a:spcBef>
+              <a:buFontTx/>
+              <a:buChar char="-"/>
+            </a:pPr>
+            <a:r>
+              <a:rPr lang="en-US" sz="3600" dirty="0">
+                <a:solidFill>
+                  <a:schemeClr val="tx1">
+                    <a:lumMod val="50000"/>
+                    <a:lumOff val="50000"/>
+                  </a:schemeClr>
+                </a:solidFill>
+              </a:rPr>
+              <a:t>Lab exam: </a:t>
+            </a:r>
+            <a:r>
+              <a:rPr lang="en-US" sz="3600" strike="sngStrike" dirty="0">
+                <a:solidFill>
+                  <a:schemeClr val="tx1">
+                    <a:lumMod val="50000"/>
+                    <a:lumOff val="50000"/>
+                  </a:schemeClr>
+                </a:solidFill>
+              </a:rPr>
+              <a:t>10%</a:t>
+            </a:r>
+            <a:r>
+              <a:rPr lang="en-US" sz="3600" dirty="0">
+                <a:solidFill>
+                  <a:schemeClr val="tx1">
+                    <a:lumMod val="50000"/>
+                    <a:lumOff val="50000"/>
+                  </a:schemeClr>
+                </a:solidFill>
+              </a:rPr>
+              <a:t> 25%</a:t>
+            </a:r>
+          </a:p>
+        </p:txBody>
+      </p:sp>
+      <p:sp>
+        <p:nvSpPr>
+          <p:cNvPr id="4" name="Date Placeholder 3">
+            <a:extLst>
+              <a:ext uri="{FF2B5EF4-FFF2-40B4-BE49-F238E27FC236}">
+                <a16:creationId xmlns:a16="http://schemas.microsoft.com/office/drawing/2014/main" id="{57D8B80A-4991-4299-A1EB-F7B053C4B8E5}"/>
+              </a:ext>
+            </a:extLst>
+          </p:cNvPr>
+          <p:cNvSpPr>
+            <a:spLocks noGrp="1"/>
+          </p:cNvSpPr>
+          <p:nvPr>
+            <p:ph type="dt" sz="half" idx="10"/>
+          </p:nvPr>
+        </p:nvSpPr>
+        <p:spPr/>
+        <p:txBody>
+          <a:bodyPr/>
+          <a:lstStyle/>
+          <a:p>
+            <a:pPr>
+              <a:defRPr/>
+            </a:pPr>
+            <a:r>
+              <a:rPr lang="en-US"/>
+              <a:t>21/12/2020</a:t>
+            </a:r>
+          </a:p>
+        </p:txBody>
+      </p:sp>
+      <p:sp>
+        <p:nvSpPr>
+          <p:cNvPr id="5" name="Slide Number Placeholder 4">
+            <a:extLst>
+              <a:ext uri="{FF2B5EF4-FFF2-40B4-BE49-F238E27FC236}">
+                <a16:creationId xmlns:a16="http://schemas.microsoft.com/office/drawing/2014/main" id="{E2DE1003-7696-4795-9CC6-61BCE9F961A2}"/>
+              </a:ext>
+            </a:extLst>
+          </p:cNvPr>
+          <p:cNvSpPr>
+            <a:spLocks noGrp="1"/>
+          </p:cNvSpPr>
+          <p:nvPr>
+            <p:ph type="sldNum" sz="quarter" idx="12"/>
+          </p:nvPr>
+        </p:nvSpPr>
+        <p:spPr/>
+        <p:txBody>
+          <a:bodyPr/>
+          <a:lstStyle/>
+          <a:p>
+            <a:pPr>
+              <a:defRPr/>
+            </a:pPr>
+            <a:fld id="{CA887A73-1AE0-46F8-856A-18EA1CF30A1B}" type="slidenum">
+              <a:rPr lang="en-US" altLang="en-US" smtClean="0"/>
+              <a:pPr>
+                <a:defRPr/>
+              </a:pPr>
+              <a:t>19</a:t>
+            </a:fld>
+            <a:endParaRPr lang="en-US" altLang="en-US"/>
+          </a:p>
+        </p:txBody>
+      </p:sp>
+    </p:spTree>
+    <p:extLst>
+      <p:ext uri="{BB962C8B-B14F-4D97-AF65-F5344CB8AC3E}">
+        <p14:creationId xmlns:p14="http://schemas.microsoft.com/office/powerpoint/2010/main" val="1038361526"/>
+      </p:ext>
+    </p:extLst>
+  </p:cSld>
+  <p:clrMapOvr>
+    <a:masterClrMapping/>
+  </p:clrMapOvr>
+</p:sld>
+</file>
+
 <file path=ppt/slides/slide2.xml><?xml version="1.0" encoding="utf-8"?>
 <p:sld xmlns:a="http://schemas.openxmlformats.org/drawingml/2006/main" xmlns:r="http://schemas.openxmlformats.org/officeDocument/2006/relationships" xmlns:p="http://schemas.openxmlformats.org/presentationml/2006/main">
   <p:cSld>
@@ -12802,6 +13705,5865 @@
 </p:sld>
 </file>
 
+<file path=ppt/slides/slide20.xml><?xml version="1.0" encoding="utf-8"?>
+<p:sld xmlns:a="http://schemas.openxmlformats.org/drawingml/2006/main" xmlns:r="http://schemas.openxmlformats.org/officeDocument/2006/relationships" xmlns:p="http://schemas.openxmlformats.org/presentationml/2006/main">
+  <p:cSld>
+    <p:spTree>
+      <p:nvGrpSpPr>
+        <p:cNvPr id="1" name=""/>
+        <p:cNvGrpSpPr/>
+        <p:nvPr/>
+      </p:nvGrpSpPr>
+      <p:grpSpPr>
+        <a:xfrm>
+          <a:off x="0" y="0"/>
+          <a:ext cx="0" cy="0"/>
+          <a:chOff x="0" y="0"/>
+          <a:chExt cx="0" cy="0"/>
+        </a:xfrm>
+      </p:grpSpPr>
+      <p:sp>
+        <p:nvSpPr>
+          <p:cNvPr id="2" name="Title 1">
+            <a:extLst>
+              <a:ext uri="{FF2B5EF4-FFF2-40B4-BE49-F238E27FC236}">
+                <a16:creationId xmlns:a16="http://schemas.microsoft.com/office/drawing/2014/main" id="{7CA66C2A-CA34-4E01-AD5C-78E835848737}"/>
+              </a:ext>
+            </a:extLst>
+          </p:cNvPr>
+          <p:cNvSpPr>
+            <a:spLocks noGrp="1"/>
+          </p:cNvSpPr>
+          <p:nvPr>
+            <p:ph type="title"/>
+          </p:nvPr>
+        </p:nvSpPr>
+        <p:spPr/>
+        <p:txBody>
+          <a:bodyPr/>
+          <a:lstStyle/>
+          <a:p>
+            <a:r>
+              <a:rPr lang="en-US" dirty="0"/>
+              <a:t>Microprogramming</a:t>
+            </a:r>
+          </a:p>
+        </p:txBody>
+      </p:sp>
+      <p:sp>
+        <p:nvSpPr>
+          <p:cNvPr id="3" name="Date Placeholder 2">
+            <a:extLst>
+              <a:ext uri="{FF2B5EF4-FFF2-40B4-BE49-F238E27FC236}">
+                <a16:creationId xmlns:a16="http://schemas.microsoft.com/office/drawing/2014/main" id="{9F47329B-4072-4E06-B738-820471EB1086}"/>
+              </a:ext>
+            </a:extLst>
+          </p:cNvPr>
+          <p:cNvSpPr>
+            <a:spLocks noGrp="1"/>
+          </p:cNvSpPr>
+          <p:nvPr>
+            <p:ph type="dt" sz="half" idx="10"/>
+          </p:nvPr>
+        </p:nvSpPr>
+        <p:spPr/>
+        <p:txBody>
+          <a:bodyPr/>
+          <a:lstStyle/>
+          <a:p>
+            <a:pPr>
+              <a:defRPr/>
+            </a:pPr>
+            <a:r>
+              <a:rPr lang="en-US"/>
+              <a:t>21/12/2020</a:t>
+            </a:r>
+          </a:p>
+        </p:txBody>
+      </p:sp>
+      <p:sp>
+        <p:nvSpPr>
+          <p:cNvPr id="4" name="Slide Number Placeholder 3">
+            <a:extLst>
+              <a:ext uri="{FF2B5EF4-FFF2-40B4-BE49-F238E27FC236}">
+                <a16:creationId xmlns:a16="http://schemas.microsoft.com/office/drawing/2014/main" id="{51BF07FB-2B66-45BE-B34D-AC1A7E92DB29}"/>
+              </a:ext>
+            </a:extLst>
+          </p:cNvPr>
+          <p:cNvSpPr>
+            <a:spLocks noGrp="1"/>
+          </p:cNvSpPr>
+          <p:nvPr>
+            <p:ph type="sldNum" sz="quarter" idx="12"/>
+          </p:nvPr>
+        </p:nvSpPr>
+        <p:spPr/>
+        <p:txBody>
+          <a:bodyPr/>
+          <a:lstStyle/>
+          <a:p>
+            <a:pPr>
+              <a:defRPr/>
+            </a:pPr>
+            <a:fld id="{E79D9D01-1391-45E0-A9C5-C04635A43651}" type="slidenum">
+              <a:rPr lang="en-US" altLang="en-US" smtClean="0"/>
+              <a:pPr>
+                <a:defRPr/>
+              </a:pPr>
+              <a:t>20</a:t>
+            </a:fld>
+            <a:endParaRPr lang="en-US" altLang="en-US"/>
+          </a:p>
+        </p:txBody>
+      </p:sp>
+      <p:sp>
+        <p:nvSpPr>
+          <p:cNvPr id="5" name="Text Placeholder 4">
+            <a:extLst>
+              <a:ext uri="{FF2B5EF4-FFF2-40B4-BE49-F238E27FC236}">
+                <a16:creationId xmlns:a16="http://schemas.microsoft.com/office/drawing/2014/main" id="{4C6DBEC6-862C-44B4-B6E4-A872E69D351E}"/>
+              </a:ext>
+            </a:extLst>
+          </p:cNvPr>
+          <p:cNvSpPr>
+            <a:spLocks noGrp="1"/>
+          </p:cNvSpPr>
+          <p:nvPr>
+            <p:ph type="body" sz="quarter" idx="13"/>
+          </p:nvPr>
+        </p:nvSpPr>
+        <p:spPr>
+          <a:xfrm>
+            <a:off x="685800" y="2667000"/>
+            <a:ext cx="7772400" cy="3124200"/>
+          </a:xfrm>
+        </p:spPr>
+        <p:txBody>
+          <a:bodyPr>
+            <a:normAutofit fontScale="85000" lnSpcReduction="10000"/>
+          </a:bodyPr>
+          <a:lstStyle/>
+          <a:p>
+            <a:pPr marL="0" indent="0">
+              <a:buNone/>
+            </a:pPr>
+            <a:r>
+              <a:rPr lang="en-US" dirty="0"/>
+              <a:t>Pain points for hardwired FSM control</a:t>
+            </a:r>
+          </a:p>
+          <a:p>
+            <a:r>
+              <a:rPr lang="en-US" dirty="0"/>
+              <a:t>State explosion for rich ISAs</a:t>
+            </a:r>
+          </a:p>
+          <a:p>
+            <a:r>
+              <a:rPr lang="en-US" dirty="0"/>
+              <a:t>Difficult to modify / extend instruction set in a modular fashion</a:t>
+            </a:r>
+          </a:p>
+          <a:p>
+            <a:r>
+              <a:rPr lang="en-US" dirty="0"/>
+              <a:t>Difficult verification (verify everything after any modification</a:t>
+            </a:r>
+          </a:p>
+          <a:p>
+            <a:r>
+              <a:rPr lang="en-US" dirty="0"/>
+              <a:t>Irregular structure – difficult to optimize in silicon</a:t>
+            </a:r>
+          </a:p>
+        </p:txBody>
+      </p:sp>
+    </p:spTree>
+    <p:extLst>
+      <p:ext uri="{BB962C8B-B14F-4D97-AF65-F5344CB8AC3E}">
+        <p14:creationId xmlns:p14="http://schemas.microsoft.com/office/powerpoint/2010/main" val="3753598193"/>
+      </p:ext>
+    </p:extLst>
+  </p:cSld>
+  <p:clrMapOvr>
+    <a:masterClrMapping/>
+  </p:clrMapOvr>
+  <p:timing>
+    <p:tnLst>
+      <p:par>
+        <p:cTn id="1" dur="indefinite" restart="never" nodeType="tmRoot">
+          <p:childTnLst>
+            <p:seq concurrent="1" nextAc="seek">
+              <p:cTn id="2" dur="indefinite" nodeType="mainSeq">
+                <p:childTnLst>
+                  <p:par>
+                    <p:cTn id="3" fill="hold">
+                      <p:stCondLst>
+                        <p:cond delay="indefinite"/>
+                      </p:stCondLst>
+                      <p:childTnLst>
+                        <p:par>
+                          <p:cTn id="4" fill="hold">
+                            <p:stCondLst>
+                              <p:cond delay="0"/>
+                            </p:stCondLst>
+                            <p:childTnLst>
+                              <p:par>
+                                <p:cTn id="5" presetID="1" presetClass="entr" presetSubtype="0" fill="hold" grpId="0" nodeType="clickEffect">
+                                  <p:stCondLst>
+                                    <p:cond delay="0"/>
+                                  </p:stCondLst>
+                                  <p:childTnLst>
+                                    <p:set>
+                                      <p:cBhvr>
+                                        <p:cTn id="6" dur="1" fill="hold">
+                                          <p:stCondLst>
+                                            <p:cond delay="0"/>
+                                          </p:stCondLst>
+                                        </p:cTn>
+                                        <p:tgtEl>
+                                          <p:spTgt spid="5">
+                                            <p:txEl>
+                                              <p:pRg st="0" end="0"/>
+                                            </p:txEl>
+                                          </p:spTgt>
+                                        </p:tgtEl>
+                                        <p:attrNameLst>
+                                          <p:attrName>style.visibility</p:attrName>
+                                        </p:attrNameLst>
+                                      </p:cBhvr>
+                                      <p:to>
+                                        <p:strVal val="visible"/>
+                                      </p:to>
+                                    </p:set>
+                                  </p:childTnLst>
+                                </p:cTn>
+                              </p:par>
+                            </p:childTnLst>
+                          </p:cTn>
+                        </p:par>
+                      </p:childTnLst>
+                    </p:cTn>
+                  </p:par>
+                  <p:par>
+                    <p:cTn id="7" fill="hold">
+                      <p:stCondLst>
+                        <p:cond delay="indefinite"/>
+                      </p:stCondLst>
+                      <p:childTnLst>
+                        <p:par>
+                          <p:cTn id="8" fill="hold">
+                            <p:stCondLst>
+                              <p:cond delay="0"/>
+                            </p:stCondLst>
+                            <p:childTnLst>
+                              <p:par>
+                                <p:cTn id="9" presetID="1" presetClass="entr" presetSubtype="0" fill="hold" grpId="0" nodeType="clickEffect">
+                                  <p:stCondLst>
+                                    <p:cond delay="0"/>
+                                  </p:stCondLst>
+                                  <p:childTnLst>
+                                    <p:set>
+                                      <p:cBhvr>
+                                        <p:cTn id="10" dur="1" fill="hold">
+                                          <p:stCondLst>
+                                            <p:cond delay="0"/>
+                                          </p:stCondLst>
+                                        </p:cTn>
+                                        <p:tgtEl>
+                                          <p:spTgt spid="5">
+                                            <p:txEl>
+                                              <p:pRg st="1" end="1"/>
+                                            </p:txEl>
+                                          </p:spTgt>
+                                        </p:tgtEl>
+                                        <p:attrNameLst>
+                                          <p:attrName>style.visibility</p:attrName>
+                                        </p:attrNameLst>
+                                      </p:cBhvr>
+                                      <p:to>
+                                        <p:strVal val="visible"/>
+                                      </p:to>
+                                    </p:set>
+                                  </p:childTnLst>
+                                </p:cTn>
+                              </p:par>
+                            </p:childTnLst>
+                          </p:cTn>
+                        </p:par>
+                      </p:childTnLst>
+                    </p:cTn>
+                  </p:par>
+                  <p:par>
+                    <p:cTn id="11" fill="hold">
+                      <p:stCondLst>
+                        <p:cond delay="indefinite"/>
+                      </p:stCondLst>
+                      <p:childTnLst>
+                        <p:par>
+                          <p:cTn id="12" fill="hold">
+                            <p:stCondLst>
+                              <p:cond delay="0"/>
+                            </p:stCondLst>
+                            <p:childTnLst>
+                              <p:par>
+                                <p:cTn id="13" presetID="1" presetClass="entr" presetSubtype="0" fill="hold" grpId="0" nodeType="clickEffect">
+                                  <p:stCondLst>
+                                    <p:cond delay="0"/>
+                                  </p:stCondLst>
+                                  <p:childTnLst>
+                                    <p:set>
+                                      <p:cBhvr>
+                                        <p:cTn id="14" dur="1" fill="hold">
+                                          <p:stCondLst>
+                                            <p:cond delay="0"/>
+                                          </p:stCondLst>
+                                        </p:cTn>
+                                        <p:tgtEl>
+                                          <p:spTgt spid="5">
+                                            <p:txEl>
+                                              <p:pRg st="2" end="2"/>
+                                            </p:txEl>
+                                          </p:spTgt>
+                                        </p:tgtEl>
+                                        <p:attrNameLst>
+                                          <p:attrName>style.visibility</p:attrName>
+                                        </p:attrNameLst>
+                                      </p:cBhvr>
+                                      <p:to>
+                                        <p:strVal val="visible"/>
+                                      </p:to>
+                                    </p:set>
+                                  </p:childTnLst>
+                                </p:cTn>
+                              </p:par>
+                            </p:childTnLst>
+                          </p:cTn>
+                        </p:par>
+                      </p:childTnLst>
+                    </p:cTn>
+                  </p:par>
+                  <p:par>
+                    <p:cTn id="15" fill="hold">
+                      <p:stCondLst>
+                        <p:cond delay="indefinite"/>
+                      </p:stCondLst>
+                      <p:childTnLst>
+                        <p:par>
+                          <p:cTn id="16" fill="hold">
+                            <p:stCondLst>
+                              <p:cond delay="0"/>
+                            </p:stCondLst>
+                            <p:childTnLst>
+                              <p:par>
+                                <p:cTn id="17" presetID="1" presetClass="entr" presetSubtype="0" fill="hold" grpId="0" nodeType="clickEffect">
+                                  <p:stCondLst>
+                                    <p:cond delay="0"/>
+                                  </p:stCondLst>
+                                  <p:childTnLst>
+                                    <p:set>
+                                      <p:cBhvr>
+                                        <p:cTn id="18" dur="1" fill="hold">
+                                          <p:stCondLst>
+                                            <p:cond delay="0"/>
+                                          </p:stCondLst>
+                                        </p:cTn>
+                                        <p:tgtEl>
+                                          <p:spTgt spid="5">
+                                            <p:txEl>
+                                              <p:pRg st="3" end="3"/>
+                                            </p:txEl>
+                                          </p:spTgt>
+                                        </p:tgtEl>
+                                        <p:attrNameLst>
+                                          <p:attrName>style.visibility</p:attrName>
+                                        </p:attrNameLst>
+                                      </p:cBhvr>
+                                      <p:to>
+                                        <p:strVal val="visible"/>
+                                      </p:to>
+                                    </p:set>
+                                  </p:childTnLst>
+                                </p:cTn>
+                              </p:par>
+                            </p:childTnLst>
+                          </p:cTn>
+                        </p:par>
+                      </p:childTnLst>
+                    </p:cTn>
+                  </p:par>
+                  <p:par>
+                    <p:cTn id="19" fill="hold">
+                      <p:stCondLst>
+                        <p:cond delay="indefinite"/>
+                      </p:stCondLst>
+                      <p:childTnLst>
+                        <p:par>
+                          <p:cTn id="20" fill="hold">
+                            <p:stCondLst>
+                              <p:cond delay="0"/>
+                            </p:stCondLst>
+                            <p:childTnLst>
+                              <p:par>
+                                <p:cTn id="21" presetID="1" presetClass="entr" presetSubtype="0" fill="hold" grpId="0" nodeType="clickEffect">
+                                  <p:stCondLst>
+                                    <p:cond delay="0"/>
+                                  </p:stCondLst>
+                                  <p:childTnLst>
+                                    <p:set>
+                                      <p:cBhvr>
+                                        <p:cTn id="22" dur="1" fill="hold">
+                                          <p:stCondLst>
+                                            <p:cond delay="0"/>
+                                          </p:stCondLst>
+                                        </p:cTn>
+                                        <p:tgtEl>
+                                          <p:spTgt spid="5">
+                                            <p:txEl>
+                                              <p:pRg st="4" end="4"/>
+                                            </p:txEl>
+                                          </p:spTgt>
+                                        </p:tgtEl>
+                                        <p:attrNameLst>
+                                          <p:attrName>style.visibility</p:attrName>
+                                        </p:attrNameLst>
+                                      </p:cBhvr>
+                                      <p:to>
+                                        <p:strVal val="visible"/>
+                                      </p:to>
+                                    </p:set>
+                                  </p:childTnLst>
+                                </p:cTn>
+                              </p:par>
+                            </p:childTnLst>
+                          </p:cTn>
+                        </p:par>
+                      </p:childTnLst>
+                    </p:cTn>
+                  </p:par>
+                </p:childTnLst>
+              </p:cTn>
+              <p:prevCondLst>
+                <p:cond evt="onPrev" delay="0">
+                  <p:tgtEl>
+                    <p:sldTgt/>
+                  </p:tgtEl>
+                </p:cond>
+              </p:prevCondLst>
+              <p:nextCondLst>
+                <p:cond evt="onNext" delay="0">
+                  <p:tgtEl>
+                    <p:sldTgt/>
+                  </p:tgtEl>
+                </p:cond>
+              </p:nextCondLst>
+            </p:seq>
+          </p:childTnLst>
+        </p:cTn>
+      </p:par>
+    </p:tnLst>
+    <p:bldLst>
+      <p:bldP spid="5" grpId="0" build="p"/>
+    </p:bldLst>
+  </p:timing>
+</p:sld>
+</file>
+
+<file path=ppt/slides/slide21.xml><?xml version="1.0" encoding="utf-8"?>
+<p:sld xmlns:a="http://schemas.openxmlformats.org/drawingml/2006/main" xmlns:r="http://schemas.openxmlformats.org/officeDocument/2006/relationships" xmlns:p="http://schemas.openxmlformats.org/presentationml/2006/main">
+  <p:cSld>
+    <p:spTree>
+      <p:nvGrpSpPr>
+        <p:cNvPr id="1" name=""/>
+        <p:cNvGrpSpPr/>
+        <p:nvPr/>
+      </p:nvGrpSpPr>
+      <p:grpSpPr>
+        <a:xfrm>
+          <a:off x="0" y="0"/>
+          <a:ext cx="0" cy="0"/>
+          <a:chOff x="0" y="0"/>
+          <a:chExt cx="0" cy="0"/>
+        </a:xfrm>
+      </p:grpSpPr>
+      <p:sp>
+        <p:nvSpPr>
+          <p:cNvPr id="2" name="Title 1">
+            <a:extLst>
+              <a:ext uri="{FF2B5EF4-FFF2-40B4-BE49-F238E27FC236}">
+                <a16:creationId xmlns:a16="http://schemas.microsoft.com/office/drawing/2014/main" id="{48E6199D-6238-4C0E-B579-342DDB23F3E1}"/>
+              </a:ext>
+            </a:extLst>
+          </p:cNvPr>
+          <p:cNvSpPr>
+            <a:spLocks noGrp="1"/>
+          </p:cNvSpPr>
+          <p:nvPr>
+            <p:ph type="title"/>
+          </p:nvPr>
+        </p:nvSpPr>
+        <p:spPr>
+          <a:xfrm>
+            <a:off x="152400" y="53975"/>
+            <a:ext cx="6629400" cy="1195386"/>
+          </a:xfrm>
+        </p:spPr>
+        <p:txBody>
+          <a:bodyPr/>
+          <a:lstStyle/>
+          <a:p>
+            <a:r>
+              <a:rPr lang="en-US" dirty="0"/>
+              <a:t>A computer inside the computer – making control itself a program</a:t>
+            </a:r>
+          </a:p>
+        </p:txBody>
+      </p:sp>
+      <p:sp>
+        <p:nvSpPr>
+          <p:cNvPr id="3" name="Content Placeholder 2">
+            <a:extLst>
+              <a:ext uri="{FF2B5EF4-FFF2-40B4-BE49-F238E27FC236}">
+                <a16:creationId xmlns:a16="http://schemas.microsoft.com/office/drawing/2014/main" id="{51AEBEDE-B459-4B37-B01E-8D82C671EB48}"/>
+              </a:ext>
+            </a:extLst>
+          </p:cNvPr>
+          <p:cNvSpPr>
+            <a:spLocks noGrp="1"/>
+          </p:cNvSpPr>
+          <p:nvPr>
+            <p:ph idx="1"/>
+          </p:nvPr>
+        </p:nvSpPr>
+        <p:spPr/>
+        <p:txBody>
+          <a:bodyPr>
+            <a:normAutofit lnSpcReduction="10000"/>
+          </a:bodyPr>
+          <a:lstStyle/>
+          <a:p>
+            <a:r>
+              <a:rPr lang="en-US" dirty="0"/>
+              <a:t>Break up instruction processing into </a:t>
+            </a:r>
+            <a:r>
+              <a:rPr lang="en-US" i="1" dirty="0"/>
+              <a:t>microinstructions</a:t>
+            </a:r>
+            <a:endParaRPr lang="en-US" dirty="0"/>
+          </a:p>
+          <a:p>
+            <a:r>
+              <a:rPr lang="en-US" dirty="0"/>
+              <a:t>Several microinstructions </a:t>
+            </a:r>
+            <a:r>
+              <a:rPr lang="en-US" dirty="0">
+                <a:sym typeface="Wingdings" panose="05000000000000000000" pitchFamily="2" charset="2"/>
+              </a:rPr>
+              <a:t> single instruction</a:t>
+            </a:r>
+          </a:p>
+          <a:p>
+            <a:r>
+              <a:rPr lang="en-US" dirty="0">
+                <a:sym typeface="Wingdings" panose="05000000000000000000" pitchFamily="2" charset="2"/>
+              </a:rPr>
+              <a:t>FSM State  microinstruction</a:t>
+            </a:r>
+          </a:p>
+          <a:p>
+            <a:r>
+              <a:rPr lang="en-US" dirty="0">
+                <a:sym typeface="Wingdings" panose="05000000000000000000" pitchFamily="2" charset="2"/>
+              </a:rPr>
+              <a:t>Control signals for each microinstruction stored in ROM</a:t>
+            </a:r>
+          </a:p>
+          <a:p>
+            <a:r>
+              <a:rPr lang="en-US" dirty="0"/>
+              <a:t>µPC (Micro-Program Counter): Points to the current micro-instruction</a:t>
+            </a:r>
+          </a:p>
+          <a:p>
+            <a:r>
+              <a:rPr lang="en-US" dirty="0"/>
+              <a:t>Address Select Logic: Decides the next µPC (state transition in our FSM)</a:t>
+            </a:r>
+          </a:p>
+        </p:txBody>
+      </p:sp>
+      <p:sp>
+        <p:nvSpPr>
+          <p:cNvPr id="4" name="Date Placeholder 3">
+            <a:extLst>
+              <a:ext uri="{FF2B5EF4-FFF2-40B4-BE49-F238E27FC236}">
+                <a16:creationId xmlns:a16="http://schemas.microsoft.com/office/drawing/2014/main" id="{E9B97D55-59A9-4A12-A815-48B7D6D3F4F5}"/>
+              </a:ext>
+            </a:extLst>
+          </p:cNvPr>
+          <p:cNvSpPr>
+            <a:spLocks noGrp="1"/>
+          </p:cNvSpPr>
+          <p:nvPr>
+            <p:ph type="dt" sz="half" idx="10"/>
+          </p:nvPr>
+        </p:nvSpPr>
+        <p:spPr/>
+        <p:txBody>
+          <a:bodyPr/>
+          <a:lstStyle/>
+          <a:p>
+            <a:pPr>
+              <a:defRPr/>
+            </a:pPr>
+            <a:r>
+              <a:rPr lang="en-US" dirty="0"/>
+              <a:t>21/12/2020</a:t>
+            </a:r>
+          </a:p>
+        </p:txBody>
+      </p:sp>
+      <p:sp>
+        <p:nvSpPr>
+          <p:cNvPr id="5" name="Slide Number Placeholder 4">
+            <a:extLst>
+              <a:ext uri="{FF2B5EF4-FFF2-40B4-BE49-F238E27FC236}">
+                <a16:creationId xmlns:a16="http://schemas.microsoft.com/office/drawing/2014/main" id="{46575471-E449-4068-B307-B037EA2747D9}"/>
+              </a:ext>
+            </a:extLst>
+          </p:cNvPr>
+          <p:cNvSpPr>
+            <a:spLocks noGrp="1"/>
+          </p:cNvSpPr>
+          <p:nvPr>
+            <p:ph type="sldNum" sz="quarter" idx="12"/>
+          </p:nvPr>
+        </p:nvSpPr>
+        <p:spPr/>
+        <p:txBody>
+          <a:bodyPr/>
+          <a:lstStyle/>
+          <a:p>
+            <a:pPr>
+              <a:defRPr/>
+            </a:pPr>
+            <a:fld id="{CA887A73-1AE0-46F8-856A-18EA1CF30A1B}" type="slidenum">
+              <a:rPr lang="en-US" altLang="en-US" smtClean="0"/>
+              <a:pPr>
+                <a:defRPr/>
+              </a:pPr>
+              <a:t>21</a:t>
+            </a:fld>
+            <a:endParaRPr lang="en-US" altLang="en-US"/>
+          </a:p>
+        </p:txBody>
+      </p:sp>
+    </p:spTree>
+    <p:extLst>
+      <p:ext uri="{BB962C8B-B14F-4D97-AF65-F5344CB8AC3E}">
+        <p14:creationId xmlns:p14="http://schemas.microsoft.com/office/powerpoint/2010/main" val="1973291126"/>
+      </p:ext>
+    </p:extLst>
+  </p:cSld>
+  <p:clrMapOvr>
+    <a:masterClrMapping/>
+  </p:clrMapOvr>
+  <p:timing>
+    <p:tnLst>
+      <p:par>
+        <p:cTn id="1" dur="indefinite" restart="never" nodeType="tmRoot">
+          <p:childTnLst>
+            <p:seq concurrent="1" nextAc="seek">
+              <p:cTn id="2" dur="indefinite" nodeType="mainSeq">
+                <p:childTnLst>
+                  <p:par>
+                    <p:cTn id="3" fill="hold">
+                      <p:stCondLst>
+                        <p:cond delay="indefinite"/>
+                      </p:stCondLst>
+                      <p:childTnLst>
+                        <p:par>
+                          <p:cTn id="4" fill="hold">
+                            <p:stCondLst>
+                              <p:cond delay="0"/>
+                            </p:stCondLst>
+                            <p:childTnLst>
+                              <p:par>
+                                <p:cTn id="5" presetID="1" presetClass="entr" presetSubtype="0" fill="hold" grpId="0" nodeType="clickEffect">
+                                  <p:stCondLst>
+                                    <p:cond delay="0"/>
+                                  </p:stCondLst>
+                                  <p:childTnLst>
+                                    <p:set>
+                                      <p:cBhvr>
+                                        <p:cTn id="6" dur="1" fill="hold">
+                                          <p:stCondLst>
+                                            <p:cond delay="0"/>
+                                          </p:stCondLst>
+                                        </p:cTn>
+                                        <p:tgtEl>
+                                          <p:spTgt spid="3">
+                                            <p:txEl>
+                                              <p:pRg st="0" end="0"/>
+                                            </p:txEl>
+                                          </p:spTgt>
+                                        </p:tgtEl>
+                                        <p:attrNameLst>
+                                          <p:attrName>style.visibility</p:attrName>
+                                        </p:attrNameLst>
+                                      </p:cBhvr>
+                                      <p:to>
+                                        <p:strVal val="visible"/>
+                                      </p:to>
+                                    </p:set>
+                                  </p:childTnLst>
+                                </p:cTn>
+                              </p:par>
+                            </p:childTnLst>
+                          </p:cTn>
+                        </p:par>
+                      </p:childTnLst>
+                    </p:cTn>
+                  </p:par>
+                  <p:par>
+                    <p:cTn id="7" fill="hold">
+                      <p:stCondLst>
+                        <p:cond delay="indefinite"/>
+                      </p:stCondLst>
+                      <p:childTnLst>
+                        <p:par>
+                          <p:cTn id="8" fill="hold">
+                            <p:stCondLst>
+                              <p:cond delay="0"/>
+                            </p:stCondLst>
+                            <p:childTnLst>
+                              <p:par>
+                                <p:cTn id="9" presetID="1" presetClass="entr" presetSubtype="0" fill="hold" grpId="0" nodeType="clickEffect">
+                                  <p:stCondLst>
+                                    <p:cond delay="0"/>
+                                  </p:stCondLst>
+                                  <p:childTnLst>
+                                    <p:set>
+                                      <p:cBhvr>
+                                        <p:cTn id="10" dur="1" fill="hold">
+                                          <p:stCondLst>
+                                            <p:cond delay="0"/>
+                                          </p:stCondLst>
+                                        </p:cTn>
+                                        <p:tgtEl>
+                                          <p:spTgt spid="3">
+                                            <p:txEl>
+                                              <p:pRg st="1" end="1"/>
+                                            </p:txEl>
+                                          </p:spTgt>
+                                        </p:tgtEl>
+                                        <p:attrNameLst>
+                                          <p:attrName>style.visibility</p:attrName>
+                                        </p:attrNameLst>
+                                      </p:cBhvr>
+                                      <p:to>
+                                        <p:strVal val="visible"/>
+                                      </p:to>
+                                    </p:set>
+                                  </p:childTnLst>
+                                </p:cTn>
+                              </p:par>
+                            </p:childTnLst>
+                          </p:cTn>
+                        </p:par>
+                      </p:childTnLst>
+                    </p:cTn>
+                  </p:par>
+                  <p:par>
+                    <p:cTn id="11" fill="hold">
+                      <p:stCondLst>
+                        <p:cond delay="indefinite"/>
+                      </p:stCondLst>
+                      <p:childTnLst>
+                        <p:par>
+                          <p:cTn id="12" fill="hold">
+                            <p:stCondLst>
+                              <p:cond delay="0"/>
+                            </p:stCondLst>
+                            <p:childTnLst>
+                              <p:par>
+                                <p:cTn id="13" presetID="1" presetClass="entr" presetSubtype="0" fill="hold" grpId="0" nodeType="clickEffect">
+                                  <p:stCondLst>
+                                    <p:cond delay="0"/>
+                                  </p:stCondLst>
+                                  <p:childTnLst>
+                                    <p:set>
+                                      <p:cBhvr>
+                                        <p:cTn id="14" dur="1" fill="hold">
+                                          <p:stCondLst>
+                                            <p:cond delay="0"/>
+                                          </p:stCondLst>
+                                        </p:cTn>
+                                        <p:tgtEl>
+                                          <p:spTgt spid="3">
+                                            <p:txEl>
+                                              <p:pRg st="2" end="2"/>
+                                            </p:txEl>
+                                          </p:spTgt>
+                                        </p:tgtEl>
+                                        <p:attrNameLst>
+                                          <p:attrName>style.visibility</p:attrName>
+                                        </p:attrNameLst>
+                                      </p:cBhvr>
+                                      <p:to>
+                                        <p:strVal val="visible"/>
+                                      </p:to>
+                                    </p:set>
+                                  </p:childTnLst>
+                                </p:cTn>
+                              </p:par>
+                            </p:childTnLst>
+                          </p:cTn>
+                        </p:par>
+                      </p:childTnLst>
+                    </p:cTn>
+                  </p:par>
+                  <p:par>
+                    <p:cTn id="15" fill="hold">
+                      <p:stCondLst>
+                        <p:cond delay="indefinite"/>
+                      </p:stCondLst>
+                      <p:childTnLst>
+                        <p:par>
+                          <p:cTn id="16" fill="hold">
+                            <p:stCondLst>
+                              <p:cond delay="0"/>
+                            </p:stCondLst>
+                            <p:childTnLst>
+                              <p:par>
+                                <p:cTn id="17" presetID="1" presetClass="entr" presetSubtype="0" fill="hold" grpId="0" nodeType="clickEffect">
+                                  <p:stCondLst>
+                                    <p:cond delay="0"/>
+                                  </p:stCondLst>
+                                  <p:childTnLst>
+                                    <p:set>
+                                      <p:cBhvr>
+                                        <p:cTn id="18" dur="1" fill="hold">
+                                          <p:stCondLst>
+                                            <p:cond delay="0"/>
+                                          </p:stCondLst>
+                                        </p:cTn>
+                                        <p:tgtEl>
+                                          <p:spTgt spid="3">
+                                            <p:txEl>
+                                              <p:pRg st="3" end="3"/>
+                                            </p:txEl>
+                                          </p:spTgt>
+                                        </p:tgtEl>
+                                        <p:attrNameLst>
+                                          <p:attrName>style.visibility</p:attrName>
+                                        </p:attrNameLst>
+                                      </p:cBhvr>
+                                      <p:to>
+                                        <p:strVal val="visible"/>
+                                      </p:to>
+                                    </p:set>
+                                  </p:childTnLst>
+                                </p:cTn>
+                              </p:par>
+                            </p:childTnLst>
+                          </p:cTn>
+                        </p:par>
+                      </p:childTnLst>
+                    </p:cTn>
+                  </p:par>
+                  <p:par>
+                    <p:cTn id="19" fill="hold">
+                      <p:stCondLst>
+                        <p:cond delay="indefinite"/>
+                      </p:stCondLst>
+                      <p:childTnLst>
+                        <p:par>
+                          <p:cTn id="20" fill="hold">
+                            <p:stCondLst>
+                              <p:cond delay="0"/>
+                            </p:stCondLst>
+                            <p:childTnLst>
+                              <p:par>
+                                <p:cTn id="21" presetID="1" presetClass="entr" presetSubtype="0" fill="hold" grpId="0" nodeType="clickEffect">
+                                  <p:stCondLst>
+                                    <p:cond delay="0"/>
+                                  </p:stCondLst>
+                                  <p:childTnLst>
+                                    <p:set>
+                                      <p:cBhvr>
+                                        <p:cTn id="22" dur="1" fill="hold">
+                                          <p:stCondLst>
+                                            <p:cond delay="0"/>
+                                          </p:stCondLst>
+                                        </p:cTn>
+                                        <p:tgtEl>
+                                          <p:spTgt spid="3">
+                                            <p:txEl>
+                                              <p:pRg st="4" end="4"/>
+                                            </p:txEl>
+                                          </p:spTgt>
+                                        </p:tgtEl>
+                                        <p:attrNameLst>
+                                          <p:attrName>style.visibility</p:attrName>
+                                        </p:attrNameLst>
+                                      </p:cBhvr>
+                                      <p:to>
+                                        <p:strVal val="visible"/>
+                                      </p:to>
+                                    </p:set>
+                                  </p:childTnLst>
+                                </p:cTn>
+                              </p:par>
+                            </p:childTnLst>
+                          </p:cTn>
+                        </p:par>
+                      </p:childTnLst>
+                    </p:cTn>
+                  </p:par>
+                  <p:par>
+                    <p:cTn id="23" fill="hold">
+                      <p:stCondLst>
+                        <p:cond delay="indefinite"/>
+                      </p:stCondLst>
+                      <p:childTnLst>
+                        <p:par>
+                          <p:cTn id="24" fill="hold">
+                            <p:stCondLst>
+                              <p:cond delay="0"/>
+                            </p:stCondLst>
+                            <p:childTnLst>
+                              <p:par>
+                                <p:cTn id="25" presetID="1" presetClass="entr" presetSubtype="0" fill="hold" grpId="0" nodeType="clickEffect">
+                                  <p:stCondLst>
+                                    <p:cond delay="0"/>
+                                  </p:stCondLst>
+                                  <p:childTnLst>
+                                    <p:set>
+                                      <p:cBhvr>
+                                        <p:cTn id="26" dur="1" fill="hold">
+                                          <p:stCondLst>
+                                            <p:cond delay="0"/>
+                                          </p:stCondLst>
+                                        </p:cTn>
+                                        <p:tgtEl>
+                                          <p:spTgt spid="3">
+                                            <p:txEl>
+                                              <p:pRg st="5" end="5"/>
+                                            </p:txEl>
+                                          </p:spTgt>
+                                        </p:tgtEl>
+                                        <p:attrNameLst>
+                                          <p:attrName>style.visibility</p:attrName>
+                                        </p:attrNameLst>
+                                      </p:cBhvr>
+                                      <p:to>
+                                        <p:strVal val="visible"/>
+                                      </p:to>
+                                    </p:set>
+                                  </p:childTnLst>
+                                </p:cTn>
+                              </p:par>
+                            </p:childTnLst>
+                          </p:cTn>
+                        </p:par>
+                      </p:childTnLst>
+                    </p:cTn>
+                  </p:par>
+                </p:childTnLst>
+              </p:cTn>
+              <p:prevCondLst>
+                <p:cond evt="onPrev" delay="0">
+                  <p:tgtEl>
+                    <p:sldTgt/>
+                  </p:tgtEl>
+                </p:cond>
+              </p:prevCondLst>
+              <p:nextCondLst>
+                <p:cond evt="onNext" delay="0">
+                  <p:tgtEl>
+                    <p:sldTgt/>
+                  </p:tgtEl>
+                </p:cond>
+              </p:nextCondLst>
+            </p:seq>
+          </p:childTnLst>
+        </p:cTn>
+      </p:par>
+    </p:tnLst>
+    <p:bldLst>
+      <p:bldP spid="3" grpId="0" build="p"/>
+    </p:bldLst>
+  </p:timing>
+</p:sld>
+</file>
+
+<file path=ppt/slides/slide22.xml><?xml version="1.0" encoding="utf-8"?>
+<p:sld xmlns:a="http://schemas.openxmlformats.org/drawingml/2006/main" xmlns:r="http://schemas.openxmlformats.org/officeDocument/2006/relationships" xmlns:p="http://schemas.openxmlformats.org/presentationml/2006/main">
+  <p:cSld>
+    <p:spTree>
+      <p:nvGrpSpPr>
+        <p:cNvPr id="1" name=""/>
+        <p:cNvGrpSpPr/>
+        <p:nvPr/>
+      </p:nvGrpSpPr>
+      <p:grpSpPr>
+        <a:xfrm>
+          <a:off x="0" y="0"/>
+          <a:ext cx="0" cy="0"/>
+          <a:chOff x="0" y="0"/>
+          <a:chExt cx="0" cy="0"/>
+        </a:xfrm>
+      </p:grpSpPr>
+      <p:sp>
+        <p:nvSpPr>
+          <p:cNvPr id="2" name="Title 1">
+            <a:extLst>
+              <a:ext uri="{FF2B5EF4-FFF2-40B4-BE49-F238E27FC236}">
+                <a16:creationId xmlns:a16="http://schemas.microsoft.com/office/drawing/2014/main" id="{D80AC3DC-F384-5322-E88A-FF4562B67963}"/>
+              </a:ext>
+            </a:extLst>
+          </p:cNvPr>
+          <p:cNvSpPr>
+            <a:spLocks noGrp="1"/>
+          </p:cNvSpPr>
+          <p:nvPr>
+            <p:ph type="title"/>
+          </p:nvPr>
+        </p:nvSpPr>
+        <p:spPr>
+          <a:xfrm>
+            <a:off x="85050" y="277671"/>
+            <a:ext cx="5452110" cy="790420"/>
+          </a:xfrm>
+        </p:spPr>
+        <p:txBody>
+          <a:bodyPr>
+            <a:noAutofit/>
+          </a:bodyPr>
+          <a:lstStyle/>
+          <a:p>
+            <a:r>
+              <a:rPr lang="en-US" dirty="0"/>
+              <a:t>Microprogramming – </a:t>
+            </a:r>
+            <a:r>
+              <a:rPr lang="en-US" dirty="0" err="1"/>
+              <a:t>datapath</a:t>
+            </a:r>
+            <a:endParaRPr lang="en-US" dirty="0"/>
+          </a:p>
+        </p:txBody>
+      </p:sp>
+      <p:sp>
+        <p:nvSpPr>
+          <p:cNvPr id="6" name="Slide Number Placeholder 5">
+            <a:extLst>
+              <a:ext uri="{FF2B5EF4-FFF2-40B4-BE49-F238E27FC236}">
+                <a16:creationId xmlns:a16="http://schemas.microsoft.com/office/drawing/2014/main" id="{CC8CF819-8B30-A34D-7BCA-CF118A7E87B8}"/>
+              </a:ext>
+            </a:extLst>
+          </p:cNvPr>
+          <p:cNvSpPr>
+            <a:spLocks noGrp="1"/>
+          </p:cNvSpPr>
+          <p:nvPr>
+            <p:ph type="sldNum" sz="quarter" idx="12"/>
+          </p:nvPr>
+        </p:nvSpPr>
+        <p:spPr/>
+        <p:txBody>
+          <a:bodyPr/>
+          <a:lstStyle/>
+          <a:p>
+            <a:fld id="{98AC3541-01C1-4CA5-B68F-FEE868C7D1AF}" type="slidenum">
+              <a:rPr lang="en-US" smtClean="0"/>
+              <a:t>22</a:t>
+            </a:fld>
+            <a:endParaRPr lang="en-US"/>
+          </a:p>
+        </p:txBody>
+      </p:sp>
+      <p:pic>
+        <p:nvPicPr>
+          <p:cNvPr id="9" name="Picture 8">
+            <a:extLst>
+              <a:ext uri="{FF2B5EF4-FFF2-40B4-BE49-F238E27FC236}">
+                <a16:creationId xmlns:a16="http://schemas.microsoft.com/office/drawing/2014/main" id="{119C3B05-9FB8-D933-1748-2E3F0E8DD574}"/>
+              </a:ext>
+            </a:extLst>
+          </p:cNvPr>
+          <p:cNvPicPr>
+            <a:picLocks noChangeAspect="1"/>
+          </p:cNvPicPr>
+          <p:nvPr/>
+        </p:nvPicPr>
+        <p:blipFill>
+          <a:blip r:embed="rId2"/>
+          <a:stretch>
+            <a:fillRect/>
+          </a:stretch>
+        </p:blipFill>
+        <p:spPr>
+          <a:xfrm>
+            <a:off x="304800" y="1371600"/>
+            <a:ext cx="8668424" cy="5136365"/>
+          </a:xfrm>
+          <a:prstGeom prst="rect">
+            <a:avLst/>
+          </a:prstGeom>
+        </p:spPr>
+      </p:pic>
+      <p:sp>
+        <p:nvSpPr>
+          <p:cNvPr id="10" name="Date Placeholder 3">
+            <a:extLst>
+              <a:ext uri="{FF2B5EF4-FFF2-40B4-BE49-F238E27FC236}">
+                <a16:creationId xmlns:a16="http://schemas.microsoft.com/office/drawing/2014/main" id="{4840807E-3F5B-45F6-927A-AD2AF6DDC3C3}"/>
+              </a:ext>
+            </a:extLst>
+          </p:cNvPr>
+          <p:cNvSpPr>
+            <a:spLocks noGrp="1"/>
+          </p:cNvSpPr>
+          <p:nvPr>
+            <p:ph type="dt" sz="half" idx="10"/>
+          </p:nvPr>
+        </p:nvSpPr>
+        <p:spPr>
+          <a:xfrm>
+            <a:off x="0" y="6599238"/>
+            <a:ext cx="1828800" cy="258762"/>
+          </a:xfrm>
+        </p:spPr>
+        <p:txBody>
+          <a:bodyPr/>
+          <a:lstStyle/>
+          <a:p>
+            <a:pPr>
+              <a:defRPr/>
+            </a:pPr>
+            <a:r>
+              <a:rPr lang="en-US" dirty="0"/>
+              <a:t>21/12/2020</a:t>
+            </a:r>
+          </a:p>
+        </p:txBody>
+      </p:sp>
+    </p:spTree>
+    <p:extLst>
+      <p:ext uri="{BB962C8B-B14F-4D97-AF65-F5344CB8AC3E}">
+        <p14:creationId xmlns:p14="http://schemas.microsoft.com/office/powerpoint/2010/main" val="411257426"/>
+      </p:ext>
+    </p:extLst>
+  </p:cSld>
+  <p:clrMapOvr>
+    <a:masterClrMapping/>
+  </p:clrMapOvr>
+  <p:timing>
+    <p:tnLst>
+      <p:par>
+        <p:cTn id="1" dur="indefinite" restart="never" nodeType="tmRoot">
+          <p:childTnLst>
+            <p:seq concurrent="1" nextAc="seek">
+              <p:cTn id="2" dur="indefinite" nodeType="mainSeq">
+                <p:childTnLst>
+                  <p:par>
+                    <p:cTn id="3" fill="hold">
+                      <p:stCondLst>
+                        <p:cond delay="indefinite"/>
+                      </p:stCondLst>
+                      <p:childTnLst>
+                        <p:par>
+                          <p:cTn id="4" fill="hold">
+                            <p:stCondLst>
+                              <p:cond delay="0"/>
+                            </p:stCondLst>
+                            <p:childTnLst>
+                              <p:par>
+                                <p:cTn id="5" presetID="1" presetClass="entr" presetSubtype="0" fill="hold" nodeType="clickEffect">
+                                  <p:stCondLst>
+                                    <p:cond delay="0"/>
+                                  </p:stCondLst>
+                                  <p:childTnLst>
+                                    <p:set>
+                                      <p:cBhvr>
+                                        <p:cTn id="6" dur="1" fill="hold">
+                                          <p:stCondLst>
+                                            <p:cond delay="0"/>
+                                          </p:stCondLst>
+                                        </p:cTn>
+                                        <p:tgtEl>
+                                          <p:spTgt spid="9"/>
+                                        </p:tgtEl>
+                                        <p:attrNameLst>
+                                          <p:attrName>style.visibility</p:attrName>
+                                        </p:attrNameLst>
+                                      </p:cBhvr>
+                                      <p:to>
+                                        <p:strVal val="visible"/>
+                                      </p:to>
+                                    </p:set>
+                                  </p:childTnLst>
+                                </p:cTn>
+                              </p:par>
+                            </p:childTnLst>
+                          </p:cTn>
+                        </p:par>
+                      </p:childTnLst>
+                    </p:cTn>
+                  </p:par>
+                </p:childTnLst>
+              </p:cTn>
+              <p:prevCondLst>
+                <p:cond evt="onPrev" delay="0">
+                  <p:tgtEl>
+                    <p:sldTgt/>
+                  </p:tgtEl>
+                </p:cond>
+              </p:prevCondLst>
+              <p:nextCondLst>
+                <p:cond evt="onNext" delay="0">
+                  <p:tgtEl>
+                    <p:sldTgt/>
+                  </p:tgtEl>
+                </p:cond>
+              </p:nextCondLst>
+            </p:seq>
+          </p:childTnLst>
+        </p:cTn>
+      </p:par>
+    </p:tnLst>
+  </p:timing>
+</p:sld>
+</file>
+
+<file path=ppt/slides/slide23.xml><?xml version="1.0" encoding="utf-8"?>
+<p:sld xmlns:a="http://schemas.openxmlformats.org/drawingml/2006/main" xmlns:r="http://schemas.openxmlformats.org/officeDocument/2006/relationships" xmlns:p="http://schemas.openxmlformats.org/presentationml/2006/main">
+  <p:cSld>
+    <p:spTree>
+      <p:nvGrpSpPr>
+        <p:cNvPr id="1" name=""/>
+        <p:cNvGrpSpPr/>
+        <p:nvPr/>
+      </p:nvGrpSpPr>
+      <p:grpSpPr>
+        <a:xfrm>
+          <a:off x="0" y="0"/>
+          <a:ext cx="0" cy="0"/>
+          <a:chOff x="0" y="0"/>
+          <a:chExt cx="0" cy="0"/>
+        </a:xfrm>
+      </p:grpSpPr>
+      <p:sp>
+        <p:nvSpPr>
+          <p:cNvPr id="2" name="Title 1">
+            <a:extLst>
+              <a:ext uri="{FF2B5EF4-FFF2-40B4-BE49-F238E27FC236}">
+                <a16:creationId xmlns:a16="http://schemas.microsoft.com/office/drawing/2014/main" id="{B727ADCE-A6D4-4A75-692E-D39D2B1DC9E2}"/>
+              </a:ext>
+            </a:extLst>
+          </p:cNvPr>
+          <p:cNvSpPr>
+            <a:spLocks noGrp="1"/>
+          </p:cNvSpPr>
+          <p:nvPr>
+            <p:ph type="title"/>
+          </p:nvPr>
+        </p:nvSpPr>
+        <p:spPr/>
+        <p:txBody>
+          <a:bodyPr/>
+          <a:lstStyle/>
+          <a:p>
+            <a:r>
+              <a:rPr lang="en-US" dirty="0"/>
+              <a:t>Microprogramming –</a:t>
+            </a:r>
+            <a:br>
+              <a:rPr lang="en-US" dirty="0"/>
+            </a:br>
+            <a:r>
+              <a:rPr lang="en-US" dirty="0"/>
+              <a:t>control</a:t>
+            </a:r>
+          </a:p>
+        </p:txBody>
+      </p:sp>
+      <p:sp>
+        <p:nvSpPr>
+          <p:cNvPr id="6" name="Slide Number Placeholder 5">
+            <a:extLst>
+              <a:ext uri="{FF2B5EF4-FFF2-40B4-BE49-F238E27FC236}">
+                <a16:creationId xmlns:a16="http://schemas.microsoft.com/office/drawing/2014/main" id="{93CF101B-B7FB-A4E3-71BF-C2604B2053D0}"/>
+              </a:ext>
+            </a:extLst>
+          </p:cNvPr>
+          <p:cNvSpPr>
+            <a:spLocks noGrp="1"/>
+          </p:cNvSpPr>
+          <p:nvPr>
+            <p:ph type="sldNum" sz="quarter" idx="12"/>
+          </p:nvPr>
+        </p:nvSpPr>
+        <p:spPr/>
+        <p:txBody>
+          <a:bodyPr/>
+          <a:lstStyle/>
+          <a:p>
+            <a:fld id="{98AC3541-01C1-4CA5-B68F-FEE868C7D1AF}" type="slidenum">
+              <a:rPr lang="en-US" smtClean="0"/>
+              <a:t>23</a:t>
+            </a:fld>
+            <a:endParaRPr lang="en-US"/>
+          </a:p>
+        </p:txBody>
+      </p:sp>
+      <p:pic>
+        <p:nvPicPr>
+          <p:cNvPr id="7" name="Content Placeholder 6">
+            <a:extLst>
+              <a:ext uri="{FF2B5EF4-FFF2-40B4-BE49-F238E27FC236}">
+                <a16:creationId xmlns:a16="http://schemas.microsoft.com/office/drawing/2014/main" id="{1C316549-946D-4BD2-099B-3050DF55911C}"/>
+              </a:ext>
+            </a:extLst>
+          </p:cNvPr>
+          <p:cNvPicPr>
+            <a:picLocks noGrp="1" noChangeAspect="1"/>
+          </p:cNvPicPr>
+          <p:nvPr>
+            <p:ph idx="1"/>
+          </p:nvPr>
+        </p:nvPicPr>
+        <p:blipFill>
+          <a:blip r:embed="rId3"/>
+          <a:stretch>
+            <a:fillRect/>
+          </a:stretch>
+        </p:blipFill>
+        <p:spPr>
+          <a:xfrm>
+            <a:off x="4243666" y="1211502"/>
+            <a:ext cx="4900334" cy="2903631"/>
+          </a:xfrm>
+          <a:prstGeom prst="rect">
+            <a:avLst/>
+          </a:prstGeom>
+        </p:spPr>
+      </p:pic>
+      <p:graphicFrame>
+        <p:nvGraphicFramePr>
+          <p:cNvPr id="8" name="Table 8">
+            <a:extLst>
+              <a:ext uri="{FF2B5EF4-FFF2-40B4-BE49-F238E27FC236}">
+                <a16:creationId xmlns:a16="http://schemas.microsoft.com/office/drawing/2014/main" id="{FB476FBA-A198-3196-51E0-7FC2E3526A9C}"/>
+              </a:ext>
+            </a:extLst>
+          </p:cNvPr>
+          <p:cNvGraphicFramePr>
+            <a:graphicFrameLocks noGrp="1"/>
+          </p:cNvGraphicFramePr>
+          <p:nvPr>
+            <p:extLst>
+              <p:ext uri="{D42A27DB-BD31-4B8C-83A1-F6EECF244321}">
+                <p14:modId xmlns:p14="http://schemas.microsoft.com/office/powerpoint/2010/main" val="3808471601"/>
+              </p:ext>
+            </p:extLst>
+          </p:nvPr>
+        </p:nvGraphicFramePr>
+        <p:xfrm>
+          <a:off x="70752" y="4255602"/>
+          <a:ext cx="9002496" cy="2221398"/>
+        </p:xfrm>
+        <a:graphic>
+          <a:graphicData uri="http://schemas.openxmlformats.org/drawingml/2006/table">
+            <a:tbl>
+              <a:tblPr firstRow="1" bandRow="1">
+                <a:tableStyleId>{5C22544A-7EE6-4342-B048-85BDC9FD1C3A}</a:tableStyleId>
+              </a:tblPr>
+              <a:tblGrid>
+                <a:gridCol w="533145">
+                  <a:extLst>
+                    <a:ext uri="{9D8B030D-6E8A-4147-A177-3AD203B41FA5}">
+                      <a16:colId xmlns:a16="http://schemas.microsoft.com/office/drawing/2014/main" val="3409475837"/>
+                    </a:ext>
+                  </a:extLst>
+                </a:gridCol>
+                <a:gridCol w="876067">
+                  <a:extLst>
+                    <a:ext uri="{9D8B030D-6E8A-4147-A177-3AD203B41FA5}">
+                      <a16:colId xmlns:a16="http://schemas.microsoft.com/office/drawing/2014/main" val="3145596914"/>
+                    </a:ext>
+                  </a:extLst>
+                </a:gridCol>
+                <a:gridCol w="383572">
+                  <a:extLst>
+                    <a:ext uri="{9D8B030D-6E8A-4147-A177-3AD203B41FA5}">
+                      <a16:colId xmlns:a16="http://schemas.microsoft.com/office/drawing/2014/main" val="2588116087"/>
+                    </a:ext>
+                  </a:extLst>
+                </a:gridCol>
+                <a:gridCol w="510017">
+                  <a:extLst>
+                    <a:ext uri="{9D8B030D-6E8A-4147-A177-3AD203B41FA5}">
+                      <a16:colId xmlns:a16="http://schemas.microsoft.com/office/drawing/2014/main" val="4269777236"/>
+                    </a:ext>
+                  </a:extLst>
+                </a:gridCol>
+                <a:gridCol w="533400">
+                  <a:extLst>
+                    <a:ext uri="{9D8B030D-6E8A-4147-A177-3AD203B41FA5}">
+                      <a16:colId xmlns:a16="http://schemas.microsoft.com/office/drawing/2014/main" val="1108492976"/>
+                    </a:ext>
+                  </a:extLst>
+                </a:gridCol>
+                <a:gridCol w="533400">
+                  <a:extLst>
+                    <a:ext uri="{9D8B030D-6E8A-4147-A177-3AD203B41FA5}">
+                      <a16:colId xmlns:a16="http://schemas.microsoft.com/office/drawing/2014/main" val="1870815114"/>
+                    </a:ext>
+                  </a:extLst>
+                </a:gridCol>
+                <a:gridCol w="381000">
+                  <a:extLst>
+                    <a:ext uri="{9D8B030D-6E8A-4147-A177-3AD203B41FA5}">
+                      <a16:colId xmlns:a16="http://schemas.microsoft.com/office/drawing/2014/main" val="3168479161"/>
+                    </a:ext>
+                  </a:extLst>
+                </a:gridCol>
+                <a:gridCol w="381000">
+                  <a:extLst>
+                    <a:ext uri="{9D8B030D-6E8A-4147-A177-3AD203B41FA5}">
+                      <a16:colId xmlns:a16="http://schemas.microsoft.com/office/drawing/2014/main" val="1397667723"/>
+                    </a:ext>
+                  </a:extLst>
+                </a:gridCol>
+                <a:gridCol w="685800">
+                  <a:extLst>
+                    <a:ext uri="{9D8B030D-6E8A-4147-A177-3AD203B41FA5}">
+                      <a16:colId xmlns:a16="http://schemas.microsoft.com/office/drawing/2014/main" val="2265561656"/>
+                    </a:ext>
+                  </a:extLst>
+                </a:gridCol>
+                <a:gridCol w="533400">
+                  <a:extLst>
+                    <a:ext uri="{9D8B030D-6E8A-4147-A177-3AD203B41FA5}">
+                      <a16:colId xmlns:a16="http://schemas.microsoft.com/office/drawing/2014/main" val="2316052155"/>
+                    </a:ext>
+                  </a:extLst>
+                </a:gridCol>
+                <a:gridCol w="533400">
+                  <a:extLst>
+                    <a:ext uri="{9D8B030D-6E8A-4147-A177-3AD203B41FA5}">
+                      <a16:colId xmlns:a16="http://schemas.microsoft.com/office/drawing/2014/main" val="538189283"/>
+                    </a:ext>
+                  </a:extLst>
+                </a:gridCol>
+                <a:gridCol w="609600">
+                  <a:extLst>
+                    <a:ext uri="{9D8B030D-6E8A-4147-A177-3AD203B41FA5}">
+                      <a16:colId xmlns:a16="http://schemas.microsoft.com/office/drawing/2014/main" val="1708074538"/>
+                    </a:ext>
+                  </a:extLst>
+                </a:gridCol>
+                <a:gridCol w="609600">
+                  <a:extLst>
+                    <a:ext uri="{9D8B030D-6E8A-4147-A177-3AD203B41FA5}">
+                      <a16:colId xmlns:a16="http://schemas.microsoft.com/office/drawing/2014/main" val="3464345595"/>
+                    </a:ext>
+                  </a:extLst>
+                </a:gridCol>
+                <a:gridCol w="609600">
+                  <a:extLst>
+                    <a:ext uri="{9D8B030D-6E8A-4147-A177-3AD203B41FA5}">
+                      <a16:colId xmlns:a16="http://schemas.microsoft.com/office/drawing/2014/main" val="2683528078"/>
+                    </a:ext>
+                  </a:extLst>
+                </a:gridCol>
+                <a:gridCol w="533400">
+                  <a:extLst>
+                    <a:ext uri="{9D8B030D-6E8A-4147-A177-3AD203B41FA5}">
+                      <a16:colId xmlns:a16="http://schemas.microsoft.com/office/drawing/2014/main" val="117384074"/>
+                    </a:ext>
+                  </a:extLst>
+                </a:gridCol>
+                <a:gridCol w="381000">
+                  <a:extLst>
+                    <a:ext uri="{9D8B030D-6E8A-4147-A177-3AD203B41FA5}">
+                      <a16:colId xmlns:a16="http://schemas.microsoft.com/office/drawing/2014/main" val="736024512"/>
+                    </a:ext>
+                  </a:extLst>
+                </a:gridCol>
+                <a:gridCol w="375095">
+                  <a:extLst>
+                    <a:ext uri="{9D8B030D-6E8A-4147-A177-3AD203B41FA5}">
+                      <a16:colId xmlns:a16="http://schemas.microsoft.com/office/drawing/2014/main" val="556831134"/>
+                    </a:ext>
+                  </a:extLst>
+                </a:gridCol>
+              </a:tblGrid>
+              <a:tr h="211202">
+                <a:tc>
+                  <a:txBody>
+                    <a:bodyPr/>
+                    <a:lstStyle/>
+                    <a:p>
+                      <a:pPr algn="ctr"/>
+                      <a:r>
+                        <a:rPr lang="en-US" sz="1000" dirty="0"/>
+                        <a:t>State</a:t>
+                      </a:r>
+                    </a:p>
+                  </a:txBody>
+                  <a:tcPr marL="70401" marR="70401" marT="35200" marB="35200"/>
+                </a:tc>
+                <a:tc>
+                  <a:txBody>
+                    <a:bodyPr/>
+                    <a:lstStyle/>
+                    <a:p>
+                      <a:pPr algn="ctr"/>
+                      <a:r>
+                        <a:rPr lang="en-US" sz="1000" dirty="0"/>
+                        <a:t>Pseudocode</a:t>
+                      </a:r>
+                    </a:p>
+                  </a:txBody>
+                  <a:tcPr marL="70401" marR="70401" marT="35200" marB="35200"/>
+                </a:tc>
+                <a:tc>
+                  <a:txBody>
+                    <a:bodyPr/>
+                    <a:lstStyle/>
+                    <a:p>
+                      <a:pPr algn="ctr"/>
+                      <a:r>
+                        <a:rPr lang="en-US" sz="1000" dirty="0" err="1"/>
+                        <a:t>IRLd</a:t>
+                      </a:r>
+                      <a:endParaRPr lang="en-US" sz="1000" dirty="0"/>
+                    </a:p>
+                  </a:txBody>
+                  <a:tcPr marL="70401" marR="70401" marT="35200" marB="35200"/>
+                </a:tc>
+                <a:tc>
+                  <a:txBody>
+                    <a:bodyPr/>
+                    <a:lstStyle/>
+                    <a:p>
+                      <a:pPr algn="ctr"/>
+                      <a:r>
+                        <a:rPr lang="en-US" sz="1000" dirty="0" err="1"/>
+                        <a:t>RegSel</a:t>
+                      </a:r>
+                      <a:endParaRPr lang="en-US" sz="1000" dirty="0"/>
+                    </a:p>
+                  </a:txBody>
+                  <a:tcPr marL="70401" marR="70401" marT="35200" marB="35200"/>
+                </a:tc>
+                <a:tc>
+                  <a:txBody>
+                    <a:bodyPr/>
+                    <a:lstStyle/>
+                    <a:p>
+                      <a:pPr algn="ctr"/>
+                      <a:r>
+                        <a:rPr lang="en-US" sz="1000" dirty="0" err="1"/>
+                        <a:t>RegWr</a:t>
+                      </a:r>
+                      <a:endParaRPr lang="en-US" sz="1000" dirty="0"/>
+                    </a:p>
+                  </a:txBody>
+                  <a:tcPr marL="70401" marR="70401" marT="35200" marB="35200"/>
+                </a:tc>
+                <a:tc>
+                  <a:txBody>
+                    <a:bodyPr/>
+                    <a:lstStyle/>
+                    <a:p>
+                      <a:pPr algn="ctr"/>
+                      <a:r>
+                        <a:rPr lang="en-US" sz="1000" dirty="0" err="1"/>
+                        <a:t>RegEn</a:t>
+                      </a:r>
+                      <a:endParaRPr lang="en-US" sz="1000" dirty="0"/>
+                    </a:p>
+                  </a:txBody>
+                  <a:tcPr marL="70401" marR="70401" marT="35200" marB="35200"/>
+                </a:tc>
+                <a:tc>
+                  <a:txBody>
+                    <a:bodyPr/>
+                    <a:lstStyle/>
+                    <a:p>
+                      <a:pPr marL="0" marR="0" lvl="0" indent="0" algn="ctr" defTabSz="914400" rtl="0" eaLnBrk="1" fontAlgn="auto" latinLnBrk="0" hangingPunct="1">
+                        <a:lnSpc>
+                          <a:spcPct val="100000"/>
+                        </a:lnSpc>
+                        <a:spcBef>
+                          <a:spcPts val="0"/>
+                        </a:spcBef>
+                        <a:spcAft>
+                          <a:spcPts val="0"/>
+                        </a:spcAft>
+                        <a:buClrTx/>
+                        <a:buSzTx/>
+                        <a:buFontTx/>
+                        <a:buNone/>
+                        <a:tabLst/>
+                        <a:defRPr/>
+                      </a:pPr>
+                      <a:r>
+                        <a:rPr lang="en-US" sz="1000" dirty="0"/>
+                        <a:t>ALd</a:t>
+                      </a:r>
+                    </a:p>
+                  </a:txBody>
+                  <a:tcPr marL="70401" marR="70401" marT="35200" marB="35200"/>
+                </a:tc>
+                <a:tc>
+                  <a:txBody>
+                    <a:bodyPr/>
+                    <a:lstStyle/>
+                    <a:p>
+                      <a:pPr algn="ctr"/>
+                      <a:r>
+                        <a:rPr lang="en-US" sz="1000" dirty="0" err="1"/>
+                        <a:t>BLd</a:t>
+                      </a:r>
+                      <a:endParaRPr lang="en-US" sz="1000" dirty="0"/>
+                    </a:p>
+                  </a:txBody>
+                  <a:tcPr marL="70401" marR="70401" marT="35200" marB="35200"/>
+                </a:tc>
+                <a:tc>
+                  <a:txBody>
+                    <a:bodyPr/>
+                    <a:lstStyle/>
+                    <a:p>
+                      <a:pPr algn="ctr"/>
+                      <a:r>
+                        <a:rPr lang="en-US" sz="1000" dirty="0" err="1"/>
+                        <a:t>ALUop</a:t>
+                      </a:r>
+                      <a:endParaRPr lang="en-US" sz="1000" dirty="0"/>
+                    </a:p>
+                  </a:txBody>
+                  <a:tcPr marL="70401" marR="70401" marT="35200" marB="35200"/>
+                </a:tc>
+                <a:tc>
+                  <a:txBody>
+                    <a:bodyPr/>
+                    <a:lstStyle/>
+                    <a:p>
+                      <a:pPr algn="ctr"/>
+                      <a:r>
+                        <a:rPr lang="en-US" sz="1000" dirty="0" err="1"/>
+                        <a:t>ALUen</a:t>
+                      </a:r>
+                      <a:endParaRPr lang="en-US" sz="1000" dirty="0"/>
+                    </a:p>
+                  </a:txBody>
+                  <a:tcPr marL="70401" marR="70401" marT="35200" marB="35200"/>
+                </a:tc>
+                <a:tc>
+                  <a:txBody>
+                    <a:bodyPr/>
+                    <a:lstStyle/>
+                    <a:p>
+                      <a:pPr algn="ctr"/>
+                      <a:r>
+                        <a:rPr lang="en-US" sz="1000" dirty="0" err="1"/>
+                        <a:t>MALd</a:t>
+                      </a:r>
+                      <a:endParaRPr lang="en-US" sz="1000" dirty="0"/>
+                    </a:p>
+                  </a:txBody>
+                  <a:tcPr marL="70401" marR="70401" marT="35200" marB="35200"/>
+                </a:tc>
+                <a:tc>
+                  <a:txBody>
+                    <a:bodyPr/>
+                    <a:lstStyle/>
+                    <a:p>
+                      <a:pPr algn="ctr"/>
+                      <a:r>
+                        <a:rPr lang="en-US" sz="1000" dirty="0" err="1"/>
+                        <a:t>MemWr</a:t>
+                      </a:r>
+                      <a:endParaRPr lang="en-US" sz="1000" dirty="0"/>
+                    </a:p>
+                  </a:txBody>
+                  <a:tcPr marL="70401" marR="70401" marT="35200" marB="35200"/>
+                </a:tc>
+                <a:tc>
+                  <a:txBody>
+                    <a:bodyPr/>
+                    <a:lstStyle/>
+                    <a:p>
+                      <a:pPr algn="ctr"/>
+                      <a:r>
+                        <a:rPr lang="en-US" sz="1000" dirty="0" err="1"/>
+                        <a:t>MemEn</a:t>
+                      </a:r>
+                      <a:endParaRPr lang="en-US" sz="1000" dirty="0"/>
+                    </a:p>
+                  </a:txBody>
+                  <a:tcPr marL="70401" marR="70401" marT="35200" marB="35200"/>
+                </a:tc>
+                <a:tc>
+                  <a:txBody>
+                    <a:bodyPr/>
+                    <a:lstStyle/>
+                    <a:p>
+                      <a:pPr algn="ctr"/>
+                      <a:r>
+                        <a:rPr lang="en-US" sz="1000" dirty="0" err="1"/>
+                        <a:t>ImmSel</a:t>
+                      </a:r>
+                      <a:endParaRPr lang="en-US" sz="1000" dirty="0"/>
+                    </a:p>
+                  </a:txBody>
+                  <a:tcPr marL="70401" marR="70401" marT="35200" marB="35200"/>
+                </a:tc>
+                <a:tc>
+                  <a:txBody>
+                    <a:bodyPr/>
+                    <a:lstStyle/>
+                    <a:p>
+                      <a:pPr algn="ctr"/>
+                      <a:r>
+                        <a:rPr lang="en-US" sz="1000" dirty="0" err="1"/>
+                        <a:t>ImmEn</a:t>
+                      </a:r>
+                      <a:endParaRPr lang="en-US" sz="1000" dirty="0"/>
+                    </a:p>
+                  </a:txBody>
+                  <a:tcPr marL="70401" marR="70401" marT="35200" marB="35200"/>
+                </a:tc>
+                <a:tc>
+                  <a:txBody>
+                    <a:bodyPr/>
+                    <a:lstStyle/>
+                    <a:p>
+                      <a:pPr algn="ctr"/>
+                      <a:r>
+                        <a:rPr lang="en-US" sz="1000" dirty="0" err="1"/>
+                        <a:t>mBr</a:t>
+                      </a:r>
+                      <a:endParaRPr lang="en-US" sz="1000" dirty="0"/>
+                    </a:p>
+                  </a:txBody>
+                  <a:tcPr marL="70401" marR="70401" marT="35200" marB="35200"/>
+                </a:tc>
+                <a:tc>
+                  <a:txBody>
+                    <a:bodyPr/>
+                    <a:lstStyle/>
+                    <a:p>
+                      <a:pPr algn="ctr"/>
+                      <a:r>
+                        <a:rPr lang="en-US" sz="1000" dirty="0" err="1"/>
+                        <a:t>Nxt</a:t>
+                      </a:r>
+                      <a:endParaRPr lang="en-US" sz="1000" dirty="0"/>
+                    </a:p>
+                  </a:txBody>
+                  <a:tcPr marL="70401" marR="70401" marT="35200" marB="35200"/>
+                </a:tc>
+                <a:extLst>
+                  <a:ext uri="{0D108BD9-81ED-4DB2-BD59-A6C34878D82A}">
+                    <a16:rowId xmlns:a16="http://schemas.microsoft.com/office/drawing/2014/main" val="2602937028"/>
+                  </a:ext>
+                </a:extLst>
+              </a:tr>
+              <a:tr h="285514">
+                <a:tc>
+                  <a:txBody>
+                    <a:bodyPr/>
+                    <a:lstStyle/>
+                    <a:p>
+                      <a:r>
+                        <a:rPr lang="en-US" sz="1200" b="1" dirty="0"/>
+                        <a:t>F0</a:t>
+                      </a:r>
+                    </a:p>
+                  </a:txBody>
+                  <a:tcPr marL="70401" marR="70401" marT="35200" marB="35200"/>
+                </a:tc>
+                <a:tc>
+                  <a:txBody>
+                    <a:bodyPr/>
+                    <a:lstStyle/>
+                    <a:p>
+                      <a:r>
+                        <a:rPr lang="en-US" sz="1200" dirty="0"/>
+                        <a:t>PC-&gt;MA, A</a:t>
+                      </a:r>
+                    </a:p>
+                  </a:txBody>
+                  <a:tcPr marL="70401" marR="70401" marT="35200" marB="35200"/>
+                </a:tc>
+                <a:tc>
+                  <a:txBody>
+                    <a:bodyPr/>
+                    <a:lstStyle/>
+                    <a:p>
+                      <a:pPr algn="ctr"/>
+                      <a:r>
+                        <a:rPr lang="en-US" sz="1200" dirty="0"/>
+                        <a:t>*</a:t>
+                      </a:r>
+                    </a:p>
+                  </a:txBody>
+                  <a:tcPr marL="70401" marR="70401" marT="35200" marB="35200"/>
+                </a:tc>
+                <a:tc>
+                  <a:txBody>
+                    <a:bodyPr/>
+                    <a:lstStyle/>
+                    <a:p>
+                      <a:pPr algn="ctr"/>
+                      <a:r>
+                        <a:rPr lang="en-US" sz="1200" dirty="0"/>
+                        <a:t>PC</a:t>
+                      </a:r>
+                    </a:p>
+                  </a:txBody>
+                  <a:tcPr marL="70401" marR="70401" marT="35200" marB="35200"/>
+                </a:tc>
+                <a:tc>
+                  <a:txBody>
+                    <a:bodyPr/>
+                    <a:lstStyle/>
+                    <a:p>
+                      <a:pPr algn="ctr"/>
+                      <a:r>
+                        <a:rPr lang="en-US" sz="1200" dirty="0"/>
+                        <a:t>0</a:t>
+                      </a:r>
+                    </a:p>
+                  </a:txBody>
+                  <a:tcPr marL="70401" marR="70401" marT="35200" marB="35200"/>
+                </a:tc>
+                <a:tc>
+                  <a:txBody>
+                    <a:bodyPr/>
+                    <a:lstStyle/>
+                    <a:p>
+                      <a:pPr algn="ctr"/>
+                      <a:r>
+                        <a:rPr lang="en-US" sz="1200" dirty="0"/>
+                        <a:t>1</a:t>
+                      </a:r>
+                    </a:p>
+                  </a:txBody>
+                  <a:tcPr marL="70401" marR="70401" marT="35200" marB="35200"/>
+                </a:tc>
+                <a:tc>
+                  <a:txBody>
+                    <a:bodyPr/>
+                    <a:lstStyle/>
+                    <a:p>
+                      <a:pPr algn="ctr"/>
+                      <a:r>
+                        <a:rPr lang="en-US" sz="1200" dirty="0"/>
+                        <a:t>1</a:t>
+                      </a:r>
+                    </a:p>
+                  </a:txBody>
+                  <a:tcPr marL="70401" marR="70401" marT="35200" marB="35200"/>
+                </a:tc>
+                <a:tc>
+                  <a:txBody>
+                    <a:bodyPr/>
+                    <a:lstStyle/>
+                    <a:p>
+                      <a:pPr algn="ctr"/>
+                      <a:r>
+                        <a:rPr lang="en-US" sz="1200" dirty="0"/>
+                        <a:t>*</a:t>
+                      </a:r>
+                    </a:p>
+                  </a:txBody>
+                  <a:tcPr marL="70401" marR="70401" marT="35200" marB="35200"/>
+                </a:tc>
+                <a:tc>
+                  <a:txBody>
+                    <a:bodyPr/>
+                    <a:lstStyle/>
+                    <a:p>
+                      <a:pPr algn="ctr"/>
+                      <a:r>
+                        <a:rPr lang="en-US" sz="1200" dirty="0"/>
+                        <a:t>*</a:t>
+                      </a:r>
+                    </a:p>
+                  </a:txBody>
+                  <a:tcPr marL="70401" marR="70401" marT="35200" marB="35200"/>
+                </a:tc>
+                <a:tc>
+                  <a:txBody>
+                    <a:bodyPr/>
+                    <a:lstStyle/>
+                    <a:p>
+                      <a:pPr algn="ctr"/>
+                      <a:r>
+                        <a:rPr lang="en-US" sz="1200" dirty="0"/>
+                        <a:t>0</a:t>
+                      </a:r>
+                    </a:p>
+                  </a:txBody>
+                  <a:tcPr marL="70401" marR="70401" marT="35200" marB="35200"/>
+                </a:tc>
+                <a:tc>
+                  <a:txBody>
+                    <a:bodyPr/>
+                    <a:lstStyle/>
+                    <a:p>
+                      <a:pPr algn="ctr"/>
+                      <a:r>
+                        <a:rPr lang="en-US" sz="1200" dirty="0"/>
+                        <a:t>1</a:t>
+                      </a:r>
+                    </a:p>
+                  </a:txBody>
+                  <a:tcPr marL="70401" marR="70401" marT="35200" marB="35200"/>
+                </a:tc>
+                <a:tc>
+                  <a:txBody>
+                    <a:bodyPr/>
+                    <a:lstStyle/>
+                    <a:p>
+                      <a:pPr algn="ctr"/>
+                      <a:r>
+                        <a:rPr lang="en-US" sz="1200" dirty="0"/>
+                        <a:t>0</a:t>
+                      </a:r>
+                    </a:p>
+                  </a:txBody>
+                  <a:tcPr marL="70401" marR="70401" marT="35200" marB="35200"/>
+                </a:tc>
+                <a:tc>
+                  <a:txBody>
+                    <a:bodyPr/>
+                    <a:lstStyle/>
+                    <a:p>
+                      <a:pPr algn="ctr"/>
+                      <a:r>
+                        <a:rPr lang="en-US" sz="1200" dirty="0"/>
+                        <a:t>0</a:t>
+                      </a:r>
+                    </a:p>
+                  </a:txBody>
+                  <a:tcPr marL="70401" marR="70401" marT="35200" marB="35200"/>
+                </a:tc>
+                <a:tc>
+                  <a:txBody>
+                    <a:bodyPr/>
+                    <a:lstStyle/>
+                    <a:p>
+                      <a:pPr algn="ctr"/>
+                      <a:r>
+                        <a:rPr lang="en-US" sz="1200" dirty="0"/>
+                        <a:t>*</a:t>
+                      </a:r>
+                    </a:p>
+                  </a:txBody>
+                  <a:tcPr marL="70401" marR="70401" marT="35200" marB="35200"/>
+                </a:tc>
+                <a:tc>
+                  <a:txBody>
+                    <a:bodyPr/>
+                    <a:lstStyle/>
+                    <a:p>
+                      <a:pPr algn="ctr"/>
+                      <a:r>
+                        <a:rPr lang="en-US" sz="1200" dirty="0"/>
+                        <a:t>0</a:t>
+                      </a:r>
+                    </a:p>
+                  </a:txBody>
+                  <a:tcPr marL="70401" marR="70401" marT="35200" marB="35200"/>
+                </a:tc>
+                <a:tc>
+                  <a:txBody>
+                    <a:bodyPr/>
+                    <a:lstStyle/>
+                    <a:p>
+                      <a:pPr algn="ctr"/>
+                      <a:r>
+                        <a:rPr lang="en-US" sz="1200" dirty="0"/>
+                        <a:t>N</a:t>
+                      </a:r>
+                    </a:p>
+                  </a:txBody>
+                  <a:tcPr marL="70401" marR="70401" marT="35200" marB="35200"/>
+                </a:tc>
+                <a:tc>
+                  <a:txBody>
+                    <a:bodyPr/>
+                    <a:lstStyle/>
+                    <a:p>
+                      <a:pPr algn="ctr"/>
+                      <a:endParaRPr lang="en-US" sz="1200" dirty="0"/>
+                    </a:p>
+                  </a:txBody>
+                  <a:tcPr marL="70401" marR="70401" marT="35200" marB="35200"/>
+                </a:tc>
+                <a:extLst>
+                  <a:ext uri="{0D108BD9-81ED-4DB2-BD59-A6C34878D82A}">
+                    <a16:rowId xmlns:a16="http://schemas.microsoft.com/office/drawing/2014/main" val="2709571622"/>
+                  </a:ext>
+                </a:extLst>
+              </a:tr>
+              <a:tr h="285514">
+                <a:tc>
+                  <a:txBody>
+                    <a:bodyPr/>
+                    <a:lstStyle/>
+                    <a:p>
+                      <a:r>
+                        <a:rPr lang="en-US" sz="1200" b="1" dirty="0"/>
+                        <a:t>F1</a:t>
+                      </a:r>
+                    </a:p>
+                  </a:txBody>
+                  <a:tcPr marL="70401" marR="70401" marT="35200" marB="35200"/>
+                </a:tc>
+                <a:tc>
+                  <a:txBody>
+                    <a:bodyPr/>
+                    <a:lstStyle/>
+                    <a:p>
+                      <a:r>
+                        <a:rPr lang="en-US" sz="1200" dirty="0"/>
+                        <a:t>Mem-&gt;IR</a:t>
+                      </a:r>
+                    </a:p>
+                  </a:txBody>
+                  <a:tcPr marL="70401" marR="70401" marT="35200" marB="35200"/>
+                </a:tc>
+                <a:tc>
+                  <a:txBody>
+                    <a:bodyPr/>
+                    <a:lstStyle/>
+                    <a:p>
+                      <a:pPr algn="ctr"/>
+                      <a:r>
+                        <a:rPr lang="en-US" sz="1200" dirty="0"/>
+                        <a:t>1</a:t>
+                      </a:r>
+                    </a:p>
+                  </a:txBody>
+                  <a:tcPr marL="70401" marR="70401" marT="35200" marB="35200"/>
+                </a:tc>
+                <a:tc>
+                  <a:txBody>
+                    <a:bodyPr/>
+                    <a:lstStyle/>
+                    <a:p>
+                      <a:pPr algn="ctr"/>
+                      <a:r>
+                        <a:rPr lang="en-US" sz="1200" dirty="0"/>
+                        <a:t>*</a:t>
+                      </a:r>
+                    </a:p>
+                  </a:txBody>
+                  <a:tcPr marL="70401" marR="70401" marT="35200" marB="35200"/>
+                </a:tc>
+                <a:tc>
+                  <a:txBody>
+                    <a:bodyPr/>
+                    <a:lstStyle/>
+                    <a:p>
+                      <a:pPr algn="ctr"/>
+                      <a:r>
+                        <a:rPr lang="en-US" sz="1200" dirty="0"/>
+                        <a:t>0</a:t>
+                      </a:r>
+                    </a:p>
+                  </a:txBody>
+                  <a:tcPr marL="70401" marR="70401" marT="35200" marB="35200"/>
+                </a:tc>
+                <a:tc>
+                  <a:txBody>
+                    <a:bodyPr/>
+                    <a:lstStyle/>
+                    <a:p>
+                      <a:pPr algn="ctr"/>
+                      <a:r>
+                        <a:rPr lang="en-US" sz="1200" dirty="0"/>
+                        <a:t>0</a:t>
+                      </a:r>
+                    </a:p>
+                  </a:txBody>
+                  <a:tcPr marL="70401" marR="70401" marT="35200" marB="35200"/>
+                </a:tc>
+                <a:tc>
+                  <a:txBody>
+                    <a:bodyPr/>
+                    <a:lstStyle/>
+                    <a:p>
+                      <a:pPr algn="ctr"/>
+                      <a:r>
+                        <a:rPr lang="en-US" sz="1200" dirty="0"/>
+                        <a:t>0</a:t>
+                      </a:r>
+                    </a:p>
+                  </a:txBody>
+                  <a:tcPr marL="70401" marR="70401" marT="35200" marB="35200"/>
+                </a:tc>
+                <a:tc>
+                  <a:txBody>
+                    <a:bodyPr/>
+                    <a:lstStyle/>
+                    <a:p>
+                      <a:pPr algn="ctr"/>
+                      <a:r>
+                        <a:rPr lang="en-US" sz="1200" dirty="0"/>
+                        <a:t>*</a:t>
+                      </a:r>
+                    </a:p>
+                  </a:txBody>
+                  <a:tcPr marL="70401" marR="70401" marT="35200" marB="35200"/>
+                </a:tc>
+                <a:tc>
+                  <a:txBody>
+                    <a:bodyPr/>
+                    <a:lstStyle/>
+                    <a:p>
+                      <a:pPr algn="ctr"/>
+                      <a:r>
+                        <a:rPr lang="en-US" sz="1200" dirty="0"/>
+                        <a:t>*</a:t>
+                      </a:r>
+                    </a:p>
+                  </a:txBody>
+                  <a:tcPr marL="70401" marR="70401" marT="35200" marB="35200"/>
+                </a:tc>
+                <a:tc>
+                  <a:txBody>
+                    <a:bodyPr/>
+                    <a:lstStyle/>
+                    <a:p>
+                      <a:pPr algn="ctr"/>
+                      <a:r>
+                        <a:rPr lang="en-US" sz="1200" dirty="0"/>
+                        <a:t>0</a:t>
+                      </a:r>
+                    </a:p>
+                  </a:txBody>
+                  <a:tcPr marL="70401" marR="70401" marT="35200" marB="35200"/>
+                </a:tc>
+                <a:tc>
+                  <a:txBody>
+                    <a:bodyPr/>
+                    <a:lstStyle/>
+                    <a:p>
+                      <a:pPr algn="ctr"/>
+                      <a:r>
+                        <a:rPr lang="en-US" sz="1200" dirty="0"/>
+                        <a:t>0</a:t>
+                      </a:r>
+                    </a:p>
+                  </a:txBody>
+                  <a:tcPr marL="70401" marR="70401" marT="35200" marB="35200"/>
+                </a:tc>
+                <a:tc>
+                  <a:txBody>
+                    <a:bodyPr/>
+                    <a:lstStyle/>
+                    <a:p>
+                      <a:pPr algn="ctr"/>
+                      <a:r>
+                        <a:rPr lang="en-US" sz="1200" dirty="0"/>
+                        <a:t>0</a:t>
+                      </a:r>
+                    </a:p>
+                  </a:txBody>
+                  <a:tcPr marL="70401" marR="70401" marT="35200" marB="35200"/>
+                </a:tc>
+                <a:tc>
+                  <a:txBody>
+                    <a:bodyPr/>
+                    <a:lstStyle/>
+                    <a:p>
+                      <a:pPr algn="ctr"/>
+                      <a:r>
+                        <a:rPr lang="en-US" sz="1200" dirty="0"/>
+                        <a:t>1</a:t>
+                      </a:r>
+                    </a:p>
+                  </a:txBody>
+                  <a:tcPr marL="70401" marR="70401" marT="35200" marB="35200"/>
+                </a:tc>
+                <a:tc>
+                  <a:txBody>
+                    <a:bodyPr/>
+                    <a:lstStyle/>
+                    <a:p>
+                      <a:pPr algn="ctr"/>
+                      <a:r>
+                        <a:rPr lang="en-US" sz="1200" dirty="0"/>
+                        <a:t>*</a:t>
+                      </a:r>
+                    </a:p>
+                  </a:txBody>
+                  <a:tcPr marL="70401" marR="70401" marT="35200" marB="35200"/>
+                </a:tc>
+                <a:tc>
+                  <a:txBody>
+                    <a:bodyPr/>
+                    <a:lstStyle/>
+                    <a:p>
+                      <a:pPr algn="ctr"/>
+                      <a:r>
+                        <a:rPr lang="en-US" sz="1200" dirty="0"/>
+                        <a:t>0</a:t>
+                      </a:r>
+                    </a:p>
+                  </a:txBody>
+                  <a:tcPr marL="70401" marR="70401" marT="35200" marB="35200"/>
+                </a:tc>
+                <a:tc>
+                  <a:txBody>
+                    <a:bodyPr/>
+                    <a:lstStyle/>
+                    <a:p>
+                      <a:pPr algn="ctr"/>
+                      <a:r>
+                        <a:rPr lang="en-US" sz="1200" dirty="0"/>
+                        <a:t>S</a:t>
+                      </a:r>
+                    </a:p>
+                  </a:txBody>
+                  <a:tcPr marL="70401" marR="70401" marT="35200" marB="35200"/>
+                </a:tc>
+                <a:tc>
+                  <a:txBody>
+                    <a:bodyPr/>
+                    <a:lstStyle/>
+                    <a:p>
+                      <a:pPr algn="ctr"/>
+                      <a:endParaRPr lang="en-US" sz="1200" dirty="0"/>
+                    </a:p>
+                  </a:txBody>
+                  <a:tcPr marL="70401" marR="70401" marT="35200" marB="35200"/>
+                </a:tc>
+                <a:extLst>
+                  <a:ext uri="{0D108BD9-81ED-4DB2-BD59-A6C34878D82A}">
+                    <a16:rowId xmlns:a16="http://schemas.microsoft.com/office/drawing/2014/main" val="1260935910"/>
+                  </a:ext>
+                </a:extLst>
+              </a:tr>
+              <a:tr h="285514">
+                <a:tc>
+                  <a:txBody>
+                    <a:bodyPr/>
+                    <a:lstStyle/>
+                    <a:p>
+                      <a:r>
+                        <a:rPr lang="en-US" sz="1200" b="1" dirty="0"/>
+                        <a:t>F2</a:t>
+                      </a:r>
+                    </a:p>
+                  </a:txBody>
+                  <a:tcPr marL="70401" marR="70401" marT="35200" marB="35200"/>
+                </a:tc>
+                <a:tc>
+                  <a:txBody>
+                    <a:bodyPr/>
+                    <a:lstStyle/>
+                    <a:p>
+                      <a:r>
+                        <a:rPr lang="en-US" sz="1200" dirty="0"/>
+                        <a:t>ALU-&gt;PC</a:t>
+                      </a:r>
+                    </a:p>
+                  </a:txBody>
+                  <a:tcPr marL="70401" marR="70401" marT="35200" marB="35200"/>
+                </a:tc>
+                <a:tc>
+                  <a:txBody>
+                    <a:bodyPr/>
+                    <a:lstStyle/>
+                    <a:p>
+                      <a:pPr algn="ctr"/>
+                      <a:r>
+                        <a:rPr lang="en-US" sz="1200" dirty="0"/>
+                        <a:t>0</a:t>
+                      </a:r>
+                    </a:p>
+                  </a:txBody>
+                  <a:tcPr marL="70401" marR="70401" marT="35200" marB="35200"/>
+                </a:tc>
+                <a:tc>
+                  <a:txBody>
+                    <a:bodyPr/>
+                    <a:lstStyle/>
+                    <a:p>
+                      <a:pPr algn="ctr"/>
+                      <a:r>
+                        <a:rPr lang="en-US" sz="1200" dirty="0"/>
+                        <a:t>PC</a:t>
+                      </a:r>
+                    </a:p>
+                  </a:txBody>
+                  <a:tcPr marL="70401" marR="70401" marT="35200" marB="35200"/>
+                </a:tc>
+                <a:tc>
+                  <a:txBody>
+                    <a:bodyPr/>
+                    <a:lstStyle/>
+                    <a:p>
+                      <a:pPr algn="ctr"/>
+                      <a:r>
+                        <a:rPr lang="en-US" sz="1200" dirty="0"/>
+                        <a:t>1</a:t>
+                      </a:r>
+                    </a:p>
+                  </a:txBody>
+                  <a:tcPr marL="70401" marR="70401" marT="35200" marB="35200"/>
+                </a:tc>
+                <a:tc>
+                  <a:txBody>
+                    <a:bodyPr/>
+                    <a:lstStyle/>
+                    <a:p>
+                      <a:pPr algn="ctr"/>
+                      <a:r>
+                        <a:rPr lang="en-US" sz="1200" dirty="0"/>
+                        <a:t>0</a:t>
+                      </a:r>
+                    </a:p>
+                  </a:txBody>
+                  <a:tcPr marL="70401" marR="70401" marT="35200" marB="35200"/>
+                </a:tc>
+                <a:tc>
+                  <a:txBody>
+                    <a:bodyPr/>
+                    <a:lstStyle/>
+                    <a:p>
+                      <a:pPr algn="ctr"/>
+                      <a:r>
+                        <a:rPr lang="en-US" sz="1200" dirty="0"/>
+                        <a:t>0</a:t>
+                      </a:r>
+                    </a:p>
+                  </a:txBody>
+                  <a:tcPr marL="70401" marR="70401" marT="35200" marB="35200"/>
+                </a:tc>
+                <a:tc>
+                  <a:txBody>
+                    <a:bodyPr/>
+                    <a:lstStyle/>
+                    <a:p>
+                      <a:pPr algn="ctr"/>
+                      <a:r>
+                        <a:rPr lang="en-US" sz="1200" dirty="0"/>
+                        <a:t>*</a:t>
+                      </a:r>
+                    </a:p>
+                  </a:txBody>
+                  <a:tcPr marL="70401" marR="70401" marT="35200" marB="35200"/>
+                </a:tc>
+                <a:tc>
+                  <a:txBody>
+                    <a:bodyPr/>
+                    <a:lstStyle/>
+                    <a:p>
+                      <a:pPr algn="ctr"/>
+                      <a:r>
+                        <a:rPr lang="en-US" sz="1200" dirty="0"/>
+                        <a:t>INC_A_4</a:t>
+                      </a:r>
+                    </a:p>
+                  </a:txBody>
+                  <a:tcPr marL="70401" marR="70401" marT="35200" marB="35200"/>
+                </a:tc>
+                <a:tc>
+                  <a:txBody>
+                    <a:bodyPr/>
+                    <a:lstStyle/>
+                    <a:p>
+                      <a:pPr algn="ctr"/>
+                      <a:r>
+                        <a:rPr lang="en-US" sz="1200" dirty="0"/>
+                        <a:t>1</a:t>
+                      </a:r>
+                    </a:p>
+                  </a:txBody>
+                  <a:tcPr marL="70401" marR="70401" marT="35200" marB="35200"/>
+                </a:tc>
+                <a:tc>
+                  <a:txBody>
+                    <a:bodyPr/>
+                    <a:lstStyle/>
+                    <a:p>
+                      <a:pPr algn="ctr"/>
+                      <a:r>
+                        <a:rPr lang="en-US" sz="1200" dirty="0"/>
+                        <a:t>*</a:t>
+                      </a:r>
+                    </a:p>
+                  </a:txBody>
+                  <a:tcPr marL="70401" marR="70401" marT="35200" marB="35200"/>
+                </a:tc>
+                <a:tc>
+                  <a:txBody>
+                    <a:bodyPr/>
+                    <a:lstStyle/>
+                    <a:p>
+                      <a:pPr algn="ctr"/>
+                      <a:r>
+                        <a:rPr lang="en-US" sz="1200" dirty="0"/>
+                        <a:t>0</a:t>
+                      </a:r>
+                    </a:p>
+                  </a:txBody>
+                  <a:tcPr marL="70401" marR="70401" marT="35200" marB="35200"/>
+                </a:tc>
+                <a:tc>
+                  <a:txBody>
+                    <a:bodyPr/>
+                    <a:lstStyle/>
+                    <a:p>
+                      <a:pPr algn="ctr"/>
+                      <a:r>
+                        <a:rPr lang="en-US" sz="1200" dirty="0"/>
+                        <a:t>0</a:t>
+                      </a:r>
+                    </a:p>
+                  </a:txBody>
+                  <a:tcPr marL="70401" marR="70401" marT="35200" marB="35200"/>
+                </a:tc>
+                <a:tc>
+                  <a:txBody>
+                    <a:bodyPr/>
+                    <a:lstStyle/>
+                    <a:p>
+                      <a:pPr algn="ctr"/>
+                      <a:r>
+                        <a:rPr lang="en-US" sz="1200" dirty="0"/>
+                        <a:t>*</a:t>
+                      </a:r>
+                    </a:p>
+                  </a:txBody>
+                  <a:tcPr marL="70401" marR="70401" marT="35200" marB="35200"/>
+                </a:tc>
+                <a:tc>
+                  <a:txBody>
+                    <a:bodyPr/>
+                    <a:lstStyle/>
+                    <a:p>
+                      <a:pPr algn="ctr"/>
+                      <a:r>
+                        <a:rPr lang="en-US" sz="1200" dirty="0"/>
+                        <a:t>0</a:t>
+                      </a:r>
+                    </a:p>
+                  </a:txBody>
+                  <a:tcPr marL="70401" marR="70401" marT="35200" marB="35200"/>
+                </a:tc>
+                <a:tc>
+                  <a:txBody>
+                    <a:bodyPr/>
+                    <a:lstStyle/>
+                    <a:p>
+                      <a:pPr algn="ctr"/>
+                      <a:r>
+                        <a:rPr lang="en-US" sz="1200" dirty="0"/>
+                        <a:t>D</a:t>
+                      </a:r>
+                    </a:p>
+                  </a:txBody>
+                  <a:tcPr marL="70401" marR="70401" marT="35200" marB="35200"/>
+                </a:tc>
+                <a:tc>
+                  <a:txBody>
+                    <a:bodyPr/>
+                    <a:lstStyle/>
+                    <a:p>
+                      <a:pPr algn="ctr"/>
+                      <a:endParaRPr lang="en-US" sz="1200" dirty="0"/>
+                    </a:p>
+                  </a:txBody>
+                  <a:tcPr marL="70401" marR="70401" marT="35200" marB="35200"/>
+                </a:tc>
+                <a:extLst>
+                  <a:ext uri="{0D108BD9-81ED-4DB2-BD59-A6C34878D82A}">
+                    <a16:rowId xmlns:a16="http://schemas.microsoft.com/office/drawing/2014/main" val="1875999785"/>
+                  </a:ext>
+                </a:extLst>
+              </a:tr>
+              <a:tr h="285514">
+                <a:tc>
+                  <a:txBody>
+                    <a:bodyPr/>
+                    <a:lstStyle/>
+                    <a:p>
+                      <a:r>
+                        <a:rPr lang="en-US" sz="1200" b="1" dirty="0"/>
+                        <a:t>ADD0</a:t>
+                      </a:r>
+                    </a:p>
+                  </a:txBody>
+                  <a:tcPr marL="70401" marR="70401" marT="35200" marB="35200"/>
+                </a:tc>
+                <a:tc>
+                  <a:txBody>
+                    <a:bodyPr/>
+                    <a:lstStyle/>
+                    <a:p>
+                      <a:r>
+                        <a:rPr lang="en-US" sz="1200" dirty="0"/>
+                        <a:t>R[t1]-&gt;A</a:t>
+                      </a:r>
+                    </a:p>
+                  </a:txBody>
+                  <a:tcPr marL="70401" marR="70401" marT="35200" marB="35200"/>
+                </a:tc>
+                <a:tc>
+                  <a:txBody>
+                    <a:bodyPr/>
+                    <a:lstStyle/>
+                    <a:p>
+                      <a:pPr algn="ctr"/>
+                      <a:endParaRPr lang="en-US" sz="1200" dirty="0"/>
+                    </a:p>
+                  </a:txBody>
+                  <a:tcPr marL="70401" marR="70401" marT="35200" marB="35200"/>
+                </a:tc>
+                <a:tc>
+                  <a:txBody>
+                    <a:bodyPr/>
+                    <a:lstStyle/>
+                    <a:p>
+                      <a:pPr algn="ctr"/>
+                      <a:endParaRPr lang="en-US" sz="1200" dirty="0"/>
+                    </a:p>
+                  </a:txBody>
+                  <a:tcPr marL="70401" marR="70401" marT="35200" marB="35200"/>
+                </a:tc>
+                <a:tc>
+                  <a:txBody>
+                    <a:bodyPr/>
+                    <a:lstStyle/>
+                    <a:p>
+                      <a:pPr algn="ctr"/>
+                      <a:endParaRPr lang="en-US" sz="1200" dirty="0"/>
+                    </a:p>
+                  </a:txBody>
+                  <a:tcPr marL="70401" marR="70401" marT="35200" marB="35200"/>
+                </a:tc>
+                <a:tc>
+                  <a:txBody>
+                    <a:bodyPr/>
+                    <a:lstStyle/>
+                    <a:p>
+                      <a:pPr algn="ctr"/>
+                      <a:endParaRPr lang="en-US" sz="1200" dirty="0"/>
+                    </a:p>
+                  </a:txBody>
+                  <a:tcPr marL="70401" marR="70401" marT="35200" marB="35200"/>
+                </a:tc>
+                <a:tc>
+                  <a:txBody>
+                    <a:bodyPr/>
+                    <a:lstStyle/>
+                    <a:p>
+                      <a:pPr algn="ctr"/>
+                      <a:endParaRPr lang="en-US" sz="1200" dirty="0"/>
+                    </a:p>
+                  </a:txBody>
+                  <a:tcPr marL="70401" marR="70401" marT="35200" marB="35200"/>
+                </a:tc>
+                <a:tc>
+                  <a:txBody>
+                    <a:bodyPr/>
+                    <a:lstStyle/>
+                    <a:p>
+                      <a:pPr algn="ctr"/>
+                      <a:endParaRPr lang="en-US" sz="1200" dirty="0"/>
+                    </a:p>
+                  </a:txBody>
+                  <a:tcPr marL="70401" marR="70401" marT="35200" marB="35200"/>
+                </a:tc>
+                <a:tc>
+                  <a:txBody>
+                    <a:bodyPr/>
+                    <a:lstStyle/>
+                    <a:p>
+                      <a:pPr algn="ctr"/>
+                      <a:endParaRPr lang="en-US" sz="1200" dirty="0"/>
+                    </a:p>
+                  </a:txBody>
+                  <a:tcPr marL="70401" marR="70401" marT="35200" marB="35200"/>
+                </a:tc>
+                <a:tc>
+                  <a:txBody>
+                    <a:bodyPr/>
+                    <a:lstStyle/>
+                    <a:p>
+                      <a:pPr algn="ctr"/>
+                      <a:endParaRPr lang="en-US" sz="1200" dirty="0"/>
+                    </a:p>
+                  </a:txBody>
+                  <a:tcPr marL="70401" marR="70401" marT="35200" marB="35200"/>
+                </a:tc>
+                <a:tc>
+                  <a:txBody>
+                    <a:bodyPr/>
+                    <a:lstStyle/>
+                    <a:p>
+                      <a:pPr algn="ctr"/>
+                      <a:endParaRPr lang="en-US" sz="1200" dirty="0"/>
+                    </a:p>
+                  </a:txBody>
+                  <a:tcPr marL="70401" marR="70401" marT="35200" marB="35200"/>
+                </a:tc>
+                <a:tc>
+                  <a:txBody>
+                    <a:bodyPr/>
+                    <a:lstStyle/>
+                    <a:p>
+                      <a:pPr algn="ctr"/>
+                      <a:endParaRPr lang="en-US" sz="1200" dirty="0"/>
+                    </a:p>
+                  </a:txBody>
+                  <a:tcPr marL="70401" marR="70401" marT="35200" marB="35200"/>
+                </a:tc>
+                <a:tc>
+                  <a:txBody>
+                    <a:bodyPr/>
+                    <a:lstStyle/>
+                    <a:p>
+                      <a:pPr algn="ctr"/>
+                      <a:endParaRPr lang="en-US" sz="1200" dirty="0"/>
+                    </a:p>
+                  </a:txBody>
+                  <a:tcPr marL="70401" marR="70401" marT="35200" marB="35200"/>
+                </a:tc>
+                <a:tc>
+                  <a:txBody>
+                    <a:bodyPr/>
+                    <a:lstStyle/>
+                    <a:p>
+                      <a:pPr algn="ctr"/>
+                      <a:endParaRPr lang="en-US" sz="1200" dirty="0"/>
+                    </a:p>
+                  </a:txBody>
+                  <a:tcPr marL="70401" marR="70401" marT="35200" marB="35200"/>
+                </a:tc>
+                <a:tc>
+                  <a:txBody>
+                    <a:bodyPr/>
+                    <a:lstStyle/>
+                    <a:p>
+                      <a:pPr algn="ctr"/>
+                      <a:endParaRPr lang="en-US" sz="1200" dirty="0"/>
+                    </a:p>
+                  </a:txBody>
+                  <a:tcPr marL="70401" marR="70401" marT="35200" marB="35200"/>
+                </a:tc>
+                <a:tc>
+                  <a:txBody>
+                    <a:bodyPr/>
+                    <a:lstStyle/>
+                    <a:p>
+                      <a:pPr algn="ctr"/>
+                      <a:endParaRPr lang="en-US" sz="1200" dirty="0"/>
+                    </a:p>
+                  </a:txBody>
+                  <a:tcPr marL="70401" marR="70401" marT="35200" marB="35200"/>
+                </a:tc>
+                <a:tc>
+                  <a:txBody>
+                    <a:bodyPr/>
+                    <a:lstStyle/>
+                    <a:p>
+                      <a:pPr algn="ctr"/>
+                      <a:endParaRPr lang="en-US" sz="1200" dirty="0"/>
+                    </a:p>
+                  </a:txBody>
+                  <a:tcPr marL="70401" marR="70401" marT="35200" marB="35200"/>
+                </a:tc>
+                <a:extLst>
+                  <a:ext uri="{0D108BD9-81ED-4DB2-BD59-A6C34878D82A}">
+                    <a16:rowId xmlns:a16="http://schemas.microsoft.com/office/drawing/2014/main" val="2405993172"/>
+                  </a:ext>
+                </a:extLst>
+              </a:tr>
+              <a:tr h="285514">
+                <a:tc>
+                  <a:txBody>
+                    <a:bodyPr/>
+                    <a:lstStyle/>
+                    <a:p>
+                      <a:r>
+                        <a:rPr lang="en-US" sz="1200" b="1" dirty="0"/>
+                        <a:t>ADD1</a:t>
+                      </a:r>
+                    </a:p>
+                  </a:txBody>
+                  <a:tcPr marL="70401" marR="70401" marT="35200" marB="35200"/>
+                </a:tc>
+                <a:tc>
+                  <a:txBody>
+                    <a:bodyPr/>
+                    <a:lstStyle/>
+                    <a:p>
+                      <a:r>
+                        <a:rPr lang="en-US" sz="1200" dirty="0"/>
+                        <a:t>R[t2]-&gt;B</a:t>
+                      </a:r>
+                    </a:p>
+                  </a:txBody>
+                  <a:tcPr marL="70401" marR="70401" marT="35200" marB="35200"/>
+                </a:tc>
+                <a:tc>
+                  <a:txBody>
+                    <a:bodyPr/>
+                    <a:lstStyle/>
+                    <a:p>
+                      <a:pPr algn="ctr"/>
+                      <a:endParaRPr lang="en-US" sz="1200" dirty="0"/>
+                    </a:p>
+                  </a:txBody>
+                  <a:tcPr marL="70401" marR="70401" marT="35200" marB="35200"/>
+                </a:tc>
+                <a:tc>
+                  <a:txBody>
+                    <a:bodyPr/>
+                    <a:lstStyle/>
+                    <a:p>
+                      <a:pPr algn="ctr"/>
+                      <a:endParaRPr lang="en-US" sz="1200" dirty="0"/>
+                    </a:p>
+                  </a:txBody>
+                  <a:tcPr marL="70401" marR="70401" marT="35200" marB="35200"/>
+                </a:tc>
+                <a:tc>
+                  <a:txBody>
+                    <a:bodyPr/>
+                    <a:lstStyle/>
+                    <a:p>
+                      <a:pPr algn="ctr"/>
+                      <a:endParaRPr lang="en-US" sz="1200" dirty="0"/>
+                    </a:p>
+                  </a:txBody>
+                  <a:tcPr marL="70401" marR="70401" marT="35200" marB="35200"/>
+                </a:tc>
+                <a:tc>
+                  <a:txBody>
+                    <a:bodyPr/>
+                    <a:lstStyle/>
+                    <a:p>
+                      <a:pPr algn="ctr"/>
+                      <a:endParaRPr lang="en-US" sz="1200"/>
+                    </a:p>
+                  </a:txBody>
+                  <a:tcPr marL="70401" marR="70401" marT="35200" marB="35200"/>
+                </a:tc>
+                <a:tc>
+                  <a:txBody>
+                    <a:bodyPr/>
+                    <a:lstStyle/>
+                    <a:p>
+                      <a:pPr algn="ctr"/>
+                      <a:endParaRPr lang="en-US" sz="1200"/>
+                    </a:p>
+                  </a:txBody>
+                  <a:tcPr marL="70401" marR="70401" marT="35200" marB="35200"/>
+                </a:tc>
+                <a:tc>
+                  <a:txBody>
+                    <a:bodyPr/>
+                    <a:lstStyle/>
+                    <a:p>
+                      <a:pPr algn="ctr"/>
+                      <a:endParaRPr lang="en-US" sz="1200"/>
+                    </a:p>
+                  </a:txBody>
+                  <a:tcPr marL="70401" marR="70401" marT="35200" marB="35200"/>
+                </a:tc>
+                <a:tc>
+                  <a:txBody>
+                    <a:bodyPr/>
+                    <a:lstStyle/>
+                    <a:p>
+                      <a:pPr algn="ctr"/>
+                      <a:endParaRPr lang="en-US" sz="1200"/>
+                    </a:p>
+                  </a:txBody>
+                  <a:tcPr marL="70401" marR="70401" marT="35200" marB="35200"/>
+                </a:tc>
+                <a:tc>
+                  <a:txBody>
+                    <a:bodyPr/>
+                    <a:lstStyle/>
+                    <a:p>
+                      <a:pPr algn="ctr"/>
+                      <a:endParaRPr lang="en-US" sz="1200" dirty="0"/>
+                    </a:p>
+                  </a:txBody>
+                  <a:tcPr marL="70401" marR="70401" marT="35200" marB="35200"/>
+                </a:tc>
+                <a:tc>
+                  <a:txBody>
+                    <a:bodyPr/>
+                    <a:lstStyle/>
+                    <a:p>
+                      <a:pPr algn="ctr"/>
+                      <a:endParaRPr lang="en-US" sz="1200"/>
+                    </a:p>
+                  </a:txBody>
+                  <a:tcPr marL="70401" marR="70401" marT="35200" marB="35200"/>
+                </a:tc>
+                <a:tc>
+                  <a:txBody>
+                    <a:bodyPr/>
+                    <a:lstStyle/>
+                    <a:p>
+                      <a:pPr algn="ctr"/>
+                      <a:endParaRPr lang="en-US" sz="1200" dirty="0"/>
+                    </a:p>
+                  </a:txBody>
+                  <a:tcPr marL="70401" marR="70401" marT="35200" marB="35200"/>
+                </a:tc>
+                <a:tc>
+                  <a:txBody>
+                    <a:bodyPr/>
+                    <a:lstStyle/>
+                    <a:p>
+                      <a:pPr algn="ctr"/>
+                      <a:endParaRPr lang="en-US" sz="1200" dirty="0"/>
+                    </a:p>
+                  </a:txBody>
+                  <a:tcPr marL="70401" marR="70401" marT="35200" marB="35200"/>
+                </a:tc>
+                <a:tc>
+                  <a:txBody>
+                    <a:bodyPr/>
+                    <a:lstStyle/>
+                    <a:p>
+                      <a:pPr algn="ctr"/>
+                      <a:endParaRPr lang="en-US" sz="1200"/>
+                    </a:p>
+                  </a:txBody>
+                  <a:tcPr marL="70401" marR="70401" marT="35200" marB="35200"/>
+                </a:tc>
+                <a:tc>
+                  <a:txBody>
+                    <a:bodyPr/>
+                    <a:lstStyle/>
+                    <a:p>
+                      <a:pPr algn="ctr"/>
+                      <a:endParaRPr lang="en-US" sz="1200"/>
+                    </a:p>
+                  </a:txBody>
+                  <a:tcPr marL="70401" marR="70401" marT="35200" marB="35200"/>
+                </a:tc>
+                <a:tc>
+                  <a:txBody>
+                    <a:bodyPr/>
+                    <a:lstStyle/>
+                    <a:p>
+                      <a:pPr algn="ctr"/>
+                      <a:endParaRPr lang="en-US" sz="1200"/>
+                    </a:p>
+                  </a:txBody>
+                  <a:tcPr marL="70401" marR="70401" marT="35200" marB="35200"/>
+                </a:tc>
+                <a:tc>
+                  <a:txBody>
+                    <a:bodyPr/>
+                    <a:lstStyle/>
+                    <a:p>
+                      <a:pPr algn="ctr"/>
+                      <a:endParaRPr lang="en-US" sz="1200"/>
+                    </a:p>
+                  </a:txBody>
+                  <a:tcPr marL="70401" marR="70401" marT="35200" marB="35200"/>
+                </a:tc>
+                <a:extLst>
+                  <a:ext uri="{0D108BD9-81ED-4DB2-BD59-A6C34878D82A}">
+                    <a16:rowId xmlns:a16="http://schemas.microsoft.com/office/drawing/2014/main" val="1820389711"/>
+                  </a:ext>
+                </a:extLst>
+              </a:tr>
+              <a:tr h="285514">
+                <a:tc>
+                  <a:txBody>
+                    <a:bodyPr/>
+                    <a:lstStyle/>
+                    <a:p>
+                      <a:r>
+                        <a:rPr lang="en-US" sz="1200" b="1" dirty="0"/>
+                        <a:t>ADD2</a:t>
+                      </a:r>
+                    </a:p>
+                  </a:txBody>
+                  <a:tcPr marL="70401" marR="70401" marT="35200" marB="35200"/>
+                </a:tc>
+                <a:tc>
+                  <a:txBody>
+                    <a:bodyPr/>
+                    <a:lstStyle/>
+                    <a:p>
+                      <a:r>
+                        <a:rPr lang="en-US" sz="1200" dirty="0"/>
+                        <a:t>ALU-&gt;R[t0]</a:t>
+                      </a:r>
+                    </a:p>
+                  </a:txBody>
+                  <a:tcPr marL="70401" marR="70401" marT="35200" marB="35200"/>
+                </a:tc>
+                <a:tc>
+                  <a:txBody>
+                    <a:bodyPr/>
+                    <a:lstStyle/>
+                    <a:p>
+                      <a:pPr algn="ctr"/>
+                      <a:endParaRPr lang="en-US" sz="1200"/>
+                    </a:p>
+                  </a:txBody>
+                  <a:tcPr marL="70401" marR="70401" marT="35200" marB="35200"/>
+                </a:tc>
+                <a:tc>
+                  <a:txBody>
+                    <a:bodyPr/>
+                    <a:lstStyle/>
+                    <a:p>
+                      <a:pPr algn="ctr"/>
+                      <a:endParaRPr lang="en-US" sz="1200"/>
+                    </a:p>
+                  </a:txBody>
+                  <a:tcPr marL="70401" marR="70401" marT="35200" marB="35200"/>
+                </a:tc>
+                <a:tc>
+                  <a:txBody>
+                    <a:bodyPr/>
+                    <a:lstStyle/>
+                    <a:p>
+                      <a:pPr algn="ctr"/>
+                      <a:endParaRPr lang="en-US" sz="1200" dirty="0"/>
+                    </a:p>
+                  </a:txBody>
+                  <a:tcPr marL="70401" marR="70401" marT="35200" marB="35200"/>
+                </a:tc>
+                <a:tc>
+                  <a:txBody>
+                    <a:bodyPr/>
+                    <a:lstStyle/>
+                    <a:p>
+                      <a:pPr algn="ctr"/>
+                      <a:endParaRPr lang="en-US" sz="1200"/>
+                    </a:p>
+                  </a:txBody>
+                  <a:tcPr marL="70401" marR="70401" marT="35200" marB="35200"/>
+                </a:tc>
+                <a:tc>
+                  <a:txBody>
+                    <a:bodyPr/>
+                    <a:lstStyle/>
+                    <a:p>
+                      <a:pPr algn="ctr"/>
+                      <a:endParaRPr lang="en-US" sz="1200"/>
+                    </a:p>
+                  </a:txBody>
+                  <a:tcPr marL="70401" marR="70401" marT="35200" marB="35200"/>
+                </a:tc>
+                <a:tc>
+                  <a:txBody>
+                    <a:bodyPr/>
+                    <a:lstStyle/>
+                    <a:p>
+                      <a:pPr algn="ctr"/>
+                      <a:endParaRPr lang="en-US" sz="1200" dirty="0"/>
+                    </a:p>
+                  </a:txBody>
+                  <a:tcPr marL="70401" marR="70401" marT="35200" marB="35200"/>
+                </a:tc>
+                <a:tc>
+                  <a:txBody>
+                    <a:bodyPr/>
+                    <a:lstStyle/>
+                    <a:p>
+                      <a:pPr algn="ctr"/>
+                      <a:endParaRPr lang="en-US" sz="1200"/>
+                    </a:p>
+                  </a:txBody>
+                  <a:tcPr marL="70401" marR="70401" marT="35200" marB="35200"/>
+                </a:tc>
+                <a:tc>
+                  <a:txBody>
+                    <a:bodyPr/>
+                    <a:lstStyle/>
+                    <a:p>
+                      <a:pPr algn="ctr"/>
+                      <a:endParaRPr lang="en-US" sz="1200"/>
+                    </a:p>
+                  </a:txBody>
+                  <a:tcPr marL="70401" marR="70401" marT="35200" marB="35200"/>
+                </a:tc>
+                <a:tc>
+                  <a:txBody>
+                    <a:bodyPr/>
+                    <a:lstStyle/>
+                    <a:p>
+                      <a:pPr algn="ctr"/>
+                      <a:endParaRPr lang="en-US" sz="1200" dirty="0"/>
+                    </a:p>
+                  </a:txBody>
+                  <a:tcPr marL="70401" marR="70401" marT="35200" marB="35200"/>
+                </a:tc>
+                <a:tc>
+                  <a:txBody>
+                    <a:bodyPr/>
+                    <a:lstStyle/>
+                    <a:p>
+                      <a:pPr algn="ctr"/>
+                      <a:endParaRPr lang="en-US" sz="1200" dirty="0"/>
+                    </a:p>
+                  </a:txBody>
+                  <a:tcPr marL="70401" marR="70401" marT="35200" marB="35200"/>
+                </a:tc>
+                <a:tc>
+                  <a:txBody>
+                    <a:bodyPr/>
+                    <a:lstStyle/>
+                    <a:p>
+                      <a:pPr algn="ctr"/>
+                      <a:endParaRPr lang="en-US" sz="1200" dirty="0"/>
+                    </a:p>
+                  </a:txBody>
+                  <a:tcPr marL="70401" marR="70401" marT="35200" marB="35200"/>
+                </a:tc>
+                <a:tc>
+                  <a:txBody>
+                    <a:bodyPr/>
+                    <a:lstStyle/>
+                    <a:p>
+                      <a:pPr algn="ctr"/>
+                      <a:endParaRPr lang="en-US" sz="1200" dirty="0"/>
+                    </a:p>
+                  </a:txBody>
+                  <a:tcPr marL="70401" marR="70401" marT="35200" marB="35200"/>
+                </a:tc>
+                <a:tc>
+                  <a:txBody>
+                    <a:bodyPr/>
+                    <a:lstStyle/>
+                    <a:p>
+                      <a:pPr algn="ctr"/>
+                      <a:endParaRPr lang="en-US" sz="1200" dirty="0"/>
+                    </a:p>
+                  </a:txBody>
+                  <a:tcPr marL="70401" marR="70401" marT="35200" marB="35200"/>
+                </a:tc>
+                <a:tc>
+                  <a:txBody>
+                    <a:bodyPr/>
+                    <a:lstStyle/>
+                    <a:p>
+                      <a:pPr algn="ctr"/>
+                      <a:endParaRPr lang="en-US" sz="1200" dirty="0"/>
+                    </a:p>
+                  </a:txBody>
+                  <a:tcPr marL="70401" marR="70401" marT="35200" marB="35200"/>
+                </a:tc>
+                <a:tc>
+                  <a:txBody>
+                    <a:bodyPr/>
+                    <a:lstStyle/>
+                    <a:p>
+                      <a:pPr algn="ctr"/>
+                      <a:endParaRPr lang="en-US" sz="1200" dirty="0"/>
+                    </a:p>
+                  </a:txBody>
+                  <a:tcPr marL="70401" marR="70401" marT="35200" marB="35200"/>
+                </a:tc>
+                <a:extLst>
+                  <a:ext uri="{0D108BD9-81ED-4DB2-BD59-A6C34878D82A}">
+                    <a16:rowId xmlns:a16="http://schemas.microsoft.com/office/drawing/2014/main" val="1508656455"/>
+                  </a:ext>
+                </a:extLst>
+              </a:tr>
+              <a:tr h="285514">
+                <a:tc>
+                  <a:txBody>
+                    <a:bodyPr/>
+                    <a:lstStyle/>
+                    <a:p>
+                      <a:r>
+                        <a:rPr lang="en-US" sz="1200" b="1" dirty="0"/>
+                        <a:t>ADD3</a:t>
+                      </a:r>
+                    </a:p>
+                  </a:txBody>
+                  <a:tcPr marL="70401" marR="70401" marT="35200" marB="35200"/>
+                </a:tc>
+                <a:tc>
+                  <a:txBody>
+                    <a:bodyPr/>
+                    <a:lstStyle/>
+                    <a:p>
+                      <a:r>
+                        <a:rPr lang="en-US" sz="1200" dirty="0"/>
+                        <a:t>GOTO F0</a:t>
+                      </a:r>
+                    </a:p>
+                  </a:txBody>
+                  <a:tcPr marL="70401" marR="70401" marT="35200" marB="35200"/>
+                </a:tc>
+                <a:tc>
+                  <a:txBody>
+                    <a:bodyPr/>
+                    <a:lstStyle/>
+                    <a:p>
+                      <a:pPr algn="ctr"/>
+                      <a:endParaRPr lang="en-US" sz="1400"/>
+                    </a:p>
+                  </a:txBody>
+                  <a:tcPr marL="70401" marR="70401" marT="35200" marB="35200"/>
+                </a:tc>
+                <a:tc>
+                  <a:txBody>
+                    <a:bodyPr/>
+                    <a:lstStyle/>
+                    <a:p>
+                      <a:pPr algn="ctr"/>
+                      <a:endParaRPr lang="en-US" sz="1400"/>
+                    </a:p>
+                  </a:txBody>
+                  <a:tcPr marL="70401" marR="70401" marT="35200" marB="35200"/>
+                </a:tc>
+                <a:tc>
+                  <a:txBody>
+                    <a:bodyPr/>
+                    <a:lstStyle/>
+                    <a:p>
+                      <a:pPr algn="ctr"/>
+                      <a:endParaRPr lang="en-US" sz="1400"/>
+                    </a:p>
+                  </a:txBody>
+                  <a:tcPr marL="70401" marR="70401" marT="35200" marB="35200"/>
+                </a:tc>
+                <a:tc>
+                  <a:txBody>
+                    <a:bodyPr/>
+                    <a:lstStyle/>
+                    <a:p>
+                      <a:pPr algn="ctr"/>
+                      <a:endParaRPr lang="en-US" sz="1400"/>
+                    </a:p>
+                  </a:txBody>
+                  <a:tcPr marL="70401" marR="70401" marT="35200" marB="35200"/>
+                </a:tc>
+                <a:tc>
+                  <a:txBody>
+                    <a:bodyPr/>
+                    <a:lstStyle/>
+                    <a:p>
+                      <a:pPr algn="ctr"/>
+                      <a:endParaRPr lang="en-US" sz="1400" dirty="0"/>
+                    </a:p>
+                  </a:txBody>
+                  <a:tcPr marL="70401" marR="70401" marT="35200" marB="35200"/>
+                </a:tc>
+                <a:tc>
+                  <a:txBody>
+                    <a:bodyPr/>
+                    <a:lstStyle/>
+                    <a:p>
+                      <a:pPr algn="ctr"/>
+                      <a:endParaRPr lang="en-US" sz="1400"/>
+                    </a:p>
+                  </a:txBody>
+                  <a:tcPr marL="70401" marR="70401" marT="35200" marB="35200"/>
+                </a:tc>
+                <a:tc>
+                  <a:txBody>
+                    <a:bodyPr/>
+                    <a:lstStyle/>
+                    <a:p>
+                      <a:pPr algn="ctr"/>
+                      <a:endParaRPr lang="en-US" sz="1400"/>
+                    </a:p>
+                  </a:txBody>
+                  <a:tcPr marL="70401" marR="70401" marT="35200" marB="35200"/>
+                </a:tc>
+                <a:tc>
+                  <a:txBody>
+                    <a:bodyPr/>
+                    <a:lstStyle/>
+                    <a:p>
+                      <a:pPr algn="ctr"/>
+                      <a:endParaRPr lang="en-US" sz="1400"/>
+                    </a:p>
+                  </a:txBody>
+                  <a:tcPr marL="70401" marR="70401" marT="35200" marB="35200"/>
+                </a:tc>
+                <a:tc>
+                  <a:txBody>
+                    <a:bodyPr/>
+                    <a:lstStyle/>
+                    <a:p>
+                      <a:pPr algn="ctr"/>
+                      <a:endParaRPr lang="en-US" sz="1400" dirty="0"/>
+                    </a:p>
+                  </a:txBody>
+                  <a:tcPr marL="70401" marR="70401" marT="35200" marB="35200"/>
+                </a:tc>
+                <a:tc>
+                  <a:txBody>
+                    <a:bodyPr/>
+                    <a:lstStyle/>
+                    <a:p>
+                      <a:pPr algn="ctr"/>
+                      <a:endParaRPr lang="en-US" sz="1400" dirty="0"/>
+                    </a:p>
+                  </a:txBody>
+                  <a:tcPr marL="70401" marR="70401" marT="35200" marB="35200"/>
+                </a:tc>
+                <a:tc>
+                  <a:txBody>
+                    <a:bodyPr/>
+                    <a:lstStyle/>
+                    <a:p>
+                      <a:pPr algn="ctr"/>
+                      <a:endParaRPr lang="en-US" sz="1400" dirty="0"/>
+                    </a:p>
+                  </a:txBody>
+                  <a:tcPr marL="70401" marR="70401" marT="35200" marB="35200"/>
+                </a:tc>
+                <a:tc>
+                  <a:txBody>
+                    <a:bodyPr/>
+                    <a:lstStyle/>
+                    <a:p>
+                      <a:pPr algn="ctr"/>
+                      <a:endParaRPr lang="en-US" sz="1400" dirty="0"/>
+                    </a:p>
+                  </a:txBody>
+                  <a:tcPr marL="70401" marR="70401" marT="35200" marB="35200"/>
+                </a:tc>
+                <a:tc>
+                  <a:txBody>
+                    <a:bodyPr/>
+                    <a:lstStyle/>
+                    <a:p>
+                      <a:pPr algn="ctr"/>
+                      <a:endParaRPr lang="en-US" sz="1400" dirty="0"/>
+                    </a:p>
+                  </a:txBody>
+                  <a:tcPr marL="70401" marR="70401" marT="35200" marB="35200"/>
+                </a:tc>
+                <a:tc>
+                  <a:txBody>
+                    <a:bodyPr/>
+                    <a:lstStyle/>
+                    <a:p>
+                      <a:pPr algn="ctr"/>
+                      <a:endParaRPr lang="en-US" sz="1400" dirty="0"/>
+                    </a:p>
+                  </a:txBody>
+                  <a:tcPr marL="70401" marR="70401" marT="35200" marB="35200"/>
+                </a:tc>
+                <a:tc>
+                  <a:txBody>
+                    <a:bodyPr/>
+                    <a:lstStyle/>
+                    <a:p>
+                      <a:pPr algn="ctr"/>
+                      <a:r>
+                        <a:rPr lang="en-US" sz="1400" dirty="0"/>
+                        <a:t>F0</a:t>
+                      </a:r>
+                    </a:p>
+                  </a:txBody>
+                  <a:tcPr marL="70401" marR="70401" marT="35200" marB="35200"/>
+                </a:tc>
+                <a:extLst>
+                  <a:ext uri="{0D108BD9-81ED-4DB2-BD59-A6C34878D82A}">
+                    <a16:rowId xmlns:a16="http://schemas.microsoft.com/office/drawing/2014/main" val="1633923824"/>
+                  </a:ext>
+                </a:extLst>
+              </a:tr>
+            </a:tbl>
+          </a:graphicData>
+        </a:graphic>
+      </p:graphicFrame>
+      <p:sp>
+        <p:nvSpPr>
+          <p:cNvPr id="13" name="TextBox 12">
+            <a:extLst>
+              <a:ext uri="{FF2B5EF4-FFF2-40B4-BE49-F238E27FC236}">
+                <a16:creationId xmlns:a16="http://schemas.microsoft.com/office/drawing/2014/main" id="{7F7A7ACF-EFDE-748F-01A0-94D21D1AE3ED}"/>
+              </a:ext>
+            </a:extLst>
+          </p:cNvPr>
+          <p:cNvSpPr txBox="1"/>
+          <p:nvPr/>
+        </p:nvSpPr>
+        <p:spPr>
+          <a:xfrm>
+            <a:off x="0" y="1404878"/>
+            <a:ext cx="4900333" cy="2585323"/>
+          </a:xfrm>
+          <a:prstGeom prst="rect">
+            <a:avLst/>
+          </a:prstGeom>
+          <a:noFill/>
+        </p:spPr>
+        <p:txBody>
+          <a:bodyPr wrap="square">
+            <a:spAutoFit/>
+          </a:bodyPr>
+          <a:lstStyle/>
+          <a:p>
+            <a:r>
+              <a:rPr lang="en-US" dirty="0"/>
+              <a:t>Controller is a state machine (FSM), with transitions defined as:</a:t>
+            </a:r>
+          </a:p>
+          <a:p>
+            <a:r>
+              <a:rPr lang="en-US" dirty="0"/>
+              <a:t>N: go to next state</a:t>
+            </a:r>
+          </a:p>
+          <a:p>
+            <a:r>
+              <a:rPr lang="en-US" dirty="0"/>
+              <a:t>S: do nothing (if ‘busy?’ is asserted) else next state</a:t>
+            </a:r>
+          </a:p>
+          <a:p>
+            <a:r>
+              <a:rPr lang="en-US" dirty="0"/>
+              <a:t>D: check opcode and </a:t>
+            </a:r>
+            <a:r>
+              <a:rPr lang="en-US" dirty="0" err="1"/>
+              <a:t>func</a:t>
+            </a:r>
+            <a:r>
+              <a:rPr lang="en-US" dirty="0"/>
+              <a:t> and go to correct state</a:t>
+            </a:r>
+          </a:p>
+          <a:p>
+            <a:r>
+              <a:rPr lang="en-US" dirty="0"/>
+              <a:t>J: Jump to a particular state</a:t>
+            </a:r>
+          </a:p>
+          <a:p>
+            <a:r>
+              <a:rPr lang="en-US" dirty="0"/>
+              <a:t>EZ, NZ: Jump if condition true else next state</a:t>
+            </a:r>
+          </a:p>
+        </p:txBody>
+      </p:sp>
+      <p:sp>
+        <p:nvSpPr>
+          <p:cNvPr id="15" name="TextBox 14">
+            <a:extLst>
+              <a:ext uri="{FF2B5EF4-FFF2-40B4-BE49-F238E27FC236}">
+                <a16:creationId xmlns:a16="http://schemas.microsoft.com/office/drawing/2014/main" id="{24C5C158-F14B-48DF-B344-54B066453DBE}"/>
+              </a:ext>
+            </a:extLst>
+          </p:cNvPr>
+          <p:cNvSpPr txBox="1"/>
+          <p:nvPr/>
+        </p:nvSpPr>
+        <p:spPr>
+          <a:xfrm>
+            <a:off x="0" y="3877649"/>
+            <a:ext cx="4594490" cy="369332"/>
+          </a:xfrm>
+          <a:prstGeom prst="rect">
+            <a:avLst/>
+          </a:prstGeom>
+          <a:noFill/>
+        </p:spPr>
+        <p:txBody>
+          <a:bodyPr wrap="square">
+            <a:spAutoFit/>
+          </a:bodyPr>
+          <a:lstStyle/>
+          <a:p>
+            <a:pPr marL="0" indent="0">
+              <a:buNone/>
+            </a:pPr>
+            <a:r>
+              <a:rPr lang="en-US" b="1" dirty="0">
+                <a:solidFill>
+                  <a:srgbClr val="FFC000"/>
+                </a:solidFill>
+              </a:rPr>
+              <a:t>Example: add t0 t1 t2</a:t>
+            </a:r>
+            <a:endParaRPr lang="en-US" dirty="0">
+              <a:solidFill>
+                <a:srgbClr val="FFC000"/>
+              </a:solidFill>
+            </a:endParaRPr>
+          </a:p>
+        </p:txBody>
+      </p:sp>
+      <p:sp>
+        <p:nvSpPr>
+          <p:cNvPr id="16" name="Date Placeholder 3">
+            <a:extLst>
+              <a:ext uri="{FF2B5EF4-FFF2-40B4-BE49-F238E27FC236}">
+                <a16:creationId xmlns:a16="http://schemas.microsoft.com/office/drawing/2014/main" id="{A02D9AD4-993A-4D7D-B0F4-A67DAB541251}"/>
+              </a:ext>
+            </a:extLst>
+          </p:cNvPr>
+          <p:cNvSpPr>
+            <a:spLocks noGrp="1"/>
+          </p:cNvSpPr>
+          <p:nvPr>
+            <p:ph type="dt" sz="half" idx="10"/>
+          </p:nvPr>
+        </p:nvSpPr>
+        <p:spPr>
+          <a:xfrm>
+            <a:off x="0" y="6599238"/>
+            <a:ext cx="1828800" cy="258762"/>
+          </a:xfrm>
+        </p:spPr>
+        <p:txBody>
+          <a:bodyPr/>
+          <a:lstStyle/>
+          <a:p>
+            <a:pPr>
+              <a:defRPr/>
+            </a:pPr>
+            <a:r>
+              <a:rPr lang="en-US" dirty="0"/>
+              <a:t>21/12/2020</a:t>
+            </a:r>
+          </a:p>
+        </p:txBody>
+      </p:sp>
+      <p:pic>
+        <p:nvPicPr>
+          <p:cNvPr id="12" name="Picture 11">
+            <a:extLst>
+              <a:ext uri="{FF2B5EF4-FFF2-40B4-BE49-F238E27FC236}">
+                <a16:creationId xmlns:a16="http://schemas.microsoft.com/office/drawing/2014/main" id="{441A81E1-CB4C-4CE7-9D63-8900A34DA3A4}"/>
+              </a:ext>
+            </a:extLst>
+          </p:cNvPr>
+          <p:cNvPicPr>
+            <a:picLocks noChangeAspect="1"/>
+          </p:cNvPicPr>
+          <p:nvPr/>
+        </p:nvPicPr>
+        <p:blipFill rotWithShape="1">
+          <a:blip r:embed="rId4">
+            <a:alphaModFix/>
+          </a:blip>
+          <a:srcRect b="90728"/>
+          <a:stretch/>
+        </p:blipFill>
+        <p:spPr>
+          <a:xfrm>
+            <a:off x="52023" y="4255603"/>
+            <a:ext cx="9045266" cy="213195"/>
+          </a:xfrm>
+          <a:prstGeom prst="rect">
+            <a:avLst/>
+          </a:prstGeom>
+        </p:spPr>
+      </p:pic>
+      <p:pic>
+        <p:nvPicPr>
+          <p:cNvPr id="19" name="Picture 18">
+            <a:extLst>
+              <a:ext uri="{FF2B5EF4-FFF2-40B4-BE49-F238E27FC236}">
+                <a16:creationId xmlns:a16="http://schemas.microsoft.com/office/drawing/2014/main" id="{0EC9EA79-B4D8-4C68-B472-3D02F83E3340}"/>
+              </a:ext>
+            </a:extLst>
+          </p:cNvPr>
+          <p:cNvPicPr>
+            <a:picLocks noChangeAspect="1"/>
+          </p:cNvPicPr>
+          <p:nvPr/>
+        </p:nvPicPr>
+        <p:blipFill rotWithShape="1">
+          <a:blip r:embed="rId4">
+            <a:alphaModFix/>
+          </a:blip>
+          <a:srcRect t="1" b="77160"/>
+          <a:stretch/>
+        </p:blipFill>
+        <p:spPr>
+          <a:xfrm>
+            <a:off x="55855" y="4264225"/>
+            <a:ext cx="9045266" cy="525157"/>
+          </a:xfrm>
+          <a:prstGeom prst="rect">
+            <a:avLst/>
+          </a:prstGeom>
+        </p:spPr>
+      </p:pic>
+      <p:pic>
+        <p:nvPicPr>
+          <p:cNvPr id="20" name="Picture 19">
+            <a:extLst>
+              <a:ext uri="{FF2B5EF4-FFF2-40B4-BE49-F238E27FC236}">
+                <a16:creationId xmlns:a16="http://schemas.microsoft.com/office/drawing/2014/main" id="{AC096862-7F08-4FBD-A60A-6473F4F7F3AB}"/>
+              </a:ext>
+            </a:extLst>
+          </p:cNvPr>
+          <p:cNvPicPr>
+            <a:picLocks noChangeAspect="1"/>
+          </p:cNvPicPr>
+          <p:nvPr/>
+        </p:nvPicPr>
+        <p:blipFill rotWithShape="1">
+          <a:blip r:embed="rId4">
+            <a:alphaModFix/>
+          </a:blip>
+          <a:srcRect t="1" b="66356"/>
+          <a:stretch/>
+        </p:blipFill>
+        <p:spPr>
+          <a:xfrm>
+            <a:off x="59687" y="4255601"/>
+            <a:ext cx="9045266" cy="773599"/>
+          </a:xfrm>
+          <a:prstGeom prst="rect">
+            <a:avLst/>
+          </a:prstGeom>
+        </p:spPr>
+      </p:pic>
+      <p:pic>
+        <p:nvPicPr>
+          <p:cNvPr id="21" name="Picture 20">
+            <a:extLst>
+              <a:ext uri="{FF2B5EF4-FFF2-40B4-BE49-F238E27FC236}">
+                <a16:creationId xmlns:a16="http://schemas.microsoft.com/office/drawing/2014/main" id="{90255B4D-628A-4C1A-8F0B-A26012D03EA7}"/>
+              </a:ext>
+            </a:extLst>
+          </p:cNvPr>
+          <p:cNvPicPr>
+            <a:picLocks noChangeAspect="1"/>
+          </p:cNvPicPr>
+          <p:nvPr/>
+        </p:nvPicPr>
+        <p:blipFill rotWithShape="1">
+          <a:blip r:embed="rId4">
+            <a:alphaModFix/>
+          </a:blip>
+          <a:srcRect t="2" b="3393"/>
+          <a:stretch/>
+        </p:blipFill>
+        <p:spPr>
+          <a:xfrm>
+            <a:off x="70752" y="4264225"/>
+            <a:ext cx="9045266" cy="2221397"/>
+          </a:xfrm>
+          <a:prstGeom prst="rect">
+            <a:avLst/>
+          </a:prstGeom>
+        </p:spPr>
+      </p:pic>
+    </p:spTree>
+    <p:extLst>
+      <p:ext uri="{BB962C8B-B14F-4D97-AF65-F5344CB8AC3E}">
+        <p14:creationId xmlns:p14="http://schemas.microsoft.com/office/powerpoint/2010/main" val="195661747"/>
+      </p:ext>
+    </p:extLst>
+  </p:cSld>
+  <p:clrMapOvr>
+    <a:masterClrMapping/>
+  </p:clrMapOvr>
+  <p:timing>
+    <p:tnLst>
+      <p:par>
+        <p:cTn id="1" dur="indefinite" restart="never" nodeType="tmRoot">
+          <p:childTnLst>
+            <p:seq concurrent="1" nextAc="seek">
+              <p:cTn id="2" dur="indefinite" nodeType="mainSeq">
+                <p:childTnLst>
+                  <p:par>
+                    <p:cTn id="3" fill="hold">
+                      <p:stCondLst>
+                        <p:cond delay="indefinite"/>
+                        <p:cond evt="onBegin" delay="0">
+                          <p:tn val="2"/>
+                        </p:cond>
+                      </p:stCondLst>
+                      <p:childTnLst>
+                        <p:par>
+                          <p:cTn id="4" fill="hold">
+                            <p:stCondLst>
+                              <p:cond delay="0"/>
+                            </p:stCondLst>
+                            <p:childTnLst>
+                              <p:par>
+                                <p:cTn id="5" presetID="1" presetClass="exit" presetSubtype="0" fill="hold" nodeType="withEffect">
+                                  <p:stCondLst>
+                                    <p:cond delay="0"/>
+                                  </p:stCondLst>
+                                  <p:childTnLst>
+                                    <p:set>
+                                      <p:cBhvr>
+                                        <p:cTn id="6" dur="1" fill="hold">
+                                          <p:stCondLst>
+                                            <p:cond delay="0"/>
+                                          </p:stCondLst>
+                                        </p:cTn>
+                                        <p:tgtEl>
+                                          <p:spTgt spid="8"/>
+                                        </p:tgtEl>
+                                        <p:attrNameLst>
+                                          <p:attrName>style.visibility</p:attrName>
+                                        </p:attrNameLst>
+                                      </p:cBhvr>
+                                      <p:to>
+                                        <p:strVal val="hidden"/>
+                                      </p:to>
+                                    </p:set>
+                                  </p:childTnLst>
+                                </p:cTn>
+                              </p:par>
+                            </p:childTnLst>
+                          </p:cTn>
+                        </p:par>
+                      </p:childTnLst>
+                    </p:cTn>
+                  </p:par>
+                  <p:par>
+                    <p:cTn id="7" fill="hold">
+                      <p:stCondLst>
+                        <p:cond delay="indefinite"/>
+                      </p:stCondLst>
+                      <p:childTnLst>
+                        <p:par>
+                          <p:cTn id="8" fill="hold">
+                            <p:stCondLst>
+                              <p:cond delay="0"/>
+                            </p:stCondLst>
+                            <p:childTnLst>
+                              <p:par>
+                                <p:cTn id="9" presetID="1" presetClass="entr" presetSubtype="0" fill="hold" grpId="0" nodeType="clickEffect">
+                                  <p:stCondLst>
+                                    <p:cond delay="0"/>
+                                  </p:stCondLst>
+                                  <p:childTnLst>
+                                    <p:set>
+                                      <p:cBhvr>
+                                        <p:cTn id="10" dur="1" fill="hold">
+                                          <p:stCondLst>
+                                            <p:cond delay="0"/>
+                                          </p:stCondLst>
+                                        </p:cTn>
+                                        <p:tgtEl>
+                                          <p:spTgt spid="13">
+                                            <p:txEl>
+                                              <p:pRg st="0" end="0"/>
+                                            </p:txEl>
+                                          </p:spTgt>
+                                        </p:tgtEl>
+                                        <p:attrNameLst>
+                                          <p:attrName>style.visibility</p:attrName>
+                                        </p:attrNameLst>
+                                      </p:cBhvr>
+                                      <p:to>
+                                        <p:strVal val="visible"/>
+                                      </p:to>
+                                    </p:set>
+                                  </p:childTnLst>
+                                </p:cTn>
+                              </p:par>
+                            </p:childTnLst>
+                          </p:cTn>
+                        </p:par>
+                      </p:childTnLst>
+                    </p:cTn>
+                  </p:par>
+                  <p:par>
+                    <p:cTn id="11" fill="hold">
+                      <p:stCondLst>
+                        <p:cond delay="indefinite"/>
+                      </p:stCondLst>
+                      <p:childTnLst>
+                        <p:par>
+                          <p:cTn id="12" fill="hold">
+                            <p:stCondLst>
+                              <p:cond delay="0"/>
+                            </p:stCondLst>
+                            <p:childTnLst>
+                              <p:par>
+                                <p:cTn id="13" presetID="1" presetClass="entr" presetSubtype="0" fill="hold" grpId="0" nodeType="clickEffect">
+                                  <p:stCondLst>
+                                    <p:cond delay="0"/>
+                                  </p:stCondLst>
+                                  <p:childTnLst>
+                                    <p:set>
+                                      <p:cBhvr>
+                                        <p:cTn id="14" dur="1" fill="hold">
+                                          <p:stCondLst>
+                                            <p:cond delay="0"/>
+                                          </p:stCondLst>
+                                        </p:cTn>
+                                        <p:tgtEl>
+                                          <p:spTgt spid="13">
+                                            <p:txEl>
+                                              <p:pRg st="1" end="1"/>
+                                            </p:txEl>
+                                          </p:spTgt>
+                                        </p:tgtEl>
+                                        <p:attrNameLst>
+                                          <p:attrName>style.visibility</p:attrName>
+                                        </p:attrNameLst>
+                                      </p:cBhvr>
+                                      <p:to>
+                                        <p:strVal val="visible"/>
+                                      </p:to>
+                                    </p:set>
+                                  </p:childTnLst>
+                                </p:cTn>
+                              </p:par>
+                            </p:childTnLst>
+                          </p:cTn>
+                        </p:par>
+                      </p:childTnLst>
+                    </p:cTn>
+                  </p:par>
+                  <p:par>
+                    <p:cTn id="15" fill="hold">
+                      <p:stCondLst>
+                        <p:cond delay="indefinite"/>
+                      </p:stCondLst>
+                      <p:childTnLst>
+                        <p:par>
+                          <p:cTn id="16" fill="hold">
+                            <p:stCondLst>
+                              <p:cond delay="0"/>
+                            </p:stCondLst>
+                            <p:childTnLst>
+                              <p:par>
+                                <p:cTn id="17" presetID="1" presetClass="entr" presetSubtype="0" fill="hold" grpId="0" nodeType="clickEffect">
+                                  <p:stCondLst>
+                                    <p:cond delay="0"/>
+                                  </p:stCondLst>
+                                  <p:childTnLst>
+                                    <p:set>
+                                      <p:cBhvr>
+                                        <p:cTn id="18" dur="1" fill="hold">
+                                          <p:stCondLst>
+                                            <p:cond delay="0"/>
+                                          </p:stCondLst>
+                                        </p:cTn>
+                                        <p:tgtEl>
+                                          <p:spTgt spid="13">
+                                            <p:txEl>
+                                              <p:pRg st="2" end="2"/>
+                                            </p:txEl>
+                                          </p:spTgt>
+                                        </p:tgtEl>
+                                        <p:attrNameLst>
+                                          <p:attrName>style.visibility</p:attrName>
+                                        </p:attrNameLst>
+                                      </p:cBhvr>
+                                      <p:to>
+                                        <p:strVal val="visible"/>
+                                      </p:to>
+                                    </p:set>
+                                  </p:childTnLst>
+                                </p:cTn>
+                              </p:par>
+                            </p:childTnLst>
+                          </p:cTn>
+                        </p:par>
+                      </p:childTnLst>
+                    </p:cTn>
+                  </p:par>
+                  <p:par>
+                    <p:cTn id="19" fill="hold">
+                      <p:stCondLst>
+                        <p:cond delay="indefinite"/>
+                      </p:stCondLst>
+                      <p:childTnLst>
+                        <p:par>
+                          <p:cTn id="20" fill="hold">
+                            <p:stCondLst>
+                              <p:cond delay="0"/>
+                            </p:stCondLst>
+                            <p:childTnLst>
+                              <p:par>
+                                <p:cTn id="21" presetID="1" presetClass="entr" presetSubtype="0" fill="hold" grpId="0" nodeType="clickEffect">
+                                  <p:stCondLst>
+                                    <p:cond delay="0"/>
+                                  </p:stCondLst>
+                                  <p:childTnLst>
+                                    <p:set>
+                                      <p:cBhvr>
+                                        <p:cTn id="22" dur="1" fill="hold">
+                                          <p:stCondLst>
+                                            <p:cond delay="0"/>
+                                          </p:stCondLst>
+                                        </p:cTn>
+                                        <p:tgtEl>
+                                          <p:spTgt spid="13">
+                                            <p:txEl>
+                                              <p:pRg st="3" end="3"/>
+                                            </p:txEl>
+                                          </p:spTgt>
+                                        </p:tgtEl>
+                                        <p:attrNameLst>
+                                          <p:attrName>style.visibility</p:attrName>
+                                        </p:attrNameLst>
+                                      </p:cBhvr>
+                                      <p:to>
+                                        <p:strVal val="visible"/>
+                                      </p:to>
+                                    </p:set>
+                                  </p:childTnLst>
+                                </p:cTn>
+                              </p:par>
+                            </p:childTnLst>
+                          </p:cTn>
+                        </p:par>
+                      </p:childTnLst>
+                    </p:cTn>
+                  </p:par>
+                  <p:par>
+                    <p:cTn id="23" fill="hold">
+                      <p:stCondLst>
+                        <p:cond delay="indefinite"/>
+                      </p:stCondLst>
+                      <p:childTnLst>
+                        <p:par>
+                          <p:cTn id="24" fill="hold">
+                            <p:stCondLst>
+                              <p:cond delay="0"/>
+                            </p:stCondLst>
+                            <p:childTnLst>
+                              <p:par>
+                                <p:cTn id="25" presetID="1" presetClass="entr" presetSubtype="0" fill="hold" grpId="0" nodeType="clickEffect">
+                                  <p:stCondLst>
+                                    <p:cond delay="0"/>
+                                  </p:stCondLst>
+                                  <p:childTnLst>
+                                    <p:set>
+                                      <p:cBhvr>
+                                        <p:cTn id="26" dur="1" fill="hold">
+                                          <p:stCondLst>
+                                            <p:cond delay="0"/>
+                                          </p:stCondLst>
+                                        </p:cTn>
+                                        <p:tgtEl>
+                                          <p:spTgt spid="13">
+                                            <p:txEl>
+                                              <p:pRg st="4" end="4"/>
+                                            </p:txEl>
+                                          </p:spTgt>
+                                        </p:tgtEl>
+                                        <p:attrNameLst>
+                                          <p:attrName>style.visibility</p:attrName>
+                                        </p:attrNameLst>
+                                      </p:cBhvr>
+                                      <p:to>
+                                        <p:strVal val="visible"/>
+                                      </p:to>
+                                    </p:set>
+                                  </p:childTnLst>
+                                </p:cTn>
+                              </p:par>
+                            </p:childTnLst>
+                          </p:cTn>
+                        </p:par>
+                      </p:childTnLst>
+                    </p:cTn>
+                  </p:par>
+                  <p:par>
+                    <p:cTn id="27" fill="hold">
+                      <p:stCondLst>
+                        <p:cond delay="indefinite"/>
+                      </p:stCondLst>
+                      <p:childTnLst>
+                        <p:par>
+                          <p:cTn id="28" fill="hold">
+                            <p:stCondLst>
+                              <p:cond delay="0"/>
+                            </p:stCondLst>
+                            <p:childTnLst>
+                              <p:par>
+                                <p:cTn id="29" presetID="1" presetClass="entr" presetSubtype="0" fill="hold" grpId="0" nodeType="clickEffect">
+                                  <p:stCondLst>
+                                    <p:cond delay="0"/>
+                                  </p:stCondLst>
+                                  <p:childTnLst>
+                                    <p:set>
+                                      <p:cBhvr>
+                                        <p:cTn id="30" dur="1" fill="hold">
+                                          <p:stCondLst>
+                                            <p:cond delay="0"/>
+                                          </p:stCondLst>
+                                        </p:cTn>
+                                        <p:tgtEl>
+                                          <p:spTgt spid="13">
+                                            <p:txEl>
+                                              <p:pRg st="5" end="5"/>
+                                            </p:txEl>
+                                          </p:spTgt>
+                                        </p:tgtEl>
+                                        <p:attrNameLst>
+                                          <p:attrName>style.visibility</p:attrName>
+                                        </p:attrNameLst>
+                                      </p:cBhvr>
+                                      <p:to>
+                                        <p:strVal val="visible"/>
+                                      </p:to>
+                                    </p:set>
+                                  </p:childTnLst>
+                                </p:cTn>
+                              </p:par>
+                            </p:childTnLst>
+                          </p:cTn>
+                        </p:par>
+                      </p:childTnLst>
+                    </p:cTn>
+                  </p:par>
+                  <p:par>
+                    <p:cTn id="31" fill="hold">
+                      <p:stCondLst>
+                        <p:cond delay="indefinite"/>
+                      </p:stCondLst>
+                      <p:childTnLst>
+                        <p:par>
+                          <p:cTn id="32" fill="hold">
+                            <p:stCondLst>
+                              <p:cond delay="0"/>
+                            </p:stCondLst>
+                            <p:childTnLst>
+                              <p:par>
+                                <p:cTn id="33" presetID="1" presetClass="entr" presetSubtype="0" fill="hold" grpId="0" nodeType="clickEffect">
+                                  <p:stCondLst>
+                                    <p:cond delay="0"/>
+                                  </p:stCondLst>
+                                  <p:childTnLst>
+                                    <p:set>
+                                      <p:cBhvr>
+                                        <p:cTn id="34" dur="1" fill="hold">
+                                          <p:stCondLst>
+                                            <p:cond delay="0"/>
+                                          </p:stCondLst>
+                                        </p:cTn>
+                                        <p:tgtEl>
+                                          <p:spTgt spid="15"/>
+                                        </p:tgtEl>
+                                        <p:attrNameLst>
+                                          <p:attrName>style.visibility</p:attrName>
+                                        </p:attrNameLst>
+                                      </p:cBhvr>
+                                      <p:to>
+                                        <p:strVal val="visible"/>
+                                      </p:to>
+                                    </p:set>
+                                  </p:childTnLst>
+                                </p:cTn>
+                              </p:par>
+                            </p:childTnLst>
+                          </p:cTn>
+                        </p:par>
+                      </p:childTnLst>
+                    </p:cTn>
+                  </p:par>
+                  <p:par>
+                    <p:cTn id="35" fill="hold">
+                      <p:stCondLst>
+                        <p:cond delay="indefinite"/>
+                      </p:stCondLst>
+                      <p:childTnLst>
+                        <p:par>
+                          <p:cTn id="36" fill="hold">
+                            <p:stCondLst>
+                              <p:cond delay="0"/>
+                            </p:stCondLst>
+                            <p:childTnLst>
+                              <p:par>
+                                <p:cTn id="37" presetID="1" presetClass="entr" presetSubtype="0" fill="hold" nodeType="clickEffect">
+                                  <p:stCondLst>
+                                    <p:cond delay="0"/>
+                                  </p:stCondLst>
+                                  <p:childTnLst>
+                                    <p:set>
+                                      <p:cBhvr>
+                                        <p:cTn id="38" dur="1" fill="hold">
+                                          <p:stCondLst>
+                                            <p:cond delay="0"/>
+                                          </p:stCondLst>
+                                        </p:cTn>
+                                        <p:tgtEl>
+                                          <p:spTgt spid="12"/>
+                                        </p:tgtEl>
+                                        <p:attrNameLst>
+                                          <p:attrName>style.visibility</p:attrName>
+                                        </p:attrNameLst>
+                                      </p:cBhvr>
+                                      <p:to>
+                                        <p:strVal val="visible"/>
+                                      </p:to>
+                                    </p:set>
+                                  </p:childTnLst>
+                                </p:cTn>
+                              </p:par>
+                            </p:childTnLst>
+                          </p:cTn>
+                        </p:par>
+                      </p:childTnLst>
+                    </p:cTn>
+                  </p:par>
+                  <p:par>
+                    <p:cTn id="39" fill="hold">
+                      <p:stCondLst>
+                        <p:cond delay="indefinite"/>
+                      </p:stCondLst>
+                      <p:childTnLst>
+                        <p:par>
+                          <p:cTn id="40" fill="hold">
+                            <p:stCondLst>
+                              <p:cond delay="0"/>
+                            </p:stCondLst>
+                            <p:childTnLst>
+                              <p:par>
+                                <p:cTn id="41" presetID="1" presetClass="entr" presetSubtype="0" fill="hold" nodeType="clickEffect">
+                                  <p:stCondLst>
+                                    <p:cond delay="0"/>
+                                  </p:stCondLst>
+                                  <p:childTnLst>
+                                    <p:set>
+                                      <p:cBhvr>
+                                        <p:cTn id="42" dur="1" fill="hold">
+                                          <p:stCondLst>
+                                            <p:cond delay="0"/>
+                                          </p:stCondLst>
+                                        </p:cTn>
+                                        <p:tgtEl>
+                                          <p:spTgt spid="19"/>
+                                        </p:tgtEl>
+                                        <p:attrNameLst>
+                                          <p:attrName>style.visibility</p:attrName>
+                                        </p:attrNameLst>
+                                      </p:cBhvr>
+                                      <p:to>
+                                        <p:strVal val="visible"/>
+                                      </p:to>
+                                    </p:set>
+                                  </p:childTnLst>
+                                </p:cTn>
+                              </p:par>
+                            </p:childTnLst>
+                          </p:cTn>
+                        </p:par>
+                      </p:childTnLst>
+                    </p:cTn>
+                  </p:par>
+                  <p:par>
+                    <p:cTn id="43" fill="hold">
+                      <p:stCondLst>
+                        <p:cond delay="indefinite"/>
+                      </p:stCondLst>
+                      <p:childTnLst>
+                        <p:par>
+                          <p:cTn id="44" fill="hold">
+                            <p:stCondLst>
+                              <p:cond delay="0"/>
+                            </p:stCondLst>
+                            <p:childTnLst>
+                              <p:par>
+                                <p:cTn id="45" presetID="1" presetClass="entr" presetSubtype="0" fill="hold" nodeType="clickEffect">
+                                  <p:stCondLst>
+                                    <p:cond delay="0"/>
+                                  </p:stCondLst>
+                                  <p:childTnLst>
+                                    <p:set>
+                                      <p:cBhvr>
+                                        <p:cTn id="46" dur="1" fill="hold">
+                                          <p:stCondLst>
+                                            <p:cond delay="0"/>
+                                          </p:stCondLst>
+                                        </p:cTn>
+                                        <p:tgtEl>
+                                          <p:spTgt spid="20"/>
+                                        </p:tgtEl>
+                                        <p:attrNameLst>
+                                          <p:attrName>style.visibility</p:attrName>
+                                        </p:attrNameLst>
+                                      </p:cBhvr>
+                                      <p:to>
+                                        <p:strVal val="visible"/>
+                                      </p:to>
+                                    </p:set>
+                                  </p:childTnLst>
+                                </p:cTn>
+                              </p:par>
+                            </p:childTnLst>
+                          </p:cTn>
+                        </p:par>
+                      </p:childTnLst>
+                    </p:cTn>
+                  </p:par>
+                  <p:par>
+                    <p:cTn id="47" fill="hold">
+                      <p:stCondLst>
+                        <p:cond delay="indefinite"/>
+                      </p:stCondLst>
+                      <p:childTnLst>
+                        <p:par>
+                          <p:cTn id="48" fill="hold">
+                            <p:stCondLst>
+                              <p:cond delay="0"/>
+                            </p:stCondLst>
+                            <p:childTnLst>
+                              <p:par>
+                                <p:cTn id="49" presetID="1" presetClass="entr" presetSubtype="0" fill="hold" nodeType="clickEffect">
+                                  <p:stCondLst>
+                                    <p:cond delay="0"/>
+                                  </p:stCondLst>
+                                  <p:childTnLst>
+                                    <p:set>
+                                      <p:cBhvr>
+                                        <p:cTn id="50" dur="1" fill="hold">
+                                          <p:stCondLst>
+                                            <p:cond delay="0"/>
+                                          </p:stCondLst>
+                                        </p:cTn>
+                                        <p:tgtEl>
+                                          <p:spTgt spid="21"/>
+                                        </p:tgtEl>
+                                        <p:attrNameLst>
+                                          <p:attrName>style.visibility</p:attrName>
+                                        </p:attrNameLst>
+                                      </p:cBhvr>
+                                      <p:to>
+                                        <p:strVal val="visible"/>
+                                      </p:to>
+                                    </p:set>
+                                  </p:childTnLst>
+                                </p:cTn>
+                              </p:par>
+                            </p:childTnLst>
+                          </p:cTn>
+                        </p:par>
+                      </p:childTnLst>
+                    </p:cTn>
+                  </p:par>
+                </p:childTnLst>
+              </p:cTn>
+              <p:prevCondLst>
+                <p:cond evt="onPrev" delay="0">
+                  <p:tgtEl>
+                    <p:sldTgt/>
+                  </p:tgtEl>
+                </p:cond>
+              </p:prevCondLst>
+              <p:nextCondLst>
+                <p:cond evt="onNext" delay="0">
+                  <p:tgtEl>
+                    <p:sldTgt/>
+                  </p:tgtEl>
+                </p:cond>
+              </p:nextCondLst>
+            </p:seq>
+          </p:childTnLst>
+        </p:cTn>
+      </p:par>
+    </p:tnLst>
+    <p:bldLst>
+      <p:bldP spid="13" grpId="0" build="p"/>
+      <p:bldP spid="15" grpId="0"/>
+    </p:bldLst>
+  </p:timing>
+</p:sld>
+</file>
+
+<file path=ppt/slides/slide24.xml><?xml version="1.0" encoding="utf-8"?>
+<p:sld xmlns:a="http://schemas.openxmlformats.org/drawingml/2006/main" xmlns:r="http://schemas.openxmlformats.org/officeDocument/2006/relationships" xmlns:p="http://schemas.openxmlformats.org/presentationml/2006/main">
+  <p:cSld>
+    <p:spTree>
+      <p:nvGrpSpPr>
+        <p:cNvPr id="1" name=""/>
+        <p:cNvGrpSpPr/>
+        <p:nvPr/>
+      </p:nvGrpSpPr>
+      <p:grpSpPr>
+        <a:xfrm>
+          <a:off x="0" y="0"/>
+          <a:ext cx="0" cy="0"/>
+          <a:chOff x="0" y="0"/>
+          <a:chExt cx="0" cy="0"/>
+        </a:xfrm>
+      </p:grpSpPr>
+      <p:sp>
+        <p:nvSpPr>
+          <p:cNvPr id="2" name="Title 1">
+            <a:extLst>
+              <a:ext uri="{FF2B5EF4-FFF2-40B4-BE49-F238E27FC236}">
+                <a16:creationId xmlns:a16="http://schemas.microsoft.com/office/drawing/2014/main" id="{5208E87F-58EA-4A72-840D-5BD4A4E8FDD1}"/>
+              </a:ext>
+            </a:extLst>
+          </p:cNvPr>
+          <p:cNvSpPr>
+            <a:spLocks noGrp="1"/>
+          </p:cNvSpPr>
+          <p:nvPr>
+            <p:ph type="title"/>
+          </p:nvPr>
+        </p:nvSpPr>
+        <p:spPr/>
+        <p:txBody>
+          <a:bodyPr/>
+          <a:lstStyle/>
+          <a:p>
+            <a:r>
+              <a:rPr lang="en-US" dirty="0" err="1"/>
+              <a:t>Microsequencer</a:t>
+            </a:r>
+            <a:endParaRPr lang="en-US" dirty="0"/>
+          </a:p>
+        </p:txBody>
+      </p:sp>
+      <p:pic>
+        <p:nvPicPr>
+          <p:cNvPr id="7" name="Content Placeholder 6">
+            <a:extLst>
+              <a:ext uri="{FF2B5EF4-FFF2-40B4-BE49-F238E27FC236}">
+                <a16:creationId xmlns:a16="http://schemas.microsoft.com/office/drawing/2014/main" id="{D70A806E-3D62-47B1-B889-DB40EC8902F1}"/>
+              </a:ext>
+            </a:extLst>
+          </p:cNvPr>
+          <p:cNvPicPr>
+            <a:picLocks noGrp="1" noChangeAspect="1"/>
+          </p:cNvPicPr>
+          <p:nvPr>
+            <p:ph idx="1"/>
+          </p:nvPr>
+        </p:nvPicPr>
+        <p:blipFill>
+          <a:blip r:embed="rId2">
+            <a:extLst>
+              <a:ext uri="{BEBA8EAE-BF5A-486C-A8C5-ECC9F3942E4B}">
+                <a14:imgProps xmlns:a14="http://schemas.microsoft.com/office/drawing/2010/main">
+                  <a14:imgLayer r:embed="rId3">
+                    <a14:imgEffect>
+                      <a14:artisticPhotocopy/>
+                    </a14:imgEffect>
+                  </a14:imgLayer>
+                </a14:imgProps>
+              </a:ext>
+            </a:extLst>
+          </a:blip>
+          <a:stretch>
+            <a:fillRect/>
+          </a:stretch>
+        </p:blipFill>
+        <p:spPr>
+          <a:xfrm>
+            <a:off x="0" y="1586266"/>
+            <a:ext cx="9144000" cy="4509734"/>
+          </a:xfrm>
+        </p:spPr>
+      </p:pic>
+      <p:sp>
+        <p:nvSpPr>
+          <p:cNvPr id="4" name="Date Placeholder 3">
+            <a:extLst>
+              <a:ext uri="{FF2B5EF4-FFF2-40B4-BE49-F238E27FC236}">
+                <a16:creationId xmlns:a16="http://schemas.microsoft.com/office/drawing/2014/main" id="{E8A6A0E0-C870-428F-A9E3-56A56B3FF964}"/>
+              </a:ext>
+            </a:extLst>
+          </p:cNvPr>
+          <p:cNvSpPr>
+            <a:spLocks noGrp="1"/>
+          </p:cNvSpPr>
+          <p:nvPr>
+            <p:ph type="dt" sz="half" idx="10"/>
+          </p:nvPr>
+        </p:nvSpPr>
+        <p:spPr/>
+        <p:txBody>
+          <a:bodyPr/>
+          <a:lstStyle/>
+          <a:p>
+            <a:pPr>
+              <a:defRPr/>
+            </a:pPr>
+            <a:r>
+              <a:rPr lang="en-US"/>
+              <a:t>21/12/2020</a:t>
+            </a:r>
+          </a:p>
+        </p:txBody>
+      </p:sp>
+      <p:sp>
+        <p:nvSpPr>
+          <p:cNvPr id="5" name="Slide Number Placeholder 4">
+            <a:extLst>
+              <a:ext uri="{FF2B5EF4-FFF2-40B4-BE49-F238E27FC236}">
+                <a16:creationId xmlns:a16="http://schemas.microsoft.com/office/drawing/2014/main" id="{9742971A-0BE5-4A70-B7C5-3CB3A41B5FDE}"/>
+              </a:ext>
+            </a:extLst>
+          </p:cNvPr>
+          <p:cNvSpPr>
+            <a:spLocks noGrp="1"/>
+          </p:cNvSpPr>
+          <p:nvPr>
+            <p:ph type="sldNum" sz="quarter" idx="12"/>
+          </p:nvPr>
+        </p:nvSpPr>
+        <p:spPr/>
+        <p:txBody>
+          <a:bodyPr/>
+          <a:lstStyle/>
+          <a:p>
+            <a:pPr>
+              <a:defRPr/>
+            </a:pPr>
+            <a:fld id="{CA887A73-1AE0-46F8-856A-18EA1CF30A1B}" type="slidenum">
+              <a:rPr lang="en-US" altLang="en-US" smtClean="0"/>
+              <a:pPr>
+                <a:defRPr/>
+              </a:pPr>
+              <a:t>24</a:t>
+            </a:fld>
+            <a:endParaRPr lang="en-US" altLang="en-US"/>
+          </a:p>
+        </p:txBody>
+      </p:sp>
+      <p:pic>
+        <p:nvPicPr>
+          <p:cNvPr id="9" name="Picture 8">
+            <a:extLst>
+              <a:ext uri="{FF2B5EF4-FFF2-40B4-BE49-F238E27FC236}">
+                <a16:creationId xmlns:a16="http://schemas.microsoft.com/office/drawing/2014/main" id="{EB222876-D8B4-4D1D-968D-D2073DD115E8}"/>
+              </a:ext>
+            </a:extLst>
+          </p:cNvPr>
+          <p:cNvPicPr>
+            <a:picLocks noChangeAspect="1"/>
+          </p:cNvPicPr>
+          <p:nvPr/>
+        </p:nvPicPr>
+        <p:blipFill>
+          <a:blip r:embed="rId4">
+            <a:extLst>
+              <a:ext uri="{BEBA8EAE-BF5A-486C-A8C5-ECC9F3942E4B}">
+                <a14:imgProps xmlns:a14="http://schemas.microsoft.com/office/drawing/2010/main">
+                  <a14:imgLayer r:embed="rId5">
+                    <a14:imgEffect>
+                      <a14:artisticPhotocopy trans="68000" detail="10"/>
+                    </a14:imgEffect>
+                  </a14:imgLayer>
+                </a14:imgProps>
+              </a:ext>
+            </a:extLst>
+          </a:blip>
+          <a:stretch>
+            <a:fillRect/>
+          </a:stretch>
+        </p:blipFill>
+        <p:spPr>
+          <a:xfrm>
+            <a:off x="7200629" y="4648200"/>
+            <a:ext cx="1943371" cy="1867161"/>
+          </a:xfrm>
+          <a:prstGeom prst="rect">
+            <a:avLst/>
+          </a:prstGeom>
+        </p:spPr>
+      </p:pic>
+    </p:spTree>
+    <p:extLst>
+      <p:ext uri="{BB962C8B-B14F-4D97-AF65-F5344CB8AC3E}">
+        <p14:creationId xmlns:p14="http://schemas.microsoft.com/office/powerpoint/2010/main" val="2680505792"/>
+      </p:ext>
+    </p:extLst>
+  </p:cSld>
+  <p:clrMapOvr>
+    <a:masterClrMapping/>
+  </p:clrMapOvr>
+</p:sld>
+</file>
+
+<file path=ppt/slides/slide25.xml><?xml version="1.0" encoding="utf-8"?>
+<p:sld xmlns:a="http://schemas.openxmlformats.org/drawingml/2006/main" xmlns:r="http://schemas.openxmlformats.org/officeDocument/2006/relationships" xmlns:p="http://schemas.openxmlformats.org/presentationml/2006/main">
+  <p:cSld>
+    <p:spTree>
+      <p:nvGrpSpPr>
+        <p:cNvPr id="1" name=""/>
+        <p:cNvGrpSpPr/>
+        <p:nvPr/>
+      </p:nvGrpSpPr>
+      <p:grpSpPr>
+        <a:xfrm>
+          <a:off x="0" y="0"/>
+          <a:ext cx="0" cy="0"/>
+          <a:chOff x="0" y="0"/>
+          <a:chExt cx="0" cy="0"/>
+        </a:xfrm>
+      </p:grpSpPr>
+      <p:sp>
+        <p:nvSpPr>
+          <p:cNvPr id="2" name="Title 1">
+            <a:extLst>
+              <a:ext uri="{FF2B5EF4-FFF2-40B4-BE49-F238E27FC236}">
+                <a16:creationId xmlns:a16="http://schemas.microsoft.com/office/drawing/2014/main" id="{3C09C2A2-E746-46D0-87A1-A23D83A7E4DC}"/>
+              </a:ext>
+            </a:extLst>
+          </p:cNvPr>
+          <p:cNvSpPr>
+            <a:spLocks noGrp="1"/>
+          </p:cNvSpPr>
+          <p:nvPr>
+            <p:ph type="title"/>
+          </p:nvPr>
+        </p:nvSpPr>
+        <p:spPr/>
+        <p:txBody>
+          <a:bodyPr/>
+          <a:lstStyle/>
+          <a:p>
+            <a:r>
+              <a:rPr lang="en-US" dirty="0"/>
+              <a:t>Horizontal vs vertical microcode</a:t>
+            </a:r>
+          </a:p>
+        </p:txBody>
+      </p:sp>
+      <p:sp>
+        <p:nvSpPr>
+          <p:cNvPr id="3" name="Content Placeholder 2">
+            <a:extLst>
+              <a:ext uri="{FF2B5EF4-FFF2-40B4-BE49-F238E27FC236}">
+                <a16:creationId xmlns:a16="http://schemas.microsoft.com/office/drawing/2014/main" id="{6C808A63-9767-416E-9B77-A218310F5425}"/>
+              </a:ext>
+            </a:extLst>
+          </p:cNvPr>
+          <p:cNvSpPr>
+            <a:spLocks noGrp="1"/>
+          </p:cNvSpPr>
+          <p:nvPr>
+            <p:ph idx="1"/>
+          </p:nvPr>
+        </p:nvSpPr>
+        <p:spPr/>
+        <p:txBody>
+          <a:bodyPr>
+            <a:normAutofit fontScale="92500" lnSpcReduction="20000"/>
+          </a:bodyPr>
+          <a:lstStyle/>
+          <a:p>
+            <a:pPr marL="0" indent="0">
+              <a:buNone/>
+            </a:pPr>
+            <a:r>
+              <a:rPr lang="en-US" dirty="0">
+                <a:solidFill>
+                  <a:srgbClr val="FFC000"/>
+                </a:solidFill>
+              </a:rPr>
+              <a:t>Horizontal microcode:</a:t>
+            </a:r>
+          </a:p>
+          <a:p>
+            <a:r>
+              <a:rPr lang="en-US" dirty="0"/>
+              <a:t>One bit per signal (one-hot encoding in control word)</a:t>
+            </a:r>
+          </a:p>
+          <a:p>
+            <a:r>
+              <a:rPr lang="en-US" dirty="0"/>
+              <a:t>Wide control word</a:t>
+            </a:r>
+          </a:p>
+          <a:p>
+            <a:r>
+              <a:rPr lang="en-US" dirty="0"/>
+              <a:t>No decoding required</a:t>
+            </a:r>
+          </a:p>
+          <a:p>
+            <a:r>
+              <a:rPr lang="en-US" dirty="0"/>
+              <a:t>Example: 16 different </a:t>
+            </a:r>
+            <a:r>
+              <a:rPr lang="en-US" dirty="0" err="1"/>
+              <a:t>alu</a:t>
+            </a:r>
+            <a:r>
+              <a:rPr lang="en-US" dirty="0"/>
+              <a:t> operations will have 16 bits in the control word</a:t>
+            </a:r>
+          </a:p>
+          <a:p>
+            <a:pPr marL="0" indent="0">
+              <a:buNone/>
+            </a:pPr>
+            <a:r>
+              <a:rPr lang="en-US" dirty="0">
+                <a:solidFill>
+                  <a:srgbClr val="FFC000"/>
+                </a:solidFill>
+              </a:rPr>
+              <a:t>Vertical microcode:</a:t>
+            </a:r>
+          </a:p>
+          <a:p>
+            <a:r>
+              <a:rPr lang="en-US" dirty="0"/>
+              <a:t>Signals are grouped into fields</a:t>
+            </a:r>
+          </a:p>
+          <a:p>
+            <a:r>
+              <a:rPr lang="en-US" dirty="0"/>
+              <a:t>Requires decoder between ROM and </a:t>
+            </a:r>
+            <a:r>
+              <a:rPr lang="en-US" dirty="0" err="1"/>
+              <a:t>datapath</a:t>
+            </a:r>
+            <a:endParaRPr lang="en-US" dirty="0"/>
+          </a:p>
+          <a:p>
+            <a:r>
+              <a:rPr lang="en-US" dirty="0"/>
+              <a:t>Example: 16 different </a:t>
+            </a:r>
+            <a:r>
+              <a:rPr lang="en-US" dirty="0" err="1"/>
+              <a:t>alu</a:t>
+            </a:r>
+            <a:r>
+              <a:rPr lang="en-US" dirty="0"/>
+              <a:t> ops encoded in 4-bits in control word</a:t>
+            </a:r>
+          </a:p>
+        </p:txBody>
+      </p:sp>
+      <p:sp>
+        <p:nvSpPr>
+          <p:cNvPr id="4" name="Date Placeholder 3">
+            <a:extLst>
+              <a:ext uri="{FF2B5EF4-FFF2-40B4-BE49-F238E27FC236}">
+                <a16:creationId xmlns:a16="http://schemas.microsoft.com/office/drawing/2014/main" id="{94493B57-A9A8-48A3-960D-F50717E55D59}"/>
+              </a:ext>
+            </a:extLst>
+          </p:cNvPr>
+          <p:cNvSpPr>
+            <a:spLocks noGrp="1"/>
+          </p:cNvSpPr>
+          <p:nvPr>
+            <p:ph type="dt" sz="half" idx="10"/>
+          </p:nvPr>
+        </p:nvSpPr>
+        <p:spPr/>
+        <p:txBody>
+          <a:bodyPr/>
+          <a:lstStyle/>
+          <a:p>
+            <a:pPr>
+              <a:defRPr/>
+            </a:pPr>
+            <a:r>
+              <a:rPr lang="en-US"/>
+              <a:t>21/12/2020</a:t>
+            </a:r>
+          </a:p>
+        </p:txBody>
+      </p:sp>
+      <p:sp>
+        <p:nvSpPr>
+          <p:cNvPr id="5" name="Slide Number Placeholder 4">
+            <a:extLst>
+              <a:ext uri="{FF2B5EF4-FFF2-40B4-BE49-F238E27FC236}">
+                <a16:creationId xmlns:a16="http://schemas.microsoft.com/office/drawing/2014/main" id="{08DD22E3-52C0-483F-A7FE-2B6BFB310FAD}"/>
+              </a:ext>
+            </a:extLst>
+          </p:cNvPr>
+          <p:cNvSpPr>
+            <a:spLocks noGrp="1"/>
+          </p:cNvSpPr>
+          <p:nvPr>
+            <p:ph type="sldNum" sz="quarter" idx="12"/>
+          </p:nvPr>
+        </p:nvSpPr>
+        <p:spPr/>
+        <p:txBody>
+          <a:bodyPr/>
+          <a:lstStyle/>
+          <a:p>
+            <a:pPr>
+              <a:defRPr/>
+            </a:pPr>
+            <a:fld id="{CA887A73-1AE0-46F8-856A-18EA1CF30A1B}" type="slidenum">
+              <a:rPr lang="en-US" altLang="en-US" smtClean="0"/>
+              <a:pPr>
+                <a:defRPr/>
+              </a:pPr>
+              <a:t>25</a:t>
+            </a:fld>
+            <a:endParaRPr lang="en-US" altLang="en-US"/>
+          </a:p>
+        </p:txBody>
+      </p:sp>
+    </p:spTree>
+    <p:extLst>
+      <p:ext uri="{BB962C8B-B14F-4D97-AF65-F5344CB8AC3E}">
+        <p14:creationId xmlns:p14="http://schemas.microsoft.com/office/powerpoint/2010/main" val="1711726688"/>
+      </p:ext>
+    </p:extLst>
+  </p:cSld>
+  <p:clrMapOvr>
+    <a:masterClrMapping/>
+  </p:clrMapOvr>
+  <p:timing>
+    <p:tnLst>
+      <p:par>
+        <p:cTn id="1" dur="indefinite" restart="never" nodeType="tmRoot">
+          <p:childTnLst>
+            <p:seq concurrent="1" nextAc="seek">
+              <p:cTn id="2" dur="indefinite" nodeType="mainSeq">
+                <p:childTnLst>
+                  <p:par>
+                    <p:cTn id="3" fill="hold">
+                      <p:stCondLst>
+                        <p:cond delay="indefinite"/>
+                      </p:stCondLst>
+                      <p:childTnLst>
+                        <p:par>
+                          <p:cTn id="4" fill="hold">
+                            <p:stCondLst>
+                              <p:cond delay="0"/>
+                            </p:stCondLst>
+                            <p:childTnLst>
+                              <p:par>
+                                <p:cTn id="5" presetID="1" presetClass="entr" presetSubtype="0" fill="hold" grpId="0" nodeType="clickEffect">
+                                  <p:stCondLst>
+                                    <p:cond delay="0"/>
+                                  </p:stCondLst>
+                                  <p:childTnLst>
+                                    <p:set>
+                                      <p:cBhvr>
+                                        <p:cTn id="6" dur="1" fill="hold">
+                                          <p:stCondLst>
+                                            <p:cond delay="0"/>
+                                          </p:stCondLst>
+                                        </p:cTn>
+                                        <p:tgtEl>
+                                          <p:spTgt spid="3">
+                                            <p:txEl>
+                                              <p:pRg st="0" end="0"/>
+                                            </p:txEl>
+                                          </p:spTgt>
+                                        </p:tgtEl>
+                                        <p:attrNameLst>
+                                          <p:attrName>style.visibility</p:attrName>
+                                        </p:attrNameLst>
+                                      </p:cBhvr>
+                                      <p:to>
+                                        <p:strVal val="visible"/>
+                                      </p:to>
+                                    </p:set>
+                                  </p:childTnLst>
+                                </p:cTn>
+                              </p:par>
+                            </p:childTnLst>
+                          </p:cTn>
+                        </p:par>
+                      </p:childTnLst>
+                    </p:cTn>
+                  </p:par>
+                  <p:par>
+                    <p:cTn id="7" fill="hold">
+                      <p:stCondLst>
+                        <p:cond delay="indefinite"/>
+                      </p:stCondLst>
+                      <p:childTnLst>
+                        <p:par>
+                          <p:cTn id="8" fill="hold">
+                            <p:stCondLst>
+                              <p:cond delay="0"/>
+                            </p:stCondLst>
+                            <p:childTnLst>
+                              <p:par>
+                                <p:cTn id="9" presetID="1" presetClass="entr" presetSubtype="0" fill="hold" grpId="0" nodeType="clickEffect">
+                                  <p:stCondLst>
+                                    <p:cond delay="0"/>
+                                  </p:stCondLst>
+                                  <p:childTnLst>
+                                    <p:set>
+                                      <p:cBhvr>
+                                        <p:cTn id="10" dur="1" fill="hold">
+                                          <p:stCondLst>
+                                            <p:cond delay="0"/>
+                                          </p:stCondLst>
+                                        </p:cTn>
+                                        <p:tgtEl>
+                                          <p:spTgt spid="3">
+                                            <p:txEl>
+                                              <p:pRg st="1" end="1"/>
+                                            </p:txEl>
+                                          </p:spTgt>
+                                        </p:tgtEl>
+                                        <p:attrNameLst>
+                                          <p:attrName>style.visibility</p:attrName>
+                                        </p:attrNameLst>
+                                      </p:cBhvr>
+                                      <p:to>
+                                        <p:strVal val="visible"/>
+                                      </p:to>
+                                    </p:set>
+                                  </p:childTnLst>
+                                </p:cTn>
+                              </p:par>
+                            </p:childTnLst>
+                          </p:cTn>
+                        </p:par>
+                      </p:childTnLst>
+                    </p:cTn>
+                  </p:par>
+                  <p:par>
+                    <p:cTn id="11" fill="hold">
+                      <p:stCondLst>
+                        <p:cond delay="indefinite"/>
+                      </p:stCondLst>
+                      <p:childTnLst>
+                        <p:par>
+                          <p:cTn id="12" fill="hold">
+                            <p:stCondLst>
+                              <p:cond delay="0"/>
+                            </p:stCondLst>
+                            <p:childTnLst>
+                              <p:par>
+                                <p:cTn id="13" presetID="1" presetClass="entr" presetSubtype="0" fill="hold" grpId="0" nodeType="clickEffect">
+                                  <p:stCondLst>
+                                    <p:cond delay="0"/>
+                                  </p:stCondLst>
+                                  <p:childTnLst>
+                                    <p:set>
+                                      <p:cBhvr>
+                                        <p:cTn id="14" dur="1" fill="hold">
+                                          <p:stCondLst>
+                                            <p:cond delay="0"/>
+                                          </p:stCondLst>
+                                        </p:cTn>
+                                        <p:tgtEl>
+                                          <p:spTgt spid="3">
+                                            <p:txEl>
+                                              <p:pRg st="2" end="2"/>
+                                            </p:txEl>
+                                          </p:spTgt>
+                                        </p:tgtEl>
+                                        <p:attrNameLst>
+                                          <p:attrName>style.visibility</p:attrName>
+                                        </p:attrNameLst>
+                                      </p:cBhvr>
+                                      <p:to>
+                                        <p:strVal val="visible"/>
+                                      </p:to>
+                                    </p:set>
+                                  </p:childTnLst>
+                                </p:cTn>
+                              </p:par>
+                            </p:childTnLst>
+                          </p:cTn>
+                        </p:par>
+                      </p:childTnLst>
+                    </p:cTn>
+                  </p:par>
+                  <p:par>
+                    <p:cTn id="15" fill="hold">
+                      <p:stCondLst>
+                        <p:cond delay="indefinite"/>
+                      </p:stCondLst>
+                      <p:childTnLst>
+                        <p:par>
+                          <p:cTn id="16" fill="hold">
+                            <p:stCondLst>
+                              <p:cond delay="0"/>
+                            </p:stCondLst>
+                            <p:childTnLst>
+                              <p:par>
+                                <p:cTn id="17" presetID="1" presetClass="entr" presetSubtype="0" fill="hold" grpId="0" nodeType="clickEffect">
+                                  <p:stCondLst>
+                                    <p:cond delay="0"/>
+                                  </p:stCondLst>
+                                  <p:childTnLst>
+                                    <p:set>
+                                      <p:cBhvr>
+                                        <p:cTn id="18" dur="1" fill="hold">
+                                          <p:stCondLst>
+                                            <p:cond delay="0"/>
+                                          </p:stCondLst>
+                                        </p:cTn>
+                                        <p:tgtEl>
+                                          <p:spTgt spid="3">
+                                            <p:txEl>
+                                              <p:pRg st="3" end="3"/>
+                                            </p:txEl>
+                                          </p:spTgt>
+                                        </p:tgtEl>
+                                        <p:attrNameLst>
+                                          <p:attrName>style.visibility</p:attrName>
+                                        </p:attrNameLst>
+                                      </p:cBhvr>
+                                      <p:to>
+                                        <p:strVal val="visible"/>
+                                      </p:to>
+                                    </p:set>
+                                  </p:childTnLst>
+                                </p:cTn>
+                              </p:par>
+                            </p:childTnLst>
+                          </p:cTn>
+                        </p:par>
+                      </p:childTnLst>
+                    </p:cTn>
+                  </p:par>
+                  <p:par>
+                    <p:cTn id="19" fill="hold">
+                      <p:stCondLst>
+                        <p:cond delay="indefinite"/>
+                      </p:stCondLst>
+                      <p:childTnLst>
+                        <p:par>
+                          <p:cTn id="20" fill="hold">
+                            <p:stCondLst>
+                              <p:cond delay="0"/>
+                            </p:stCondLst>
+                            <p:childTnLst>
+                              <p:par>
+                                <p:cTn id="21" presetID="1" presetClass="entr" presetSubtype="0" fill="hold" grpId="0" nodeType="clickEffect">
+                                  <p:stCondLst>
+                                    <p:cond delay="0"/>
+                                  </p:stCondLst>
+                                  <p:childTnLst>
+                                    <p:set>
+                                      <p:cBhvr>
+                                        <p:cTn id="22" dur="1" fill="hold">
+                                          <p:stCondLst>
+                                            <p:cond delay="0"/>
+                                          </p:stCondLst>
+                                        </p:cTn>
+                                        <p:tgtEl>
+                                          <p:spTgt spid="3">
+                                            <p:txEl>
+                                              <p:pRg st="4" end="4"/>
+                                            </p:txEl>
+                                          </p:spTgt>
+                                        </p:tgtEl>
+                                        <p:attrNameLst>
+                                          <p:attrName>style.visibility</p:attrName>
+                                        </p:attrNameLst>
+                                      </p:cBhvr>
+                                      <p:to>
+                                        <p:strVal val="visible"/>
+                                      </p:to>
+                                    </p:set>
+                                  </p:childTnLst>
+                                </p:cTn>
+                              </p:par>
+                            </p:childTnLst>
+                          </p:cTn>
+                        </p:par>
+                      </p:childTnLst>
+                    </p:cTn>
+                  </p:par>
+                  <p:par>
+                    <p:cTn id="23" fill="hold">
+                      <p:stCondLst>
+                        <p:cond delay="indefinite"/>
+                      </p:stCondLst>
+                      <p:childTnLst>
+                        <p:par>
+                          <p:cTn id="24" fill="hold">
+                            <p:stCondLst>
+                              <p:cond delay="0"/>
+                            </p:stCondLst>
+                            <p:childTnLst>
+                              <p:par>
+                                <p:cTn id="25" presetID="1" presetClass="entr" presetSubtype="0" fill="hold" grpId="0" nodeType="clickEffect">
+                                  <p:stCondLst>
+                                    <p:cond delay="0"/>
+                                  </p:stCondLst>
+                                  <p:childTnLst>
+                                    <p:set>
+                                      <p:cBhvr>
+                                        <p:cTn id="26" dur="1" fill="hold">
+                                          <p:stCondLst>
+                                            <p:cond delay="0"/>
+                                          </p:stCondLst>
+                                        </p:cTn>
+                                        <p:tgtEl>
+                                          <p:spTgt spid="3">
+                                            <p:txEl>
+                                              <p:pRg st="5" end="5"/>
+                                            </p:txEl>
+                                          </p:spTgt>
+                                        </p:tgtEl>
+                                        <p:attrNameLst>
+                                          <p:attrName>style.visibility</p:attrName>
+                                        </p:attrNameLst>
+                                      </p:cBhvr>
+                                      <p:to>
+                                        <p:strVal val="visible"/>
+                                      </p:to>
+                                    </p:set>
+                                  </p:childTnLst>
+                                </p:cTn>
+                              </p:par>
+                            </p:childTnLst>
+                          </p:cTn>
+                        </p:par>
+                      </p:childTnLst>
+                    </p:cTn>
+                  </p:par>
+                  <p:par>
+                    <p:cTn id="27" fill="hold">
+                      <p:stCondLst>
+                        <p:cond delay="indefinite"/>
+                      </p:stCondLst>
+                      <p:childTnLst>
+                        <p:par>
+                          <p:cTn id="28" fill="hold">
+                            <p:stCondLst>
+                              <p:cond delay="0"/>
+                            </p:stCondLst>
+                            <p:childTnLst>
+                              <p:par>
+                                <p:cTn id="29" presetID="1" presetClass="entr" presetSubtype="0" fill="hold" grpId="0" nodeType="clickEffect">
+                                  <p:stCondLst>
+                                    <p:cond delay="0"/>
+                                  </p:stCondLst>
+                                  <p:childTnLst>
+                                    <p:set>
+                                      <p:cBhvr>
+                                        <p:cTn id="30" dur="1" fill="hold">
+                                          <p:stCondLst>
+                                            <p:cond delay="0"/>
+                                          </p:stCondLst>
+                                        </p:cTn>
+                                        <p:tgtEl>
+                                          <p:spTgt spid="3">
+                                            <p:txEl>
+                                              <p:pRg st="6" end="6"/>
+                                            </p:txEl>
+                                          </p:spTgt>
+                                        </p:tgtEl>
+                                        <p:attrNameLst>
+                                          <p:attrName>style.visibility</p:attrName>
+                                        </p:attrNameLst>
+                                      </p:cBhvr>
+                                      <p:to>
+                                        <p:strVal val="visible"/>
+                                      </p:to>
+                                    </p:set>
+                                  </p:childTnLst>
+                                </p:cTn>
+                              </p:par>
+                            </p:childTnLst>
+                          </p:cTn>
+                        </p:par>
+                      </p:childTnLst>
+                    </p:cTn>
+                  </p:par>
+                  <p:par>
+                    <p:cTn id="31" fill="hold">
+                      <p:stCondLst>
+                        <p:cond delay="indefinite"/>
+                      </p:stCondLst>
+                      <p:childTnLst>
+                        <p:par>
+                          <p:cTn id="32" fill="hold">
+                            <p:stCondLst>
+                              <p:cond delay="0"/>
+                            </p:stCondLst>
+                            <p:childTnLst>
+                              <p:par>
+                                <p:cTn id="33" presetID="1" presetClass="entr" presetSubtype="0" fill="hold" grpId="0" nodeType="clickEffect">
+                                  <p:stCondLst>
+                                    <p:cond delay="0"/>
+                                  </p:stCondLst>
+                                  <p:childTnLst>
+                                    <p:set>
+                                      <p:cBhvr>
+                                        <p:cTn id="34" dur="1" fill="hold">
+                                          <p:stCondLst>
+                                            <p:cond delay="0"/>
+                                          </p:stCondLst>
+                                        </p:cTn>
+                                        <p:tgtEl>
+                                          <p:spTgt spid="3">
+                                            <p:txEl>
+                                              <p:pRg st="7" end="7"/>
+                                            </p:txEl>
+                                          </p:spTgt>
+                                        </p:tgtEl>
+                                        <p:attrNameLst>
+                                          <p:attrName>style.visibility</p:attrName>
+                                        </p:attrNameLst>
+                                      </p:cBhvr>
+                                      <p:to>
+                                        <p:strVal val="visible"/>
+                                      </p:to>
+                                    </p:set>
+                                  </p:childTnLst>
+                                </p:cTn>
+                              </p:par>
+                            </p:childTnLst>
+                          </p:cTn>
+                        </p:par>
+                      </p:childTnLst>
+                    </p:cTn>
+                  </p:par>
+                  <p:par>
+                    <p:cTn id="35" fill="hold">
+                      <p:stCondLst>
+                        <p:cond delay="indefinite"/>
+                      </p:stCondLst>
+                      <p:childTnLst>
+                        <p:par>
+                          <p:cTn id="36" fill="hold">
+                            <p:stCondLst>
+                              <p:cond delay="0"/>
+                            </p:stCondLst>
+                            <p:childTnLst>
+                              <p:par>
+                                <p:cTn id="37" presetID="1" presetClass="entr" presetSubtype="0" fill="hold" grpId="0" nodeType="clickEffect">
+                                  <p:stCondLst>
+                                    <p:cond delay="0"/>
+                                  </p:stCondLst>
+                                  <p:childTnLst>
+                                    <p:set>
+                                      <p:cBhvr>
+                                        <p:cTn id="38" dur="1" fill="hold">
+                                          <p:stCondLst>
+                                            <p:cond delay="0"/>
+                                          </p:stCondLst>
+                                        </p:cTn>
+                                        <p:tgtEl>
+                                          <p:spTgt spid="3">
+                                            <p:txEl>
+                                              <p:pRg st="8" end="8"/>
+                                            </p:txEl>
+                                          </p:spTgt>
+                                        </p:tgtEl>
+                                        <p:attrNameLst>
+                                          <p:attrName>style.visibility</p:attrName>
+                                        </p:attrNameLst>
+                                      </p:cBhvr>
+                                      <p:to>
+                                        <p:strVal val="visible"/>
+                                      </p:to>
+                                    </p:set>
+                                  </p:childTnLst>
+                                </p:cTn>
+                              </p:par>
+                            </p:childTnLst>
+                          </p:cTn>
+                        </p:par>
+                      </p:childTnLst>
+                    </p:cTn>
+                  </p:par>
+                </p:childTnLst>
+              </p:cTn>
+              <p:prevCondLst>
+                <p:cond evt="onPrev" delay="0">
+                  <p:tgtEl>
+                    <p:sldTgt/>
+                  </p:tgtEl>
+                </p:cond>
+              </p:prevCondLst>
+              <p:nextCondLst>
+                <p:cond evt="onNext" delay="0">
+                  <p:tgtEl>
+                    <p:sldTgt/>
+                  </p:tgtEl>
+                </p:cond>
+              </p:nextCondLst>
+            </p:seq>
+          </p:childTnLst>
+        </p:cTn>
+      </p:par>
+    </p:tnLst>
+    <p:bldLst>
+      <p:bldP spid="3" grpId="0" build="p"/>
+    </p:bldLst>
+  </p:timing>
+</p:sld>
+</file>
+
+<file path=ppt/slides/slide26.xml><?xml version="1.0" encoding="utf-8"?>
+<p:sld xmlns:a="http://schemas.openxmlformats.org/drawingml/2006/main" xmlns:r="http://schemas.openxmlformats.org/officeDocument/2006/relationships" xmlns:p="http://schemas.openxmlformats.org/presentationml/2006/main">
+  <p:cSld>
+    <p:spTree>
+      <p:nvGrpSpPr>
+        <p:cNvPr id="1" name=""/>
+        <p:cNvGrpSpPr/>
+        <p:nvPr/>
+      </p:nvGrpSpPr>
+      <p:grpSpPr>
+        <a:xfrm>
+          <a:off x="0" y="0"/>
+          <a:ext cx="0" cy="0"/>
+          <a:chOff x="0" y="0"/>
+          <a:chExt cx="0" cy="0"/>
+        </a:xfrm>
+      </p:grpSpPr>
+      <p:sp>
+        <p:nvSpPr>
+          <p:cNvPr id="2" name="Title 1">
+            <a:extLst>
+              <a:ext uri="{FF2B5EF4-FFF2-40B4-BE49-F238E27FC236}">
+                <a16:creationId xmlns:a16="http://schemas.microsoft.com/office/drawing/2014/main" id="{E4441D97-8700-46A6-B929-1500887A4462}"/>
+              </a:ext>
+            </a:extLst>
+          </p:cNvPr>
+          <p:cNvSpPr>
+            <a:spLocks noGrp="1"/>
+          </p:cNvSpPr>
+          <p:nvPr>
+            <p:ph type="title"/>
+          </p:nvPr>
+        </p:nvSpPr>
+        <p:spPr/>
+        <p:txBody>
+          <a:bodyPr/>
+          <a:lstStyle/>
+          <a:p>
+            <a:r>
+              <a:rPr lang="en-US" dirty="0"/>
+              <a:t>Example </a:t>
+            </a:r>
+            <a:r>
+              <a:rPr lang="en-US" dirty="0" err="1"/>
+              <a:t>microcoded</a:t>
+            </a:r>
+            <a:r>
+              <a:rPr lang="en-US" dirty="0"/>
+              <a:t> RISC-V implementation</a:t>
+            </a:r>
+          </a:p>
+        </p:txBody>
+      </p:sp>
+      <p:pic>
+        <p:nvPicPr>
+          <p:cNvPr id="8" name="Content Placeholder 7">
+            <a:extLst>
+              <a:ext uri="{FF2B5EF4-FFF2-40B4-BE49-F238E27FC236}">
+                <a16:creationId xmlns:a16="http://schemas.microsoft.com/office/drawing/2014/main" id="{9011D8FF-54A9-4A24-82F9-832D84B26CB4}"/>
+              </a:ext>
+            </a:extLst>
+          </p:cNvPr>
+          <p:cNvPicPr>
+            <a:picLocks noGrp="1" noChangeAspect="1"/>
+          </p:cNvPicPr>
+          <p:nvPr>
+            <p:ph idx="1"/>
+          </p:nvPr>
+        </p:nvPicPr>
+        <p:blipFill>
+          <a:blip r:embed="rId2"/>
+          <a:stretch>
+            <a:fillRect/>
+          </a:stretch>
+        </p:blipFill>
+        <p:spPr>
+          <a:xfrm>
+            <a:off x="258596" y="1446213"/>
+            <a:ext cx="8626808" cy="5014912"/>
+          </a:xfrm>
+          <a:prstGeom prst="rect">
+            <a:avLst/>
+          </a:prstGeom>
+        </p:spPr>
+      </p:pic>
+      <p:sp>
+        <p:nvSpPr>
+          <p:cNvPr id="4" name="Date Placeholder 3">
+            <a:extLst>
+              <a:ext uri="{FF2B5EF4-FFF2-40B4-BE49-F238E27FC236}">
+                <a16:creationId xmlns:a16="http://schemas.microsoft.com/office/drawing/2014/main" id="{0EB01F9E-F45D-4716-B641-776ADC23A1B1}"/>
+              </a:ext>
+            </a:extLst>
+          </p:cNvPr>
+          <p:cNvSpPr>
+            <a:spLocks noGrp="1"/>
+          </p:cNvSpPr>
+          <p:nvPr>
+            <p:ph type="dt" sz="half" idx="10"/>
+          </p:nvPr>
+        </p:nvSpPr>
+        <p:spPr/>
+        <p:txBody>
+          <a:bodyPr/>
+          <a:lstStyle/>
+          <a:p>
+            <a:pPr>
+              <a:defRPr/>
+            </a:pPr>
+            <a:r>
+              <a:rPr lang="en-US"/>
+              <a:t>21/12/2020</a:t>
+            </a:r>
+          </a:p>
+        </p:txBody>
+      </p:sp>
+      <p:sp>
+        <p:nvSpPr>
+          <p:cNvPr id="5" name="Slide Number Placeholder 4">
+            <a:extLst>
+              <a:ext uri="{FF2B5EF4-FFF2-40B4-BE49-F238E27FC236}">
+                <a16:creationId xmlns:a16="http://schemas.microsoft.com/office/drawing/2014/main" id="{77CAC272-6821-414D-BF97-5AA65FFC6A46}"/>
+              </a:ext>
+            </a:extLst>
+          </p:cNvPr>
+          <p:cNvSpPr>
+            <a:spLocks noGrp="1"/>
+          </p:cNvSpPr>
+          <p:nvPr>
+            <p:ph type="sldNum" sz="quarter" idx="12"/>
+          </p:nvPr>
+        </p:nvSpPr>
+        <p:spPr/>
+        <p:txBody>
+          <a:bodyPr/>
+          <a:lstStyle/>
+          <a:p>
+            <a:pPr>
+              <a:defRPr/>
+            </a:pPr>
+            <a:fld id="{CA887A73-1AE0-46F8-856A-18EA1CF30A1B}" type="slidenum">
+              <a:rPr lang="en-US" altLang="en-US" smtClean="0"/>
+              <a:pPr>
+                <a:defRPr/>
+              </a:pPr>
+              <a:t>26</a:t>
+            </a:fld>
+            <a:endParaRPr lang="en-US" altLang="en-US"/>
+          </a:p>
+        </p:txBody>
+      </p:sp>
+    </p:spTree>
+    <p:extLst>
+      <p:ext uri="{BB962C8B-B14F-4D97-AF65-F5344CB8AC3E}">
+        <p14:creationId xmlns:p14="http://schemas.microsoft.com/office/powerpoint/2010/main" val="3686971163"/>
+      </p:ext>
+    </p:extLst>
+  </p:cSld>
+  <p:clrMapOvr>
+    <a:masterClrMapping/>
+  </p:clrMapOvr>
+</p:sld>
+</file>
+
+<file path=ppt/slides/slide27.xml><?xml version="1.0" encoding="utf-8"?>
+<p:sld xmlns:a="http://schemas.openxmlformats.org/drawingml/2006/main" xmlns:r="http://schemas.openxmlformats.org/officeDocument/2006/relationships" xmlns:p="http://schemas.openxmlformats.org/presentationml/2006/main">
+  <p:cSld>
+    <p:spTree>
+      <p:nvGrpSpPr>
+        <p:cNvPr id="1" name=""/>
+        <p:cNvGrpSpPr/>
+        <p:nvPr/>
+      </p:nvGrpSpPr>
+      <p:grpSpPr>
+        <a:xfrm>
+          <a:off x="0" y="0"/>
+          <a:ext cx="0" cy="0"/>
+          <a:chOff x="0" y="0"/>
+          <a:chExt cx="0" cy="0"/>
+        </a:xfrm>
+      </p:grpSpPr>
+      <p:sp>
+        <p:nvSpPr>
+          <p:cNvPr id="2" name="Title 1">
+            <a:extLst>
+              <a:ext uri="{FF2B5EF4-FFF2-40B4-BE49-F238E27FC236}">
+                <a16:creationId xmlns:a16="http://schemas.microsoft.com/office/drawing/2014/main" id="{EB879542-6697-4D04-884C-BD9D62FF5C10}"/>
+              </a:ext>
+            </a:extLst>
+          </p:cNvPr>
+          <p:cNvSpPr>
+            <a:spLocks noGrp="1"/>
+          </p:cNvSpPr>
+          <p:nvPr>
+            <p:ph type="title"/>
+          </p:nvPr>
+        </p:nvSpPr>
+        <p:spPr/>
+        <p:txBody>
+          <a:bodyPr/>
+          <a:lstStyle/>
+          <a:p>
+            <a:r>
+              <a:rPr lang="en-US" dirty="0"/>
+              <a:t>Is </a:t>
+            </a:r>
+            <a:r>
+              <a:rPr lang="en-US" dirty="0" err="1"/>
+              <a:t>microcoding</a:t>
+            </a:r>
+            <a:r>
+              <a:rPr lang="en-US" dirty="0"/>
+              <a:t> relevant today?</a:t>
+            </a:r>
+          </a:p>
+        </p:txBody>
+      </p:sp>
+      <p:sp>
+        <p:nvSpPr>
+          <p:cNvPr id="3" name="Content Placeholder 2">
+            <a:extLst>
+              <a:ext uri="{FF2B5EF4-FFF2-40B4-BE49-F238E27FC236}">
+                <a16:creationId xmlns:a16="http://schemas.microsoft.com/office/drawing/2014/main" id="{10A872B4-7C4B-4F5C-B346-C9E6733F722D}"/>
+              </a:ext>
+            </a:extLst>
+          </p:cNvPr>
+          <p:cNvSpPr>
+            <a:spLocks noGrp="1"/>
+          </p:cNvSpPr>
+          <p:nvPr>
+            <p:ph idx="1"/>
+          </p:nvPr>
+        </p:nvSpPr>
+        <p:spPr/>
+        <p:txBody>
+          <a:bodyPr>
+            <a:normAutofit fontScale="85000" lnSpcReduction="10000"/>
+          </a:bodyPr>
+          <a:lstStyle/>
+          <a:p>
+            <a:r>
+              <a:rPr lang="en-US" dirty="0"/>
+              <a:t>CISC legacy: modern Intel/AMD processors are CISC outside, RISC inside</a:t>
+            </a:r>
+          </a:p>
+          <a:p>
+            <a:pPr lvl="1"/>
+            <a:r>
+              <a:rPr lang="en-US" dirty="0"/>
+              <a:t>Provide complex instructions in ISA, which are actually decoded into simpler RISC-like microoperation sequences</a:t>
+            </a:r>
+          </a:p>
+          <a:p>
+            <a:r>
+              <a:rPr lang="en-US" dirty="0"/>
+              <a:t>Patching hardware bugs: updates distributed via BIOS/OS upgrades to modify ROM (also called WCS – writable control store) to fix bugs</a:t>
+            </a:r>
+          </a:p>
+          <a:p>
+            <a:pPr lvl="1"/>
+            <a:r>
+              <a:rPr lang="en-US" dirty="0" err="1"/>
+              <a:t>Spectre</a:t>
+            </a:r>
+            <a:r>
+              <a:rPr lang="en-US" dirty="0"/>
+              <a:t> / meltdown mitigations from Intel</a:t>
+            </a:r>
+          </a:p>
+          <a:p>
+            <a:r>
+              <a:rPr lang="en-US" dirty="0"/>
+              <a:t>Managing complex system-level algorithms</a:t>
+            </a:r>
+          </a:p>
+          <a:p>
+            <a:pPr lvl="1"/>
+            <a:r>
+              <a:rPr lang="en-US" dirty="0"/>
+              <a:t>Boot sequences, frequency scaling and power management</a:t>
+            </a:r>
+          </a:p>
+          <a:p>
+            <a:r>
+              <a:rPr lang="en-US" dirty="0"/>
+              <a:t>Hybrid designs: Fast frequent path (hardwired and pipelined) + slow rare path (complex and </a:t>
+            </a:r>
+            <a:r>
+              <a:rPr lang="en-US" dirty="0" err="1"/>
+              <a:t>microcoded</a:t>
+            </a:r>
+            <a:r>
+              <a:rPr lang="en-US" dirty="0"/>
+              <a:t>)</a:t>
+            </a:r>
+          </a:p>
+        </p:txBody>
+      </p:sp>
+      <p:sp>
+        <p:nvSpPr>
+          <p:cNvPr id="4" name="Date Placeholder 3">
+            <a:extLst>
+              <a:ext uri="{FF2B5EF4-FFF2-40B4-BE49-F238E27FC236}">
+                <a16:creationId xmlns:a16="http://schemas.microsoft.com/office/drawing/2014/main" id="{1BF45115-CC17-48FD-B19B-A44A31756205}"/>
+              </a:ext>
+            </a:extLst>
+          </p:cNvPr>
+          <p:cNvSpPr>
+            <a:spLocks noGrp="1"/>
+          </p:cNvSpPr>
+          <p:nvPr>
+            <p:ph type="dt" sz="half" idx="10"/>
+          </p:nvPr>
+        </p:nvSpPr>
+        <p:spPr/>
+        <p:txBody>
+          <a:bodyPr/>
+          <a:lstStyle/>
+          <a:p>
+            <a:pPr>
+              <a:defRPr/>
+            </a:pPr>
+            <a:r>
+              <a:rPr lang="en-US"/>
+              <a:t>21/12/2020</a:t>
+            </a:r>
+          </a:p>
+        </p:txBody>
+      </p:sp>
+      <p:sp>
+        <p:nvSpPr>
+          <p:cNvPr id="5" name="Slide Number Placeholder 4">
+            <a:extLst>
+              <a:ext uri="{FF2B5EF4-FFF2-40B4-BE49-F238E27FC236}">
+                <a16:creationId xmlns:a16="http://schemas.microsoft.com/office/drawing/2014/main" id="{4F914484-F556-4A96-9A5A-7B0C26A0241D}"/>
+              </a:ext>
+            </a:extLst>
+          </p:cNvPr>
+          <p:cNvSpPr>
+            <a:spLocks noGrp="1"/>
+          </p:cNvSpPr>
+          <p:nvPr>
+            <p:ph type="sldNum" sz="quarter" idx="12"/>
+          </p:nvPr>
+        </p:nvSpPr>
+        <p:spPr/>
+        <p:txBody>
+          <a:bodyPr/>
+          <a:lstStyle/>
+          <a:p>
+            <a:pPr>
+              <a:defRPr/>
+            </a:pPr>
+            <a:fld id="{CA887A73-1AE0-46F8-856A-18EA1CF30A1B}" type="slidenum">
+              <a:rPr lang="en-US" altLang="en-US" smtClean="0"/>
+              <a:pPr>
+                <a:defRPr/>
+              </a:pPr>
+              <a:t>27</a:t>
+            </a:fld>
+            <a:endParaRPr lang="en-US" altLang="en-US"/>
+          </a:p>
+        </p:txBody>
+      </p:sp>
+    </p:spTree>
+    <p:extLst>
+      <p:ext uri="{BB962C8B-B14F-4D97-AF65-F5344CB8AC3E}">
+        <p14:creationId xmlns:p14="http://schemas.microsoft.com/office/powerpoint/2010/main" val="1364776854"/>
+      </p:ext>
+    </p:extLst>
+  </p:cSld>
+  <p:clrMapOvr>
+    <a:masterClrMapping/>
+  </p:clrMapOvr>
+  <p:timing>
+    <p:tnLst>
+      <p:par>
+        <p:cTn id="1" dur="indefinite" restart="never" nodeType="tmRoot">
+          <p:childTnLst>
+            <p:seq concurrent="1" nextAc="seek">
+              <p:cTn id="2" dur="indefinite" nodeType="mainSeq">
+                <p:childTnLst>
+                  <p:par>
+                    <p:cTn id="3" fill="hold">
+                      <p:stCondLst>
+                        <p:cond delay="indefinite"/>
+                      </p:stCondLst>
+                      <p:childTnLst>
+                        <p:par>
+                          <p:cTn id="4" fill="hold">
+                            <p:stCondLst>
+                              <p:cond delay="0"/>
+                            </p:stCondLst>
+                            <p:childTnLst>
+                              <p:par>
+                                <p:cTn id="5" presetID="1" presetClass="entr" presetSubtype="0" fill="hold" grpId="0" nodeType="clickEffect">
+                                  <p:stCondLst>
+                                    <p:cond delay="0"/>
+                                  </p:stCondLst>
+                                  <p:childTnLst>
+                                    <p:set>
+                                      <p:cBhvr>
+                                        <p:cTn id="6" dur="1" fill="hold">
+                                          <p:stCondLst>
+                                            <p:cond delay="0"/>
+                                          </p:stCondLst>
+                                        </p:cTn>
+                                        <p:tgtEl>
+                                          <p:spTgt spid="3">
+                                            <p:txEl>
+                                              <p:pRg st="0" end="0"/>
+                                            </p:txEl>
+                                          </p:spTgt>
+                                        </p:tgtEl>
+                                        <p:attrNameLst>
+                                          <p:attrName>style.visibility</p:attrName>
+                                        </p:attrNameLst>
+                                      </p:cBhvr>
+                                      <p:to>
+                                        <p:strVal val="visible"/>
+                                      </p:to>
+                                    </p:set>
+                                  </p:childTnLst>
+                                </p:cTn>
+                              </p:par>
+                            </p:childTnLst>
+                          </p:cTn>
+                        </p:par>
+                      </p:childTnLst>
+                    </p:cTn>
+                  </p:par>
+                  <p:par>
+                    <p:cTn id="7" fill="hold">
+                      <p:stCondLst>
+                        <p:cond delay="indefinite"/>
+                      </p:stCondLst>
+                      <p:childTnLst>
+                        <p:par>
+                          <p:cTn id="8" fill="hold">
+                            <p:stCondLst>
+                              <p:cond delay="0"/>
+                            </p:stCondLst>
+                            <p:childTnLst>
+                              <p:par>
+                                <p:cTn id="9" presetID="1" presetClass="entr" presetSubtype="0" fill="hold" grpId="0" nodeType="clickEffect">
+                                  <p:stCondLst>
+                                    <p:cond delay="0"/>
+                                  </p:stCondLst>
+                                  <p:childTnLst>
+                                    <p:set>
+                                      <p:cBhvr>
+                                        <p:cTn id="10" dur="1" fill="hold">
+                                          <p:stCondLst>
+                                            <p:cond delay="0"/>
+                                          </p:stCondLst>
+                                        </p:cTn>
+                                        <p:tgtEl>
+                                          <p:spTgt spid="3">
+                                            <p:txEl>
+                                              <p:pRg st="1" end="1"/>
+                                            </p:txEl>
+                                          </p:spTgt>
+                                        </p:tgtEl>
+                                        <p:attrNameLst>
+                                          <p:attrName>style.visibility</p:attrName>
+                                        </p:attrNameLst>
+                                      </p:cBhvr>
+                                      <p:to>
+                                        <p:strVal val="visible"/>
+                                      </p:to>
+                                    </p:set>
+                                  </p:childTnLst>
+                                </p:cTn>
+                              </p:par>
+                            </p:childTnLst>
+                          </p:cTn>
+                        </p:par>
+                      </p:childTnLst>
+                    </p:cTn>
+                  </p:par>
+                  <p:par>
+                    <p:cTn id="11" fill="hold">
+                      <p:stCondLst>
+                        <p:cond delay="indefinite"/>
+                      </p:stCondLst>
+                      <p:childTnLst>
+                        <p:par>
+                          <p:cTn id="12" fill="hold">
+                            <p:stCondLst>
+                              <p:cond delay="0"/>
+                            </p:stCondLst>
+                            <p:childTnLst>
+                              <p:par>
+                                <p:cTn id="13" presetID="1" presetClass="entr" presetSubtype="0" fill="hold" grpId="0" nodeType="clickEffect">
+                                  <p:stCondLst>
+                                    <p:cond delay="0"/>
+                                  </p:stCondLst>
+                                  <p:childTnLst>
+                                    <p:set>
+                                      <p:cBhvr>
+                                        <p:cTn id="14" dur="1" fill="hold">
+                                          <p:stCondLst>
+                                            <p:cond delay="0"/>
+                                          </p:stCondLst>
+                                        </p:cTn>
+                                        <p:tgtEl>
+                                          <p:spTgt spid="3">
+                                            <p:txEl>
+                                              <p:pRg st="2" end="2"/>
+                                            </p:txEl>
+                                          </p:spTgt>
+                                        </p:tgtEl>
+                                        <p:attrNameLst>
+                                          <p:attrName>style.visibility</p:attrName>
+                                        </p:attrNameLst>
+                                      </p:cBhvr>
+                                      <p:to>
+                                        <p:strVal val="visible"/>
+                                      </p:to>
+                                    </p:set>
+                                  </p:childTnLst>
+                                </p:cTn>
+                              </p:par>
+                            </p:childTnLst>
+                          </p:cTn>
+                        </p:par>
+                      </p:childTnLst>
+                    </p:cTn>
+                  </p:par>
+                  <p:par>
+                    <p:cTn id="15" fill="hold">
+                      <p:stCondLst>
+                        <p:cond delay="indefinite"/>
+                      </p:stCondLst>
+                      <p:childTnLst>
+                        <p:par>
+                          <p:cTn id="16" fill="hold">
+                            <p:stCondLst>
+                              <p:cond delay="0"/>
+                            </p:stCondLst>
+                            <p:childTnLst>
+                              <p:par>
+                                <p:cTn id="17" presetID="1" presetClass="entr" presetSubtype="0" fill="hold" grpId="0" nodeType="clickEffect">
+                                  <p:stCondLst>
+                                    <p:cond delay="0"/>
+                                  </p:stCondLst>
+                                  <p:childTnLst>
+                                    <p:set>
+                                      <p:cBhvr>
+                                        <p:cTn id="18" dur="1" fill="hold">
+                                          <p:stCondLst>
+                                            <p:cond delay="0"/>
+                                          </p:stCondLst>
+                                        </p:cTn>
+                                        <p:tgtEl>
+                                          <p:spTgt spid="3">
+                                            <p:txEl>
+                                              <p:pRg st="3" end="3"/>
+                                            </p:txEl>
+                                          </p:spTgt>
+                                        </p:tgtEl>
+                                        <p:attrNameLst>
+                                          <p:attrName>style.visibility</p:attrName>
+                                        </p:attrNameLst>
+                                      </p:cBhvr>
+                                      <p:to>
+                                        <p:strVal val="visible"/>
+                                      </p:to>
+                                    </p:set>
+                                  </p:childTnLst>
+                                </p:cTn>
+                              </p:par>
+                            </p:childTnLst>
+                          </p:cTn>
+                        </p:par>
+                      </p:childTnLst>
+                    </p:cTn>
+                  </p:par>
+                  <p:par>
+                    <p:cTn id="19" fill="hold">
+                      <p:stCondLst>
+                        <p:cond delay="indefinite"/>
+                      </p:stCondLst>
+                      <p:childTnLst>
+                        <p:par>
+                          <p:cTn id="20" fill="hold">
+                            <p:stCondLst>
+                              <p:cond delay="0"/>
+                            </p:stCondLst>
+                            <p:childTnLst>
+                              <p:par>
+                                <p:cTn id="21" presetID="1" presetClass="entr" presetSubtype="0" fill="hold" grpId="0" nodeType="clickEffect">
+                                  <p:stCondLst>
+                                    <p:cond delay="0"/>
+                                  </p:stCondLst>
+                                  <p:childTnLst>
+                                    <p:set>
+                                      <p:cBhvr>
+                                        <p:cTn id="22" dur="1" fill="hold">
+                                          <p:stCondLst>
+                                            <p:cond delay="0"/>
+                                          </p:stCondLst>
+                                        </p:cTn>
+                                        <p:tgtEl>
+                                          <p:spTgt spid="3">
+                                            <p:txEl>
+                                              <p:pRg st="4" end="4"/>
+                                            </p:txEl>
+                                          </p:spTgt>
+                                        </p:tgtEl>
+                                        <p:attrNameLst>
+                                          <p:attrName>style.visibility</p:attrName>
+                                        </p:attrNameLst>
+                                      </p:cBhvr>
+                                      <p:to>
+                                        <p:strVal val="visible"/>
+                                      </p:to>
+                                    </p:set>
+                                  </p:childTnLst>
+                                </p:cTn>
+                              </p:par>
+                            </p:childTnLst>
+                          </p:cTn>
+                        </p:par>
+                      </p:childTnLst>
+                    </p:cTn>
+                  </p:par>
+                  <p:par>
+                    <p:cTn id="23" fill="hold">
+                      <p:stCondLst>
+                        <p:cond delay="indefinite"/>
+                      </p:stCondLst>
+                      <p:childTnLst>
+                        <p:par>
+                          <p:cTn id="24" fill="hold">
+                            <p:stCondLst>
+                              <p:cond delay="0"/>
+                            </p:stCondLst>
+                            <p:childTnLst>
+                              <p:par>
+                                <p:cTn id="25" presetID="1" presetClass="entr" presetSubtype="0" fill="hold" grpId="0" nodeType="clickEffect">
+                                  <p:stCondLst>
+                                    <p:cond delay="0"/>
+                                  </p:stCondLst>
+                                  <p:childTnLst>
+                                    <p:set>
+                                      <p:cBhvr>
+                                        <p:cTn id="26" dur="1" fill="hold">
+                                          <p:stCondLst>
+                                            <p:cond delay="0"/>
+                                          </p:stCondLst>
+                                        </p:cTn>
+                                        <p:tgtEl>
+                                          <p:spTgt spid="3">
+                                            <p:txEl>
+                                              <p:pRg st="5" end="5"/>
+                                            </p:txEl>
+                                          </p:spTgt>
+                                        </p:tgtEl>
+                                        <p:attrNameLst>
+                                          <p:attrName>style.visibility</p:attrName>
+                                        </p:attrNameLst>
+                                      </p:cBhvr>
+                                      <p:to>
+                                        <p:strVal val="visible"/>
+                                      </p:to>
+                                    </p:set>
+                                  </p:childTnLst>
+                                </p:cTn>
+                              </p:par>
+                            </p:childTnLst>
+                          </p:cTn>
+                        </p:par>
+                      </p:childTnLst>
+                    </p:cTn>
+                  </p:par>
+                  <p:par>
+                    <p:cTn id="27" fill="hold">
+                      <p:stCondLst>
+                        <p:cond delay="indefinite"/>
+                      </p:stCondLst>
+                      <p:childTnLst>
+                        <p:par>
+                          <p:cTn id="28" fill="hold">
+                            <p:stCondLst>
+                              <p:cond delay="0"/>
+                            </p:stCondLst>
+                            <p:childTnLst>
+                              <p:par>
+                                <p:cTn id="29" presetID="1" presetClass="entr" presetSubtype="0" fill="hold" grpId="0" nodeType="clickEffect">
+                                  <p:stCondLst>
+                                    <p:cond delay="0"/>
+                                  </p:stCondLst>
+                                  <p:childTnLst>
+                                    <p:set>
+                                      <p:cBhvr>
+                                        <p:cTn id="30" dur="1" fill="hold">
+                                          <p:stCondLst>
+                                            <p:cond delay="0"/>
+                                          </p:stCondLst>
+                                        </p:cTn>
+                                        <p:tgtEl>
+                                          <p:spTgt spid="3">
+                                            <p:txEl>
+                                              <p:pRg st="6" end="6"/>
+                                            </p:txEl>
+                                          </p:spTgt>
+                                        </p:tgtEl>
+                                        <p:attrNameLst>
+                                          <p:attrName>style.visibility</p:attrName>
+                                        </p:attrNameLst>
+                                      </p:cBhvr>
+                                      <p:to>
+                                        <p:strVal val="visible"/>
+                                      </p:to>
+                                    </p:set>
+                                  </p:childTnLst>
+                                </p:cTn>
+                              </p:par>
+                            </p:childTnLst>
+                          </p:cTn>
+                        </p:par>
+                      </p:childTnLst>
+                    </p:cTn>
+                  </p:par>
+                </p:childTnLst>
+              </p:cTn>
+              <p:prevCondLst>
+                <p:cond evt="onPrev" delay="0">
+                  <p:tgtEl>
+                    <p:sldTgt/>
+                  </p:tgtEl>
+                </p:cond>
+              </p:prevCondLst>
+              <p:nextCondLst>
+                <p:cond evt="onNext" delay="0">
+                  <p:tgtEl>
+                    <p:sldTgt/>
+                  </p:tgtEl>
+                </p:cond>
+              </p:nextCondLst>
+            </p:seq>
+          </p:childTnLst>
+        </p:cTn>
+      </p:par>
+    </p:tnLst>
+    <p:bldLst>
+      <p:bldP spid="3" grpId="0" build="p"/>
+    </p:bldLst>
+  </p:timing>
+</p:sld>
+</file>
+
 <file path=ppt/slides/slide3.xml><?xml version="1.0" encoding="utf-8"?>
 <p:sld xmlns:a="http://schemas.openxmlformats.org/drawingml/2006/main" xmlns:r="http://schemas.openxmlformats.org/officeDocument/2006/relationships" xmlns:p="http://schemas.openxmlformats.org/presentationml/2006/main">
   <p:cSld>
@@ -13205,7 +19967,7 @@
           <a:p>
             <a:fld id="{B4B13859-67C5-4393-B6C2-556CF3F770C0}" type="datetime3">
               <a:rPr lang="en-US" smtClean="0"/>
-              <a:t>13 February 2026</a:t>
+              <a:t>16 February 2026</a:t>
             </a:fld>
             <a:endParaRPr lang="en-US"/>
           </a:p>
